--- a/exports/pptx/lessons/senior-module-02-panchabhuta/day-04-greek-comparison.pptx
+++ b/exports/pptx/lessons/senior-module-02-panchabhuta/day-04-greek-comparison.pptx
@@ -3482,7 +3482,297 @@
         </p:nvSpPr>
         <p:spPr>
           <a:xfrm>
-            <a:off x="634901" y="4773960"/>
+            <a:off x="406301" y="3069729"/>
+            <a:ext cx="8498026" cy="213271"/>
+          </a:xfrm>
+          <a:prstGeom prst="rect">
+            <a:avLst/>
+          </a:prstGeom>
+          <a:noFill/>
+          <a:ln/>
+        </p:spPr>
+        <p:txBody>
+          <a:bodyPr wrap="square" lIns="0" tIns="0" rIns="0" bIns="0" rtlCol="0" anchor="t"/>
+          <a:lstStyle/>
+          <a:p>
+            <a:pPr algn="l" indent="0" marL="0">
+              <a:lnSpc>
+                <a:spcPts val="1680"/>
+              </a:lnSpc>
+              <a:spcBef>
+                <a:spcPts val="300"/>
+              </a:spcBef>
+              <a:spcAft>
+                <a:spcPts val="300"/>
+              </a:spcAft>
+              <a:buNone/>
+            </a:pPr>
+            <a:r>
+              <a:rPr lang="en-US" sz="1200" i="1" dirty="0">
+                <a:solidFill>
+                  <a:srgbClr val="1A1A1A"/>
+                </a:solidFill>
+                <a:latin typeface="Georgia" pitchFamily="34" charset="0"/>
+                <a:ea typeface="Georgia" pitchFamily="34" charset="-122"/>
+                <a:cs typeface="Georgia" pitchFamily="34" charset="-120"/>
+              </a:rPr>
+              <a:t>Each row: Element · Aristotle's qualities.</a:t>
+            </a:r>
+            <a:endParaRPr lang="en-US" sz="1200" dirty="0"/>
+          </a:p>
+        </p:txBody>
+      </p:sp>
+      <p:sp>
+        <p:nvSpPr>
+          <p:cNvPr id="9" name="Text 7"/>
+          <p:cNvSpPr/>
+          <p:nvPr/>
+        </p:nvSpPr>
+        <p:spPr>
+          <a:xfrm>
+            <a:off x="634901" y="3371850"/>
+            <a:ext cx="8102798" cy="1257002"/>
+          </a:xfrm>
+          <a:prstGeom prst="rect">
+            <a:avLst/>
+          </a:prstGeom>
+          <a:noFill/>
+          <a:ln/>
+        </p:spPr>
+        <p:txBody>
+          <a:bodyPr wrap="square" lIns="0" tIns="0" rIns="0" bIns="0" rtlCol="0" anchor="t"/>
+          <a:lstStyle/>
+          <a:p>
+            <a:pPr algn="l" marL="342900" indent="-342900">
+              <a:lnSpc>
+                <a:spcPts val="1620"/>
+              </a:lnSpc>
+              <a:spcAft>
+                <a:spcPts val="300"/>
+              </a:spcAft>
+              <a:buSzPct val="100000"/>
+              <a:buChar char="•"/>
+            </a:pPr>
+            <a:r>
+              <a:rPr lang="en-US" sz="1200" b="1" dirty="0">
+                <a:solidFill>
+                  <a:srgbClr val="1A1A1A"/>
+                </a:solidFill>
+                <a:latin typeface="Georgia" pitchFamily="34" charset="0"/>
+                <a:ea typeface="Georgia" pitchFamily="34" charset="-122"/>
+                <a:cs typeface="Georgia" pitchFamily="34" charset="-120"/>
+              </a:rPr>
+              <a:t>Fire</a:t>
+            </a:r>
+            <a:pPr algn="l" indent="0" marL="0">
+              <a:lnSpc>
+                <a:spcPts val="1620"/>
+              </a:lnSpc>
+              <a:spcAft>
+                <a:spcPts val="300"/>
+              </a:spcAft>
+              <a:buNone/>
+            </a:pPr>
+            <a:r>
+              <a:rPr lang="en-US" sz="1200" dirty="0">
+                <a:solidFill>
+                  <a:srgbClr val="1A1A1A"/>
+                </a:solidFill>
+                <a:latin typeface="Georgia" pitchFamily="34" charset="0"/>
+                <a:ea typeface="Georgia" pitchFamily="34" charset="-122"/>
+                <a:cs typeface="Georgia" pitchFamily="34" charset="-120"/>
+              </a:rPr>
+              <a:t> — hot + dry</a:t>
+            </a:r>
+            <a:endParaRPr lang="en-US" sz="1200" dirty="0"/>
+          </a:p>
+          <a:p>
+            <a:pPr algn="l" marL="342900" indent="-342900">
+              <a:lnSpc>
+                <a:spcPts val="1620"/>
+              </a:lnSpc>
+              <a:spcAft>
+                <a:spcPts val="300"/>
+              </a:spcAft>
+              <a:buSzPct val="100000"/>
+              <a:buChar char="•"/>
+            </a:pPr>
+            <a:r>
+              <a:rPr lang="en-US" sz="1200" b="1" dirty="0">
+                <a:solidFill>
+                  <a:srgbClr val="1A1A1A"/>
+                </a:solidFill>
+                <a:latin typeface="Georgia" pitchFamily="34" charset="0"/>
+                <a:ea typeface="Georgia" pitchFamily="34" charset="-122"/>
+                <a:cs typeface="Georgia" pitchFamily="34" charset="-120"/>
+              </a:rPr>
+              <a:t>Air</a:t>
+            </a:r>
+            <a:pPr algn="l" indent="0" marL="0">
+              <a:lnSpc>
+                <a:spcPts val="1620"/>
+              </a:lnSpc>
+              <a:spcAft>
+                <a:spcPts val="300"/>
+              </a:spcAft>
+              <a:buNone/>
+            </a:pPr>
+            <a:r>
+              <a:rPr lang="en-US" sz="1200" dirty="0">
+                <a:solidFill>
+                  <a:srgbClr val="1A1A1A"/>
+                </a:solidFill>
+                <a:latin typeface="Georgia" pitchFamily="34" charset="0"/>
+                <a:ea typeface="Georgia" pitchFamily="34" charset="-122"/>
+                <a:cs typeface="Georgia" pitchFamily="34" charset="-120"/>
+              </a:rPr>
+              <a:t> — hot + wet</a:t>
+            </a:r>
+            <a:endParaRPr lang="en-US" sz="1200" dirty="0"/>
+          </a:p>
+          <a:p>
+            <a:pPr algn="l" marL="342900" indent="-342900">
+              <a:lnSpc>
+                <a:spcPts val="1620"/>
+              </a:lnSpc>
+              <a:spcAft>
+                <a:spcPts val="300"/>
+              </a:spcAft>
+              <a:buSzPct val="100000"/>
+              <a:buChar char="•"/>
+            </a:pPr>
+            <a:r>
+              <a:rPr lang="en-US" sz="1200" b="1" dirty="0">
+                <a:solidFill>
+                  <a:srgbClr val="1A1A1A"/>
+                </a:solidFill>
+                <a:latin typeface="Georgia" pitchFamily="34" charset="0"/>
+                <a:ea typeface="Georgia" pitchFamily="34" charset="-122"/>
+                <a:cs typeface="Georgia" pitchFamily="34" charset="-120"/>
+              </a:rPr>
+              <a:t>Water</a:t>
+            </a:r>
+            <a:pPr algn="l" indent="0" marL="0">
+              <a:lnSpc>
+                <a:spcPts val="1620"/>
+              </a:lnSpc>
+              <a:spcAft>
+                <a:spcPts val="300"/>
+              </a:spcAft>
+              <a:buNone/>
+            </a:pPr>
+            <a:r>
+              <a:rPr lang="en-US" sz="1200" dirty="0">
+                <a:solidFill>
+                  <a:srgbClr val="1A1A1A"/>
+                </a:solidFill>
+                <a:latin typeface="Georgia" pitchFamily="34" charset="0"/>
+                <a:ea typeface="Georgia" pitchFamily="34" charset="-122"/>
+                <a:cs typeface="Georgia" pitchFamily="34" charset="-120"/>
+              </a:rPr>
+              <a:t> — cold + wet</a:t>
+            </a:r>
+            <a:endParaRPr lang="en-US" sz="1200" dirty="0"/>
+          </a:p>
+          <a:p>
+            <a:pPr algn="l" marL="342900" indent="-342900">
+              <a:lnSpc>
+                <a:spcPts val="1620"/>
+              </a:lnSpc>
+              <a:spcAft>
+                <a:spcPts val="300"/>
+              </a:spcAft>
+              <a:buSzPct val="100000"/>
+              <a:buChar char="•"/>
+            </a:pPr>
+            <a:r>
+              <a:rPr lang="en-US" sz="1200" b="1" dirty="0">
+                <a:solidFill>
+                  <a:srgbClr val="1A1A1A"/>
+                </a:solidFill>
+                <a:latin typeface="Georgia" pitchFamily="34" charset="0"/>
+                <a:ea typeface="Georgia" pitchFamily="34" charset="-122"/>
+                <a:cs typeface="Georgia" pitchFamily="34" charset="-120"/>
+              </a:rPr>
+              <a:t>Earth</a:t>
+            </a:r>
+            <a:pPr algn="l" indent="0" marL="0">
+              <a:lnSpc>
+                <a:spcPts val="1620"/>
+              </a:lnSpc>
+              <a:spcAft>
+                <a:spcPts val="300"/>
+              </a:spcAft>
+              <a:buNone/>
+            </a:pPr>
+            <a:r>
+              <a:rPr lang="en-US" sz="1200" dirty="0">
+                <a:solidFill>
+                  <a:srgbClr val="1A1A1A"/>
+                </a:solidFill>
+                <a:latin typeface="Georgia" pitchFamily="34" charset="0"/>
+                <a:ea typeface="Georgia" pitchFamily="34" charset="-122"/>
+                <a:cs typeface="Georgia" pitchFamily="34" charset="-120"/>
+              </a:rPr>
+              <a:t> — cold + dry</a:t>
+            </a:r>
+            <a:endParaRPr lang="en-US" sz="1200" dirty="0"/>
+          </a:p>
+          <a:p>
+            <a:pPr algn="l" marL="342900" indent="-342900">
+              <a:lnSpc>
+                <a:spcPts val="1620"/>
+              </a:lnSpc>
+              <a:spcAft>
+                <a:spcPts val="300"/>
+              </a:spcAft>
+              <a:buSzPct val="100000"/>
+              <a:buChar char="•"/>
+            </a:pPr>
+            <a:r>
+              <a:rPr lang="en-US" sz="1200" b="1" dirty="0">
+                <a:solidFill>
+                  <a:srgbClr val="1A1A1A"/>
+                </a:solidFill>
+                <a:latin typeface="Georgia" pitchFamily="34" charset="0"/>
+                <a:ea typeface="Georgia" pitchFamily="34" charset="-122"/>
+                <a:cs typeface="Georgia" pitchFamily="34" charset="-120"/>
+              </a:rPr>
+              <a:t>Aither</a:t>
+            </a:r>
+            <a:pPr algn="l" indent="0" marL="0">
+              <a:lnSpc>
+                <a:spcPts val="1620"/>
+              </a:lnSpc>
+              <a:spcAft>
+                <a:spcPts val="300"/>
+              </a:spcAft>
+              <a:buNone/>
+            </a:pPr>
+            <a:r>
+              <a:rPr lang="en-US" sz="1200" dirty="0">
+                <a:solidFill>
+                  <a:srgbClr val="1A1A1A"/>
+                </a:solidFill>
+                <a:latin typeface="Georgia" pitchFamily="34" charset="0"/>
+                <a:ea typeface="Georgia" pitchFamily="34" charset="-122"/>
+                <a:cs typeface="Georgia" pitchFamily="34" charset="-120"/>
+              </a:rPr>
+              <a:t> — none (incorruptible)</a:t>
+            </a:r>
+            <a:endParaRPr lang="en-US" sz="1200" dirty="0"/>
+          </a:p>
+        </p:txBody>
+      </p:sp>
+      <p:sp>
+        <p:nvSpPr>
+          <p:cNvPr id="10" name="Text 8"/>
+          <p:cNvSpPr/>
+          <p:nvPr/>
+        </p:nvSpPr>
+        <p:spPr>
+          <a:xfrm>
+            <a:off x="634901" y="4730353"/>
             <a:ext cx="8102798" cy="281880"/>
           </a:xfrm>
           <a:prstGeom prst="rect">
@@ -3542,13 +3832,551 @@
       </p:sp>
       <p:sp>
         <p:nvSpPr>
-          <p:cNvPr id="9" name="Text 7"/>
+          <p:cNvPr id="11" name="Text 9"/>
           <p:cNvSpPr/>
           <p:nvPr/>
         </p:nvSpPr>
         <p:spPr>
           <a:xfrm>
-            <a:off x="634901" y="8137773"/>
+            <a:off x="406301" y="5101084"/>
+            <a:ext cx="8498026" cy="213271"/>
+          </a:xfrm>
+          <a:prstGeom prst="rect">
+            <a:avLst/>
+          </a:prstGeom>
+          <a:noFill/>
+          <a:ln/>
+        </p:spPr>
+        <p:txBody>
+          <a:bodyPr wrap="square" lIns="0" tIns="0" rIns="0" bIns="0" rtlCol="0" anchor="t"/>
+          <a:lstStyle/>
+          <a:p>
+            <a:pPr algn="l" indent="0" marL="0">
+              <a:lnSpc>
+                <a:spcPts val="1680"/>
+              </a:lnSpc>
+              <a:spcBef>
+                <a:spcPts val="300"/>
+              </a:spcBef>
+              <a:spcAft>
+                <a:spcPts val="300"/>
+              </a:spcAft>
+              <a:buNone/>
+            </a:pPr>
+            <a:r>
+              <a:rPr lang="en-US" sz="1200" i="1" dirty="0">
+                <a:solidFill>
+                  <a:srgbClr val="1A1A1A"/>
+                </a:solidFill>
+                <a:latin typeface="Georgia" pitchFamily="34" charset="0"/>
+                <a:ea typeface="Georgia" pitchFamily="34" charset="-122"/>
+                <a:cs typeface="Georgia" pitchFamily="34" charset="-120"/>
+              </a:rPr>
+              <a:t>Each row: Sāṅkhya (India) · Empedocles + Aristotle (Greece).</a:t>
+            </a:r>
+            <a:endParaRPr lang="en-US" sz="1200" dirty="0"/>
+          </a:p>
+        </p:txBody>
+      </p:sp>
+      <p:sp>
+        <p:nvSpPr>
+          <p:cNvPr id="12" name="Text 10"/>
+          <p:cNvSpPr/>
+          <p:nvPr/>
+        </p:nvSpPr>
+        <p:spPr>
+          <a:xfrm>
+            <a:off x="634901" y="5403205"/>
+            <a:ext cx="8102798" cy="2361605"/>
+          </a:xfrm>
+          <a:prstGeom prst="rect">
+            <a:avLst/>
+          </a:prstGeom>
+          <a:noFill/>
+          <a:ln/>
+        </p:spPr>
+        <p:txBody>
+          <a:bodyPr wrap="square" lIns="0" tIns="0" rIns="0" bIns="0" rtlCol="0" anchor="t"/>
+          <a:lstStyle/>
+          <a:p>
+            <a:pPr algn="l" marL="342900" indent="-342900">
+              <a:lnSpc>
+                <a:spcPts val="1620"/>
+              </a:lnSpc>
+              <a:spcAft>
+                <a:spcPts val="300"/>
+              </a:spcAft>
+              <a:buSzPct val="100000"/>
+              <a:buChar char="•"/>
+            </a:pPr>
+            <a:r>
+              <a:rPr lang="en-US" sz="1200" b="1" dirty="0">
+                <a:solidFill>
+                  <a:srgbClr val="1A1A1A"/>
+                </a:solidFill>
+                <a:latin typeface="Georgia" pitchFamily="34" charset="0"/>
+                <a:ea typeface="Georgia" pitchFamily="34" charset="-122"/>
+                <a:cs typeface="Georgia" pitchFamily="34" charset="-120"/>
+              </a:rPr>
+              <a:t>Number of elements</a:t>
+            </a:r>
+            <a:pPr algn="l" indent="0" marL="0">
+              <a:lnSpc>
+                <a:spcPts val="1620"/>
+              </a:lnSpc>
+              <a:spcAft>
+                <a:spcPts val="300"/>
+              </a:spcAft>
+              <a:buNone/>
+            </a:pPr>
+            <a:r>
+              <a:rPr lang="en-US" sz="1200" dirty="0">
+                <a:solidFill>
+                  <a:srgbClr val="1A1A1A"/>
+                </a:solidFill>
+                <a:latin typeface="Georgia" pitchFamily="34" charset="0"/>
+                <a:ea typeface="Georgia" pitchFamily="34" charset="-122"/>
+                <a:cs typeface="Georgia" pitchFamily="34" charset="-120"/>
+              </a:rPr>
+              <a:t> — 5 · 4 + 1 (quintessence)</a:t>
+            </a:r>
+            <a:endParaRPr lang="en-US" sz="1200" dirty="0"/>
+          </a:p>
+          <a:p>
+            <a:pPr algn="l" marL="342900" indent="-342900">
+              <a:lnSpc>
+                <a:spcPts val="1620"/>
+              </a:lnSpc>
+              <a:spcAft>
+                <a:spcPts val="300"/>
+              </a:spcAft>
+              <a:buSzPct val="100000"/>
+              <a:buChar char="•"/>
+            </a:pPr>
+            <a:r>
+              <a:rPr lang="en-US" sz="1200" b="1" dirty="0">
+                <a:solidFill>
+                  <a:srgbClr val="1A1A1A"/>
+                </a:solidFill>
+                <a:latin typeface="Georgia" pitchFamily="34" charset="0"/>
+                <a:ea typeface="Georgia" pitchFamily="34" charset="-122"/>
+                <a:cs typeface="Georgia" pitchFamily="34" charset="-120"/>
+              </a:rPr>
+              <a:t>Origin</a:t>
+            </a:r>
+            <a:pPr algn="l" indent="0" marL="0">
+              <a:lnSpc>
+                <a:spcPts val="1620"/>
+              </a:lnSpc>
+              <a:spcAft>
+                <a:spcPts val="300"/>
+              </a:spcAft>
+              <a:buNone/>
+            </a:pPr>
+            <a:r>
+              <a:rPr lang="en-US" sz="1200" dirty="0">
+                <a:solidFill>
+                  <a:srgbClr val="1A1A1A"/>
+                </a:solidFill>
+                <a:latin typeface="Georgia" pitchFamily="34" charset="0"/>
+                <a:ea typeface="Georgia" pitchFamily="34" charset="-122"/>
+                <a:cs typeface="Georgia" pitchFamily="34" charset="-120"/>
+              </a:rPr>
+              <a:t> — Emerge sequentially from </a:t>
+            </a:r>
+            <a:pPr algn="l" indent="0" marL="0">
+              <a:lnSpc>
+                <a:spcPts val="1620"/>
+              </a:lnSpc>
+              <a:spcAft>
+                <a:spcPts val="300"/>
+              </a:spcAft>
+              <a:buNone/>
+            </a:pPr>
+            <a:r>
+              <a:rPr lang="en-US" sz="1200" i="1" dirty="0">
+                <a:solidFill>
+                  <a:srgbClr val="1A1A1A"/>
+                </a:solidFill>
+                <a:latin typeface="Georgia" pitchFamily="34" charset="0"/>
+                <a:ea typeface="Georgia" pitchFamily="34" charset="-122"/>
+                <a:cs typeface="Georgia" pitchFamily="34" charset="-120"/>
+              </a:rPr>
+              <a:t>prakṛti</a:t>
+            </a:r>
+            <a:pPr algn="l" indent="0" marL="0">
+              <a:lnSpc>
+                <a:spcPts val="1620"/>
+              </a:lnSpc>
+              <a:spcAft>
+                <a:spcPts val="300"/>
+              </a:spcAft>
+              <a:buNone/>
+            </a:pPr>
+            <a:r>
+              <a:rPr lang="en-US" sz="1200" dirty="0">
+                <a:solidFill>
+                  <a:srgbClr val="1A1A1A"/>
+                </a:solidFill>
+                <a:latin typeface="Georgia" pitchFamily="34" charset="0"/>
+                <a:ea typeface="Georgia" pitchFamily="34" charset="-122"/>
+                <a:cs typeface="Georgia" pitchFamily="34" charset="-120"/>
+              </a:rPr>
+              <a:t> · Eternal "roots"</a:t>
+            </a:r>
+            <a:endParaRPr lang="en-US" sz="1200" dirty="0"/>
+          </a:p>
+          <a:p>
+            <a:pPr algn="l" marL="342900" indent="-342900">
+              <a:lnSpc>
+                <a:spcPts val="1620"/>
+              </a:lnSpc>
+              <a:spcAft>
+                <a:spcPts val="300"/>
+              </a:spcAft>
+              <a:buSzPct val="100000"/>
+              <a:buChar char="•"/>
+            </a:pPr>
+            <a:r>
+              <a:rPr lang="en-US" sz="1200" b="1" dirty="0">
+                <a:solidFill>
+                  <a:srgbClr val="1A1A1A"/>
+                </a:solidFill>
+                <a:latin typeface="Georgia" pitchFamily="34" charset="0"/>
+                <a:ea typeface="Georgia" pitchFamily="34" charset="-122"/>
+                <a:cs typeface="Georgia" pitchFamily="34" charset="-120"/>
+              </a:rPr>
+              <a:t>What drives combination</a:t>
+            </a:r>
+            <a:pPr algn="l" indent="0" marL="0">
+              <a:lnSpc>
+                <a:spcPts val="1620"/>
+              </a:lnSpc>
+              <a:spcAft>
+                <a:spcPts val="300"/>
+              </a:spcAft>
+              <a:buNone/>
+            </a:pPr>
+            <a:r>
+              <a:rPr lang="en-US" sz="1200" dirty="0">
+                <a:solidFill>
+                  <a:srgbClr val="1A1A1A"/>
+                </a:solidFill>
+                <a:latin typeface="Georgia" pitchFamily="34" charset="0"/>
+                <a:ea typeface="Georgia" pitchFamily="34" charset="-122"/>
+                <a:cs typeface="Georgia" pitchFamily="34" charset="-120"/>
+              </a:rPr>
+              <a:t> — Three </a:t>
+            </a:r>
+            <a:pPr algn="l" indent="0" marL="0">
+              <a:lnSpc>
+                <a:spcPts val="1620"/>
+              </a:lnSpc>
+              <a:spcAft>
+                <a:spcPts val="300"/>
+              </a:spcAft>
+              <a:buNone/>
+            </a:pPr>
+            <a:r>
+              <a:rPr lang="en-US" sz="1200" i="1" dirty="0">
+                <a:solidFill>
+                  <a:srgbClr val="1A1A1A"/>
+                </a:solidFill>
+                <a:latin typeface="Georgia" pitchFamily="34" charset="0"/>
+                <a:ea typeface="Georgia" pitchFamily="34" charset="-122"/>
+                <a:cs typeface="Georgia" pitchFamily="34" charset="-120"/>
+              </a:rPr>
+              <a:t>guṇas</a:t>
+            </a:r>
+            <a:pPr algn="l" indent="0" marL="0">
+              <a:lnSpc>
+                <a:spcPts val="1620"/>
+              </a:lnSpc>
+              <a:spcAft>
+                <a:spcPts val="300"/>
+              </a:spcAft>
+              <a:buNone/>
+            </a:pPr>
+            <a:r>
+              <a:rPr lang="en-US" sz="1200" dirty="0">
+                <a:solidFill>
+                  <a:srgbClr val="1A1A1A"/>
+                </a:solidFill>
+                <a:latin typeface="Georgia" pitchFamily="34" charset="0"/>
+                <a:ea typeface="Georgia" pitchFamily="34" charset="-122"/>
+                <a:cs typeface="Georgia" pitchFamily="34" charset="-120"/>
+              </a:rPr>
+              <a:t> (sattva, rajas, tamas) · Love and Strife (Empedocles); the natural motions toward "proper place" (Aristotle)</a:t>
+            </a:r>
+            <a:endParaRPr lang="en-US" sz="1200" dirty="0"/>
+          </a:p>
+          <a:p>
+            <a:pPr algn="l" marL="342900" indent="-342900">
+              <a:lnSpc>
+                <a:spcPts val="1620"/>
+              </a:lnSpc>
+              <a:spcAft>
+                <a:spcPts val="300"/>
+              </a:spcAft>
+              <a:buSzPct val="100000"/>
+              <a:buChar char="•"/>
+            </a:pPr>
+            <a:r>
+              <a:rPr lang="en-US" sz="1200" b="1" dirty="0">
+                <a:solidFill>
+                  <a:srgbClr val="1A1A1A"/>
+                </a:solidFill>
+                <a:latin typeface="Georgia" pitchFamily="34" charset="0"/>
+                <a:ea typeface="Georgia" pitchFamily="34" charset="-122"/>
+                <a:cs typeface="Georgia" pitchFamily="34" charset="-120"/>
+              </a:rPr>
+              <a:t>Fifth element identity</a:t>
+            </a:r>
+            <a:pPr algn="l" indent="0" marL="0">
+              <a:lnSpc>
+                <a:spcPts val="1620"/>
+              </a:lnSpc>
+              <a:spcAft>
+                <a:spcPts val="300"/>
+              </a:spcAft>
+              <a:buNone/>
+            </a:pPr>
+            <a:r>
+              <a:rPr lang="en-US" sz="1200" dirty="0">
+                <a:solidFill>
+                  <a:srgbClr val="1A1A1A"/>
+                </a:solidFill>
+                <a:latin typeface="Georgia" pitchFamily="34" charset="0"/>
+                <a:ea typeface="Georgia" pitchFamily="34" charset="-122"/>
+                <a:cs typeface="Georgia" pitchFamily="34" charset="-120"/>
+              </a:rPr>
+              <a:t> — </a:t>
+            </a:r>
+            <a:pPr algn="l" indent="0" marL="0">
+              <a:lnSpc>
+                <a:spcPts val="1620"/>
+              </a:lnSpc>
+              <a:spcAft>
+                <a:spcPts val="300"/>
+              </a:spcAft>
+              <a:buNone/>
+            </a:pPr>
+            <a:r>
+              <a:rPr lang="en-US" sz="1200" i="1" dirty="0">
+                <a:solidFill>
+                  <a:srgbClr val="1A1A1A"/>
+                </a:solidFill>
+                <a:latin typeface="Georgia" pitchFamily="34" charset="0"/>
+                <a:ea typeface="Georgia" pitchFamily="34" charset="-122"/>
+                <a:cs typeface="Georgia" pitchFamily="34" charset="-120"/>
+              </a:rPr>
+              <a:t>Ākāśa</a:t>
+            </a:r>
+            <a:pPr algn="l" indent="0" marL="0">
+              <a:lnSpc>
+                <a:spcPts val="1620"/>
+              </a:lnSpc>
+              <a:spcAft>
+                <a:spcPts val="300"/>
+              </a:spcAft>
+              <a:buNone/>
+            </a:pPr>
+            <a:r>
+              <a:rPr lang="en-US" sz="1200" dirty="0">
+                <a:solidFill>
+                  <a:srgbClr val="1A1A1A"/>
+                </a:solidFill>
+                <a:latin typeface="Georgia" pitchFamily="34" charset="0"/>
+                <a:ea typeface="Georgia" pitchFamily="34" charset="-122"/>
+                <a:cs typeface="Georgia" pitchFamily="34" charset="-120"/>
+              </a:rPr>
+              <a:t> — universal medium of space, present everywhere · </a:t>
+            </a:r>
+            <a:pPr algn="l" indent="0" marL="0">
+              <a:lnSpc>
+                <a:spcPts val="1620"/>
+              </a:lnSpc>
+              <a:spcAft>
+                <a:spcPts val="300"/>
+              </a:spcAft>
+              <a:buNone/>
+            </a:pPr>
+            <a:r>
+              <a:rPr lang="en-US" sz="1200" i="1" dirty="0">
+                <a:solidFill>
+                  <a:srgbClr val="1A1A1A"/>
+                </a:solidFill>
+                <a:latin typeface="Georgia" pitchFamily="34" charset="0"/>
+                <a:ea typeface="Georgia" pitchFamily="34" charset="-122"/>
+                <a:cs typeface="Georgia" pitchFamily="34" charset="-120"/>
+              </a:rPr>
+              <a:t>Aither</a:t>
+            </a:r>
+            <a:pPr algn="l" indent="0" marL="0">
+              <a:lnSpc>
+                <a:spcPts val="1620"/>
+              </a:lnSpc>
+              <a:spcAft>
+                <a:spcPts val="300"/>
+              </a:spcAft>
+              <a:buNone/>
+            </a:pPr>
+            <a:r>
+              <a:rPr lang="en-US" sz="1200" dirty="0">
+                <a:solidFill>
+                  <a:srgbClr val="1A1A1A"/>
+                </a:solidFill>
+                <a:latin typeface="Georgia" pitchFamily="34" charset="0"/>
+                <a:ea typeface="Georgia" pitchFamily="34" charset="-122"/>
+                <a:cs typeface="Georgia" pitchFamily="34" charset="-120"/>
+              </a:rPr>
+              <a:t> — celestial substance, only in the heavens</a:t>
+            </a:r>
+            <a:endParaRPr lang="en-US" sz="1200" dirty="0"/>
+          </a:p>
+          <a:p>
+            <a:pPr algn="l" marL="342900" indent="-342900">
+              <a:lnSpc>
+                <a:spcPts val="1620"/>
+              </a:lnSpc>
+              <a:spcAft>
+                <a:spcPts val="300"/>
+              </a:spcAft>
+              <a:buSzPct val="100000"/>
+              <a:buChar char="•"/>
+            </a:pPr>
+            <a:r>
+              <a:rPr lang="en-US" sz="1200" b="1" dirty="0">
+                <a:solidFill>
+                  <a:srgbClr val="1A1A1A"/>
+                </a:solidFill>
+                <a:latin typeface="Georgia" pitchFamily="34" charset="0"/>
+                <a:ea typeface="Georgia" pitchFamily="34" charset="-122"/>
+                <a:cs typeface="Georgia" pitchFamily="34" charset="-120"/>
+              </a:rPr>
+              <a:t>Quality-count rule</a:t>
+            </a:r>
+            <a:pPr algn="l" indent="0" marL="0">
+              <a:lnSpc>
+                <a:spcPts val="1620"/>
+              </a:lnSpc>
+              <a:spcAft>
+                <a:spcPts val="300"/>
+              </a:spcAft>
+              <a:buNone/>
+            </a:pPr>
+            <a:r>
+              <a:rPr lang="en-US" sz="1200" dirty="0">
+                <a:solidFill>
+                  <a:srgbClr val="1A1A1A"/>
+                </a:solidFill>
+                <a:latin typeface="Georgia" pitchFamily="34" charset="0"/>
+                <a:ea typeface="Georgia" pitchFamily="34" charset="-122"/>
+                <a:cs typeface="Georgia" pitchFamily="34" charset="-120"/>
+              </a:rPr>
+              <a:t> — 1, 2, 3, 4, 5 (predicted from emergence order) · No equivalent — each element gets a pair of qualities (hot/cold + wet/dry)</a:t>
+            </a:r>
+            <a:endParaRPr lang="en-US" sz="1200" dirty="0"/>
+          </a:p>
+          <a:p>
+            <a:pPr algn="l" marL="342900" indent="-342900">
+              <a:lnSpc>
+                <a:spcPts val="1620"/>
+              </a:lnSpc>
+              <a:spcAft>
+                <a:spcPts val="300"/>
+              </a:spcAft>
+              <a:buSzPct val="100000"/>
+              <a:buChar char="•"/>
+            </a:pPr>
+            <a:r>
+              <a:rPr lang="en-US" sz="1200" b="1" dirty="0">
+                <a:solidFill>
+                  <a:srgbClr val="1A1A1A"/>
+                </a:solidFill>
+                <a:latin typeface="Georgia" pitchFamily="34" charset="0"/>
+                <a:ea typeface="Georgia" pitchFamily="34" charset="-122"/>
+                <a:cs typeface="Georgia" pitchFamily="34" charset="-120"/>
+              </a:rPr>
+              <a:t>Perceptual mapping (tanmātra–indriya)</a:t>
+            </a:r>
+            <a:pPr algn="l" indent="0" marL="0">
+              <a:lnSpc>
+                <a:spcPts val="1620"/>
+              </a:lnSpc>
+              <a:spcAft>
+                <a:spcPts val="300"/>
+              </a:spcAft>
+              <a:buNone/>
+            </a:pPr>
+            <a:r>
+              <a:rPr lang="en-US" sz="1200" dirty="0">
+                <a:solidFill>
+                  <a:srgbClr val="1A1A1A"/>
+                </a:solidFill>
+                <a:latin typeface="Georgia" pitchFamily="34" charset="0"/>
+                <a:ea typeface="Georgia" pitchFamily="34" charset="-122"/>
+                <a:cs typeface="Georgia" pitchFamily="34" charset="-120"/>
+              </a:rPr>
+              <a:t> — Yes — explicit, symmetric, one-to-one · No equivalent</a:t>
+            </a:r>
+            <a:endParaRPr lang="en-US" sz="1200" dirty="0"/>
+          </a:p>
+          <a:p>
+            <a:pPr algn="l" marL="342900" indent="-342900">
+              <a:lnSpc>
+                <a:spcPts val="1620"/>
+              </a:lnSpc>
+              <a:spcAft>
+                <a:spcPts val="300"/>
+              </a:spcAft>
+              <a:buSzPct val="100000"/>
+              <a:buChar char="•"/>
+            </a:pPr>
+            <a:r>
+              <a:rPr lang="en-US" sz="1200" b="1" dirty="0">
+                <a:solidFill>
+                  <a:srgbClr val="1A1A1A"/>
+                </a:solidFill>
+                <a:latin typeface="Georgia" pitchFamily="34" charset="0"/>
+                <a:ea typeface="Georgia" pitchFamily="34" charset="-122"/>
+                <a:cs typeface="Georgia" pitchFamily="34" charset="-120"/>
+              </a:rPr>
+              <a:t>Includes consciousness in scheme</a:t>
+            </a:r>
+            <a:pPr algn="l" indent="0" marL="0">
+              <a:lnSpc>
+                <a:spcPts val="1620"/>
+              </a:lnSpc>
+              <a:spcAft>
+                <a:spcPts val="300"/>
+              </a:spcAft>
+              <a:buNone/>
+            </a:pPr>
+            <a:r>
+              <a:rPr lang="en-US" sz="1200" dirty="0">
+                <a:solidFill>
+                  <a:srgbClr val="1A1A1A"/>
+                </a:solidFill>
+                <a:latin typeface="Georgia" pitchFamily="34" charset="0"/>
+                <a:ea typeface="Georgia" pitchFamily="34" charset="-122"/>
+                <a:cs typeface="Georgia" pitchFamily="34" charset="-120"/>
+              </a:rPr>
+              <a:t> — Yes (puruṣa, 25th tattva) · No</a:t>
+            </a:r>
+            <a:endParaRPr lang="en-US" sz="1200" dirty="0"/>
+          </a:p>
+        </p:txBody>
+      </p:sp>
+      <p:sp>
+        <p:nvSpPr>
+          <p:cNvPr id="13" name="Text 11"/>
+          <p:cNvSpPr/>
+          <p:nvPr/>
+        </p:nvSpPr>
+        <p:spPr>
+          <a:xfrm>
+            <a:off x="634901" y="7866311"/>
             <a:ext cx="8102798" cy="487561"/>
           </a:xfrm>
           <a:prstGeom prst="rect">
@@ -3628,13 +4456,13 @@
       </p:sp>
       <p:sp>
         <p:nvSpPr>
-          <p:cNvPr id="10" name="Text 8"/>
+          <p:cNvPr id="14" name="Text 12"/>
           <p:cNvSpPr/>
           <p:nvPr/>
         </p:nvSpPr>
         <p:spPr>
           <a:xfrm>
-            <a:off x="406301" y="8790384"/>
+            <a:off x="406301" y="8518922"/>
             <a:ext cx="8498026" cy="213271"/>
           </a:xfrm>
           <a:prstGeom prst="rect">

--- a/exports/pptx/lessons/senior-module-02-panchabhuta/day-04-greek-comparison.pptx
+++ b/exports/pptx/lessons/senior-module-02-panchabhuta/day-04-greek-comparison.pptx
@@ -15,9 +15,15 @@
     <p:sldId id="263" r:id="rId9"/>
     <p:sldId id="264" r:id="rId10"/>
     <p:sldId id="265" r:id="rId11"/>
+    <p:sldId id="266" r:id="rId12"/>
+    <p:sldId id="267" r:id="rId13"/>
+    <p:sldId id="268" r:id="rId14"/>
+    <p:sldId id="269" r:id="rId15"/>
+    <p:sldId id="270" r:id="rId16"/>
+    <p:sldId id="271" r:id="rId17"/>
   </p:sldIdLst>
   <p:notesMasterIdLst>
-    <p:notesMasterId r:id="rId12"/>
+    <p:notesMasterId r:id="rId18"/>
   </p:notesMasterIdLst>
   <p:sldSz cx="9144000" cy="5143500"/>
   <p:notesSz cx="5143500" cy="9144000"/>
@@ -623,6 +629,534 @@
             <a:fld id="{F7021451-1387-4CA6-816F-3879F97B5CBC}" type="slidenum">
               <a:rPr lang="en-US"/>
               <a:t>10</a:t>
+            </a:fld>
+            <a:endParaRPr lang="en-US"/>
+          </a:p>
+        </p:txBody>
+      </p:sp>
+    </p:spTree>
+    <p:extLst>
+      <p:ext uri="{BB962C8B-B14F-4D97-AF65-F5344CB8AC3E}">
+        <p14:creationId xmlns:p14="http://schemas.microsoft.com/office/powerpoint/2010/main" val="1024086991"/>
+      </p:ext>
+    </p:extLst>
+  </p:cSld>
+  <p:clrMapOvr>
+    <a:masterClrMapping/>
+  </p:clrMapOvr>
+</p:notes>
+</file>
+
+<file path=ppt/notesSlides/notesSlide11.xml><?xml version="1.0" encoding="utf-8"?>
+<p:notes xmlns:a="http://schemas.openxmlformats.org/drawingml/2006/main" xmlns:r="http://schemas.openxmlformats.org/officeDocument/2006/relationships" xmlns:p="http://schemas.openxmlformats.org/presentationml/2006/main">
+  <p:cSld>
+    <p:spTree>
+      <p:nvGrpSpPr>
+        <p:cNvPr id="1" name=""/>
+        <p:cNvGrpSpPr/>
+        <p:nvPr/>
+      </p:nvGrpSpPr>
+      <p:grpSpPr>
+        <a:xfrm>
+          <a:off x="0" y="0"/>
+          <a:ext cx="0" cy="0"/>
+          <a:chOff x="0" y="0"/>
+          <a:chExt cx="0" cy="0"/>
+        </a:xfrm>
+      </p:grpSpPr>
+      <p:sp>
+        <p:nvSpPr>
+          <p:cNvPr id="2" name="Slide Image Placeholder 1"/>
+          <p:cNvSpPr>
+            <a:spLocks noGrp="1" noRot="1" noChangeAspect="1"/>
+          </p:cNvSpPr>
+          <p:nvPr>
+            <p:ph type="sldImg"/>
+          </p:nvPr>
+        </p:nvSpPr>
+        <p:spPr/>
+      </p:sp>
+      <p:sp>
+        <p:nvSpPr>
+          <p:cNvPr id="3" name="Notes Placeholder 2"/>
+          <p:cNvSpPr>
+            <a:spLocks noGrp="1"/>
+          </p:cNvSpPr>
+          <p:nvPr>
+            <p:ph type="body" idx="1"/>
+          </p:nvPr>
+        </p:nvSpPr>
+        <p:spPr/>
+        <p:txBody>
+          <a:bodyPr/>
+          <a:lstStyle/>
+          <a:p>
+            <a:r>
+              <a:rPr lang="en-US" dirty="0"/>
+              <a:t/>
+            </a:r>
+            <a:endParaRPr lang="en-US" dirty="0"/>
+          </a:p>
+        </p:txBody>
+      </p:sp>
+      <p:sp>
+        <p:nvSpPr>
+          <p:cNvPr id="4" name="Slide Number Placeholder 3"/>
+          <p:cNvSpPr>
+            <a:spLocks noGrp="1"/>
+          </p:cNvSpPr>
+          <p:nvPr>
+            <p:ph type="sldNum" sz="quarter" idx="10"/>
+          </p:nvPr>
+        </p:nvSpPr>
+        <p:spPr/>
+        <p:txBody>
+          <a:bodyPr/>
+          <a:lstStyle/>
+          <a:p>
+            <a:fld id="{F7021451-1387-4CA6-816F-3879F97B5CBC}" type="slidenum">
+              <a:rPr lang="en-US"/>
+              <a:t>11</a:t>
+            </a:fld>
+            <a:endParaRPr lang="en-US"/>
+          </a:p>
+        </p:txBody>
+      </p:sp>
+    </p:spTree>
+    <p:extLst>
+      <p:ext uri="{BB962C8B-B14F-4D97-AF65-F5344CB8AC3E}">
+        <p14:creationId xmlns:p14="http://schemas.microsoft.com/office/powerpoint/2010/main" val="1024086991"/>
+      </p:ext>
+    </p:extLst>
+  </p:cSld>
+  <p:clrMapOvr>
+    <a:masterClrMapping/>
+  </p:clrMapOvr>
+</p:notes>
+</file>
+
+<file path=ppt/notesSlides/notesSlide12.xml><?xml version="1.0" encoding="utf-8"?>
+<p:notes xmlns:a="http://schemas.openxmlformats.org/drawingml/2006/main" xmlns:r="http://schemas.openxmlformats.org/officeDocument/2006/relationships" xmlns:p="http://schemas.openxmlformats.org/presentationml/2006/main">
+  <p:cSld>
+    <p:spTree>
+      <p:nvGrpSpPr>
+        <p:cNvPr id="1" name=""/>
+        <p:cNvGrpSpPr/>
+        <p:nvPr/>
+      </p:nvGrpSpPr>
+      <p:grpSpPr>
+        <a:xfrm>
+          <a:off x="0" y="0"/>
+          <a:ext cx="0" cy="0"/>
+          <a:chOff x="0" y="0"/>
+          <a:chExt cx="0" cy="0"/>
+        </a:xfrm>
+      </p:grpSpPr>
+      <p:sp>
+        <p:nvSpPr>
+          <p:cNvPr id="2" name="Slide Image Placeholder 1"/>
+          <p:cNvSpPr>
+            <a:spLocks noGrp="1" noRot="1" noChangeAspect="1"/>
+          </p:cNvSpPr>
+          <p:nvPr>
+            <p:ph type="sldImg"/>
+          </p:nvPr>
+        </p:nvSpPr>
+        <p:spPr/>
+      </p:sp>
+      <p:sp>
+        <p:nvSpPr>
+          <p:cNvPr id="3" name="Notes Placeholder 2"/>
+          <p:cNvSpPr>
+            <a:spLocks noGrp="1"/>
+          </p:cNvSpPr>
+          <p:nvPr>
+            <p:ph type="body" idx="1"/>
+          </p:nvPr>
+        </p:nvSpPr>
+        <p:spPr/>
+        <p:txBody>
+          <a:bodyPr/>
+          <a:lstStyle/>
+          <a:p>
+            <a:r>
+              <a:rPr lang="en-US" dirty="0"/>
+              <a:t/>
+            </a:r>
+            <a:endParaRPr lang="en-US" dirty="0"/>
+          </a:p>
+        </p:txBody>
+      </p:sp>
+      <p:sp>
+        <p:nvSpPr>
+          <p:cNvPr id="4" name="Slide Number Placeholder 3"/>
+          <p:cNvSpPr>
+            <a:spLocks noGrp="1"/>
+          </p:cNvSpPr>
+          <p:nvPr>
+            <p:ph type="sldNum" sz="quarter" idx="10"/>
+          </p:nvPr>
+        </p:nvSpPr>
+        <p:spPr/>
+        <p:txBody>
+          <a:bodyPr/>
+          <a:lstStyle/>
+          <a:p>
+            <a:fld id="{F7021451-1387-4CA6-816F-3879F97B5CBC}" type="slidenum">
+              <a:rPr lang="en-US"/>
+              <a:t>12</a:t>
+            </a:fld>
+            <a:endParaRPr lang="en-US"/>
+          </a:p>
+        </p:txBody>
+      </p:sp>
+    </p:spTree>
+    <p:extLst>
+      <p:ext uri="{BB962C8B-B14F-4D97-AF65-F5344CB8AC3E}">
+        <p14:creationId xmlns:p14="http://schemas.microsoft.com/office/powerpoint/2010/main" val="1024086991"/>
+      </p:ext>
+    </p:extLst>
+  </p:cSld>
+  <p:clrMapOvr>
+    <a:masterClrMapping/>
+  </p:clrMapOvr>
+</p:notes>
+</file>
+
+<file path=ppt/notesSlides/notesSlide13.xml><?xml version="1.0" encoding="utf-8"?>
+<p:notes xmlns:a="http://schemas.openxmlformats.org/drawingml/2006/main" xmlns:r="http://schemas.openxmlformats.org/officeDocument/2006/relationships" xmlns:p="http://schemas.openxmlformats.org/presentationml/2006/main">
+  <p:cSld>
+    <p:spTree>
+      <p:nvGrpSpPr>
+        <p:cNvPr id="1" name=""/>
+        <p:cNvGrpSpPr/>
+        <p:nvPr/>
+      </p:nvGrpSpPr>
+      <p:grpSpPr>
+        <a:xfrm>
+          <a:off x="0" y="0"/>
+          <a:ext cx="0" cy="0"/>
+          <a:chOff x="0" y="0"/>
+          <a:chExt cx="0" cy="0"/>
+        </a:xfrm>
+      </p:grpSpPr>
+      <p:sp>
+        <p:nvSpPr>
+          <p:cNvPr id="2" name="Slide Image Placeholder 1"/>
+          <p:cNvSpPr>
+            <a:spLocks noGrp="1" noRot="1" noChangeAspect="1"/>
+          </p:cNvSpPr>
+          <p:nvPr>
+            <p:ph type="sldImg"/>
+          </p:nvPr>
+        </p:nvSpPr>
+        <p:spPr/>
+      </p:sp>
+      <p:sp>
+        <p:nvSpPr>
+          <p:cNvPr id="3" name="Notes Placeholder 2"/>
+          <p:cNvSpPr>
+            <a:spLocks noGrp="1"/>
+          </p:cNvSpPr>
+          <p:nvPr>
+            <p:ph type="body" idx="1"/>
+          </p:nvPr>
+        </p:nvSpPr>
+        <p:spPr/>
+        <p:txBody>
+          <a:bodyPr/>
+          <a:lstStyle/>
+          <a:p>
+            <a:r>
+              <a:rPr lang="en-US" dirty="0"/>
+              <a:t/>
+            </a:r>
+            <a:endParaRPr lang="en-US" dirty="0"/>
+          </a:p>
+        </p:txBody>
+      </p:sp>
+      <p:sp>
+        <p:nvSpPr>
+          <p:cNvPr id="4" name="Slide Number Placeholder 3"/>
+          <p:cNvSpPr>
+            <a:spLocks noGrp="1"/>
+          </p:cNvSpPr>
+          <p:nvPr>
+            <p:ph type="sldNum" sz="quarter" idx="10"/>
+          </p:nvPr>
+        </p:nvSpPr>
+        <p:spPr/>
+        <p:txBody>
+          <a:bodyPr/>
+          <a:lstStyle/>
+          <a:p>
+            <a:fld id="{F7021451-1387-4CA6-816F-3879F97B5CBC}" type="slidenum">
+              <a:rPr lang="en-US"/>
+              <a:t>13</a:t>
+            </a:fld>
+            <a:endParaRPr lang="en-US"/>
+          </a:p>
+        </p:txBody>
+      </p:sp>
+    </p:spTree>
+    <p:extLst>
+      <p:ext uri="{BB962C8B-B14F-4D97-AF65-F5344CB8AC3E}">
+        <p14:creationId xmlns:p14="http://schemas.microsoft.com/office/powerpoint/2010/main" val="1024086991"/>
+      </p:ext>
+    </p:extLst>
+  </p:cSld>
+  <p:clrMapOvr>
+    <a:masterClrMapping/>
+  </p:clrMapOvr>
+</p:notes>
+</file>
+
+<file path=ppt/notesSlides/notesSlide14.xml><?xml version="1.0" encoding="utf-8"?>
+<p:notes xmlns:a="http://schemas.openxmlformats.org/drawingml/2006/main" xmlns:r="http://schemas.openxmlformats.org/officeDocument/2006/relationships" xmlns:p="http://schemas.openxmlformats.org/presentationml/2006/main">
+  <p:cSld>
+    <p:spTree>
+      <p:nvGrpSpPr>
+        <p:cNvPr id="1" name=""/>
+        <p:cNvGrpSpPr/>
+        <p:nvPr/>
+      </p:nvGrpSpPr>
+      <p:grpSpPr>
+        <a:xfrm>
+          <a:off x="0" y="0"/>
+          <a:ext cx="0" cy="0"/>
+          <a:chOff x="0" y="0"/>
+          <a:chExt cx="0" cy="0"/>
+        </a:xfrm>
+      </p:grpSpPr>
+      <p:sp>
+        <p:nvSpPr>
+          <p:cNvPr id="2" name="Slide Image Placeholder 1"/>
+          <p:cNvSpPr>
+            <a:spLocks noGrp="1" noRot="1" noChangeAspect="1"/>
+          </p:cNvSpPr>
+          <p:nvPr>
+            <p:ph type="sldImg"/>
+          </p:nvPr>
+        </p:nvSpPr>
+        <p:spPr/>
+      </p:sp>
+      <p:sp>
+        <p:nvSpPr>
+          <p:cNvPr id="3" name="Notes Placeholder 2"/>
+          <p:cNvSpPr>
+            <a:spLocks noGrp="1"/>
+          </p:cNvSpPr>
+          <p:nvPr>
+            <p:ph type="body" idx="1"/>
+          </p:nvPr>
+        </p:nvSpPr>
+        <p:spPr/>
+        <p:txBody>
+          <a:bodyPr/>
+          <a:lstStyle/>
+          <a:p>
+            <a:r>
+              <a:rPr lang="en-US" dirty="0"/>
+              <a:t/>
+            </a:r>
+            <a:endParaRPr lang="en-US" dirty="0"/>
+          </a:p>
+        </p:txBody>
+      </p:sp>
+      <p:sp>
+        <p:nvSpPr>
+          <p:cNvPr id="4" name="Slide Number Placeholder 3"/>
+          <p:cNvSpPr>
+            <a:spLocks noGrp="1"/>
+          </p:cNvSpPr>
+          <p:nvPr>
+            <p:ph type="sldNum" sz="quarter" idx="10"/>
+          </p:nvPr>
+        </p:nvSpPr>
+        <p:spPr/>
+        <p:txBody>
+          <a:bodyPr/>
+          <a:lstStyle/>
+          <a:p>
+            <a:fld id="{F7021451-1387-4CA6-816F-3879F97B5CBC}" type="slidenum">
+              <a:rPr lang="en-US"/>
+              <a:t>14</a:t>
+            </a:fld>
+            <a:endParaRPr lang="en-US"/>
+          </a:p>
+        </p:txBody>
+      </p:sp>
+    </p:spTree>
+    <p:extLst>
+      <p:ext uri="{BB962C8B-B14F-4D97-AF65-F5344CB8AC3E}">
+        <p14:creationId xmlns:p14="http://schemas.microsoft.com/office/powerpoint/2010/main" val="1024086991"/>
+      </p:ext>
+    </p:extLst>
+  </p:cSld>
+  <p:clrMapOvr>
+    <a:masterClrMapping/>
+  </p:clrMapOvr>
+</p:notes>
+</file>
+
+<file path=ppt/notesSlides/notesSlide15.xml><?xml version="1.0" encoding="utf-8"?>
+<p:notes xmlns:a="http://schemas.openxmlformats.org/drawingml/2006/main" xmlns:r="http://schemas.openxmlformats.org/officeDocument/2006/relationships" xmlns:p="http://schemas.openxmlformats.org/presentationml/2006/main">
+  <p:cSld>
+    <p:spTree>
+      <p:nvGrpSpPr>
+        <p:cNvPr id="1" name=""/>
+        <p:cNvGrpSpPr/>
+        <p:nvPr/>
+      </p:nvGrpSpPr>
+      <p:grpSpPr>
+        <a:xfrm>
+          <a:off x="0" y="0"/>
+          <a:ext cx="0" cy="0"/>
+          <a:chOff x="0" y="0"/>
+          <a:chExt cx="0" cy="0"/>
+        </a:xfrm>
+      </p:grpSpPr>
+      <p:sp>
+        <p:nvSpPr>
+          <p:cNvPr id="2" name="Slide Image Placeholder 1"/>
+          <p:cNvSpPr>
+            <a:spLocks noGrp="1" noRot="1" noChangeAspect="1"/>
+          </p:cNvSpPr>
+          <p:nvPr>
+            <p:ph type="sldImg"/>
+          </p:nvPr>
+        </p:nvSpPr>
+        <p:spPr/>
+      </p:sp>
+      <p:sp>
+        <p:nvSpPr>
+          <p:cNvPr id="3" name="Notes Placeholder 2"/>
+          <p:cNvSpPr>
+            <a:spLocks noGrp="1"/>
+          </p:cNvSpPr>
+          <p:nvPr>
+            <p:ph type="body" idx="1"/>
+          </p:nvPr>
+        </p:nvSpPr>
+        <p:spPr/>
+        <p:txBody>
+          <a:bodyPr/>
+          <a:lstStyle/>
+          <a:p>
+            <a:r>
+              <a:rPr lang="en-US" dirty="0"/>
+              <a:t/>
+            </a:r>
+            <a:endParaRPr lang="en-US" dirty="0"/>
+          </a:p>
+        </p:txBody>
+      </p:sp>
+      <p:sp>
+        <p:nvSpPr>
+          <p:cNvPr id="4" name="Slide Number Placeholder 3"/>
+          <p:cNvSpPr>
+            <a:spLocks noGrp="1"/>
+          </p:cNvSpPr>
+          <p:nvPr>
+            <p:ph type="sldNum" sz="quarter" idx="10"/>
+          </p:nvPr>
+        </p:nvSpPr>
+        <p:spPr/>
+        <p:txBody>
+          <a:bodyPr/>
+          <a:lstStyle/>
+          <a:p>
+            <a:fld id="{F7021451-1387-4CA6-816F-3879F97B5CBC}" type="slidenum">
+              <a:rPr lang="en-US"/>
+              <a:t>15</a:t>
+            </a:fld>
+            <a:endParaRPr lang="en-US"/>
+          </a:p>
+        </p:txBody>
+      </p:sp>
+    </p:spTree>
+    <p:extLst>
+      <p:ext uri="{BB962C8B-B14F-4D97-AF65-F5344CB8AC3E}">
+        <p14:creationId xmlns:p14="http://schemas.microsoft.com/office/powerpoint/2010/main" val="1024086991"/>
+      </p:ext>
+    </p:extLst>
+  </p:cSld>
+  <p:clrMapOvr>
+    <a:masterClrMapping/>
+  </p:clrMapOvr>
+</p:notes>
+</file>
+
+<file path=ppt/notesSlides/notesSlide16.xml><?xml version="1.0" encoding="utf-8"?>
+<p:notes xmlns:a="http://schemas.openxmlformats.org/drawingml/2006/main" xmlns:r="http://schemas.openxmlformats.org/officeDocument/2006/relationships" xmlns:p="http://schemas.openxmlformats.org/presentationml/2006/main">
+  <p:cSld>
+    <p:spTree>
+      <p:nvGrpSpPr>
+        <p:cNvPr id="1" name=""/>
+        <p:cNvGrpSpPr/>
+        <p:nvPr/>
+      </p:nvGrpSpPr>
+      <p:grpSpPr>
+        <a:xfrm>
+          <a:off x="0" y="0"/>
+          <a:ext cx="0" cy="0"/>
+          <a:chOff x="0" y="0"/>
+          <a:chExt cx="0" cy="0"/>
+        </a:xfrm>
+      </p:grpSpPr>
+      <p:sp>
+        <p:nvSpPr>
+          <p:cNvPr id="2" name="Slide Image Placeholder 1"/>
+          <p:cNvSpPr>
+            <a:spLocks noGrp="1" noRot="1" noChangeAspect="1"/>
+          </p:cNvSpPr>
+          <p:nvPr>
+            <p:ph type="sldImg"/>
+          </p:nvPr>
+        </p:nvSpPr>
+        <p:spPr/>
+      </p:sp>
+      <p:sp>
+        <p:nvSpPr>
+          <p:cNvPr id="3" name="Notes Placeholder 2"/>
+          <p:cNvSpPr>
+            <a:spLocks noGrp="1"/>
+          </p:cNvSpPr>
+          <p:nvPr>
+            <p:ph type="body" idx="1"/>
+          </p:nvPr>
+        </p:nvSpPr>
+        <p:spPr/>
+        <p:txBody>
+          <a:bodyPr/>
+          <a:lstStyle/>
+          <a:p>
+            <a:r>
+              <a:rPr lang="en-US" dirty="0"/>
+              <a:t/>
+            </a:r>
+            <a:endParaRPr lang="en-US" dirty="0"/>
+          </a:p>
+        </p:txBody>
+      </p:sp>
+      <p:sp>
+        <p:nvSpPr>
+          <p:cNvPr id="4" name="Slide Number Placeholder 3"/>
+          <p:cNvSpPr>
+            <a:spLocks noGrp="1"/>
+          </p:cNvSpPr>
+          <p:nvPr>
+            <p:ph type="sldNum" sz="quarter" idx="10"/>
+          </p:nvPr>
+        </p:nvSpPr>
+        <p:spPr/>
+        <p:txBody>
+          <a:bodyPr/>
+          <a:lstStyle/>
+          <a:p>
+            <a:fld id="{F7021451-1387-4CA6-816F-3879F97B5CBC}" type="slidenum">
+              <a:rPr lang="en-US"/>
+              <a:t>16</a:t>
             </a:fld>
             <a:endParaRPr lang="en-US"/>
           </a:p>
@@ -1876,102 +2410,6 @@
         </p:nvSpPr>
         <p:spPr>
           <a:xfrm>
-            <a:off x="406301" y="1223963"/>
-            <a:ext cx="8498026" cy="274290"/>
-          </a:xfrm>
-          <a:prstGeom prst="rect">
-            <a:avLst/>
-          </a:prstGeom>
-          <a:noFill/>
-          <a:ln/>
-        </p:spPr>
-        <p:txBody>
-          <a:bodyPr wrap="square" lIns="0" tIns="0" rIns="0" bIns="0" rtlCol="0" anchor="t"/>
-          <a:lstStyle/>
-          <a:p>
-            <a:pPr algn="l" indent="0" marL="0">
-              <a:lnSpc>
-                <a:spcPts val="2160"/>
-              </a:lnSpc>
-              <a:spcBef>
-                <a:spcPts val="600"/>
-              </a:spcBef>
-              <a:spcAft>
-                <a:spcPts val="800"/>
-              </a:spcAft>
-              <a:buNone/>
-            </a:pPr>
-            <a:r>
-              <a:rPr lang="en-US" sz="1800" b="1" dirty="0">
-                <a:solidFill>
-                  <a:srgbClr val="997929"/>
-                </a:solidFill>
-                <a:latin typeface="Times New Roman" pitchFamily="34" charset="0"/>
-                <a:ea typeface="Times New Roman" pitchFamily="34" charset="-122"/>
-                <a:cs typeface="Times New Roman" pitchFamily="34" charset="-120"/>
-              </a:rPr>
-              <a:t>Learning objective</a:t>
-            </a:r>
-            <a:endParaRPr lang="en-US" sz="1800" dirty="0"/>
-          </a:p>
-        </p:txBody>
-      </p:sp>
-      <p:sp>
-        <p:nvSpPr>
-          <p:cNvPr id="6" name="Text 4"/>
-          <p:cNvSpPr/>
-          <p:nvPr/>
-        </p:nvSpPr>
-        <p:spPr>
-          <a:xfrm>
-            <a:off x="406301" y="1637854"/>
-            <a:ext cx="8498026" cy="426541"/>
-          </a:xfrm>
-          <a:prstGeom prst="rect">
-            <a:avLst/>
-          </a:prstGeom>
-          <a:noFill/>
-          <a:ln/>
-        </p:spPr>
-        <p:txBody>
-          <a:bodyPr wrap="square" lIns="0" tIns="0" rIns="0" bIns="0" rtlCol="0" anchor="t"/>
-          <a:lstStyle/>
-          <a:p>
-            <a:pPr algn="l" indent="0" marL="0">
-              <a:lnSpc>
-                <a:spcPts val="1680"/>
-              </a:lnSpc>
-              <a:spcBef>
-                <a:spcPts val="300"/>
-              </a:spcBef>
-              <a:spcAft>
-                <a:spcPts val="300"/>
-              </a:spcAft>
-              <a:buNone/>
-            </a:pPr>
-            <a:r>
-              <a:rPr lang="en-US" sz="1200" dirty="0">
-                <a:solidFill>
-                  <a:srgbClr val="1A1A1A"/>
-                </a:solidFill>
-                <a:latin typeface="Georgia" pitchFamily="34" charset="0"/>
-                <a:ea typeface="Georgia" pitchFamily="34" charset="-122"/>
-                <a:cs typeface="Georgia" pitchFamily="34" charset="-120"/>
-              </a:rPr>
-              <a:t>Students compare the Greek (Empedocles + Aristotle) four/five element scheme with Sāṅkhya, identifying at least three structural differences and one structural similarity.</a:t>
-            </a:r>
-            <a:endParaRPr lang="en-US" sz="1200" dirty="0"/>
-          </a:p>
-        </p:txBody>
-      </p:sp>
-      <p:sp>
-        <p:nvSpPr>
-          <p:cNvPr id="7" name="Text 5"/>
-          <p:cNvSpPr/>
-          <p:nvPr/>
-        </p:nvSpPr>
-        <p:spPr>
-          <a:xfrm>
             <a:off x="406301" y="4434929"/>
             <a:ext cx="8498026" cy="213271"/>
           </a:xfrm>
@@ -2116,7 +2554,7 @@
                 <a:ea typeface="Times New Roman" pitchFamily="34" charset="-122"/>
                 <a:cs typeface="Times New Roman" pitchFamily="34" charset="-120"/>
               </a:rPr>
-              <a:t>Citation(s) used</a:t>
+              <a:t>Core (25 min) (cont.)</a:t>
             </a:r>
             <a:endParaRPr lang="en-US" sz="1800" dirty="0"/>
           </a:p>
@@ -2130,8 +2568,8 @@
         </p:nvSpPr>
         <p:spPr>
           <a:xfrm>
-            <a:off x="406301" y="870942"/>
-            <a:ext cx="8498026" cy="426541"/>
+            <a:off x="634901" y="883593"/>
+            <a:ext cx="8102798" cy="2117824"/>
           </a:xfrm>
           <a:prstGeom prst="rect">
             <a:avLst/>
@@ -2143,6 +2581,452 @@
           <a:bodyPr wrap="square" lIns="0" tIns="0" rIns="0" bIns="0" rtlCol="0" anchor="t"/>
           <a:lstStyle/>
           <a:p>
+            <a:pPr algn="l" marL="342900" indent="-342900">
+              <a:lnSpc>
+                <a:spcPts val="1620"/>
+              </a:lnSpc>
+              <a:spcAft>
+                <a:spcPts val="300"/>
+              </a:spcAft>
+              <a:buSzPct val="100000"/>
+              <a:buChar char="•"/>
+            </a:pPr>
+            <a:r>
+              <a:rPr lang="en-US" sz="1200" b="1" dirty="0">
+                <a:solidFill>
+                  <a:srgbClr val="1A1A1A"/>
+                </a:solidFill>
+                <a:latin typeface="Georgia" pitchFamily="34" charset="0"/>
+                <a:ea typeface="Georgia" pitchFamily="34" charset="-122"/>
+                <a:cs typeface="Georgia" pitchFamily="34" charset="-120"/>
+              </a:rPr>
+              <a:t>Number of elements</a:t>
+            </a:r>
+            <a:pPr algn="l" indent="0" marL="0">
+              <a:lnSpc>
+                <a:spcPts val="1620"/>
+              </a:lnSpc>
+              <a:spcAft>
+                <a:spcPts val="300"/>
+              </a:spcAft>
+              <a:buNone/>
+            </a:pPr>
+            <a:r>
+              <a:rPr lang="en-US" sz="1200" dirty="0">
+                <a:solidFill>
+                  <a:srgbClr val="1A1A1A"/>
+                </a:solidFill>
+                <a:latin typeface="Georgia" pitchFamily="34" charset="0"/>
+                <a:ea typeface="Georgia" pitchFamily="34" charset="-122"/>
+                <a:cs typeface="Georgia" pitchFamily="34" charset="-120"/>
+              </a:rPr>
+              <a:t> — 5 · 4 + 1 (quintessence)</a:t>
+            </a:r>
+            <a:endParaRPr lang="en-US" sz="1200" dirty="0"/>
+          </a:p>
+          <a:p>
+            <a:pPr algn="l" marL="342900" indent="-342900">
+              <a:lnSpc>
+                <a:spcPts val="1620"/>
+              </a:lnSpc>
+              <a:spcAft>
+                <a:spcPts val="300"/>
+              </a:spcAft>
+              <a:buSzPct val="100000"/>
+              <a:buChar char="•"/>
+            </a:pPr>
+            <a:r>
+              <a:rPr lang="en-US" sz="1200" b="1" dirty="0">
+                <a:solidFill>
+                  <a:srgbClr val="1A1A1A"/>
+                </a:solidFill>
+                <a:latin typeface="Georgia" pitchFamily="34" charset="0"/>
+                <a:ea typeface="Georgia" pitchFamily="34" charset="-122"/>
+                <a:cs typeface="Georgia" pitchFamily="34" charset="-120"/>
+              </a:rPr>
+              <a:t>Origin</a:t>
+            </a:r>
+            <a:pPr algn="l" indent="0" marL="0">
+              <a:lnSpc>
+                <a:spcPts val="1620"/>
+              </a:lnSpc>
+              <a:spcAft>
+                <a:spcPts val="300"/>
+              </a:spcAft>
+              <a:buNone/>
+            </a:pPr>
+            <a:r>
+              <a:rPr lang="en-US" sz="1200" dirty="0">
+                <a:solidFill>
+                  <a:srgbClr val="1A1A1A"/>
+                </a:solidFill>
+                <a:latin typeface="Georgia" pitchFamily="34" charset="0"/>
+                <a:ea typeface="Georgia" pitchFamily="34" charset="-122"/>
+                <a:cs typeface="Georgia" pitchFamily="34" charset="-120"/>
+              </a:rPr>
+              <a:t> — Emerge sequentially from </a:t>
+            </a:r>
+            <a:pPr algn="l" indent="0" marL="0">
+              <a:lnSpc>
+                <a:spcPts val="1620"/>
+              </a:lnSpc>
+              <a:spcAft>
+                <a:spcPts val="300"/>
+              </a:spcAft>
+              <a:buNone/>
+            </a:pPr>
+            <a:r>
+              <a:rPr lang="en-US" sz="1200" i="1" dirty="0">
+                <a:solidFill>
+                  <a:srgbClr val="1A1A1A"/>
+                </a:solidFill>
+                <a:latin typeface="Georgia" pitchFamily="34" charset="0"/>
+                <a:ea typeface="Georgia" pitchFamily="34" charset="-122"/>
+                <a:cs typeface="Georgia" pitchFamily="34" charset="-120"/>
+              </a:rPr>
+              <a:t>prakṛti</a:t>
+            </a:r>
+            <a:pPr algn="l" indent="0" marL="0">
+              <a:lnSpc>
+                <a:spcPts val="1620"/>
+              </a:lnSpc>
+              <a:spcAft>
+                <a:spcPts val="300"/>
+              </a:spcAft>
+              <a:buNone/>
+            </a:pPr>
+            <a:r>
+              <a:rPr lang="en-US" sz="1200" dirty="0">
+                <a:solidFill>
+                  <a:srgbClr val="1A1A1A"/>
+                </a:solidFill>
+                <a:latin typeface="Georgia" pitchFamily="34" charset="0"/>
+                <a:ea typeface="Georgia" pitchFamily="34" charset="-122"/>
+                <a:cs typeface="Georgia" pitchFamily="34" charset="-120"/>
+              </a:rPr>
+              <a:t> · Eternal "roots"</a:t>
+            </a:r>
+            <a:endParaRPr lang="en-US" sz="1200" dirty="0"/>
+          </a:p>
+          <a:p>
+            <a:pPr algn="l" marL="342900" indent="-342900">
+              <a:lnSpc>
+                <a:spcPts val="1620"/>
+              </a:lnSpc>
+              <a:spcAft>
+                <a:spcPts val="300"/>
+              </a:spcAft>
+              <a:buSzPct val="100000"/>
+              <a:buChar char="•"/>
+            </a:pPr>
+            <a:r>
+              <a:rPr lang="en-US" sz="1200" b="1" dirty="0">
+                <a:solidFill>
+                  <a:srgbClr val="1A1A1A"/>
+                </a:solidFill>
+                <a:latin typeface="Georgia" pitchFamily="34" charset="0"/>
+                <a:ea typeface="Georgia" pitchFamily="34" charset="-122"/>
+                <a:cs typeface="Georgia" pitchFamily="34" charset="-120"/>
+              </a:rPr>
+              <a:t>What drives combination</a:t>
+            </a:r>
+            <a:pPr algn="l" indent="0" marL="0">
+              <a:lnSpc>
+                <a:spcPts val="1620"/>
+              </a:lnSpc>
+              <a:spcAft>
+                <a:spcPts val="300"/>
+              </a:spcAft>
+              <a:buNone/>
+            </a:pPr>
+            <a:r>
+              <a:rPr lang="en-US" sz="1200" dirty="0">
+                <a:solidFill>
+                  <a:srgbClr val="1A1A1A"/>
+                </a:solidFill>
+                <a:latin typeface="Georgia" pitchFamily="34" charset="0"/>
+                <a:ea typeface="Georgia" pitchFamily="34" charset="-122"/>
+                <a:cs typeface="Georgia" pitchFamily="34" charset="-120"/>
+              </a:rPr>
+              <a:t> — Three </a:t>
+            </a:r>
+            <a:pPr algn="l" indent="0" marL="0">
+              <a:lnSpc>
+                <a:spcPts val="1620"/>
+              </a:lnSpc>
+              <a:spcAft>
+                <a:spcPts val="300"/>
+              </a:spcAft>
+              <a:buNone/>
+            </a:pPr>
+            <a:r>
+              <a:rPr lang="en-US" sz="1200" i="1" dirty="0">
+                <a:solidFill>
+                  <a:srgbClr val="1A1A1A"/>
+                </a:solidFill>
+                <a:latin typeface="Georgia" pitchFamily="34" charset="0"/>
+                <a:ea typeface="Georgia" pitchFamily="34" charset="-122"/>
+                <a:cs typeface="Georgia" pitchFamily="34" charset="-120"/>
+              </a:rPr>
+              <a:t>guṇas</a:t>
+            </a:r>
+            <a:pPr algn="l" indent="0" marL="0">
+              <a:lnSpc>
+                <a:spcPts val="1620"/>
+              </a:lnSpc>
+              <a:spcAft>
+                <a:spcPts val="300"/>
+              </a:spcAft>
+              <a:buNone/>
+            </a:pPr>
+            <a:r>
+              <a:rPr lang="en-US" sz="1200" dirty="0">
+                <a:solidFill>
+                  <a:srgbClr val="1A1A1A"/>
+                </a:solidFill>
+                <a:latin typeface="Georgia" pitchFamily="34" charset="0"/>
+                <a:ea typeface="Georgia" pitchFamily="34" charset="-122"/>
+                <a:cs typeface="Georgia" pitchFamily="34" charset="-120"/>
+              </a:rPr>
+              <a:t> (sattva, rajas, tamas) · Love and Strife (Empedocles); the natural motions toward "proper place" (Aristotle)</a:t>
+            </a:r>
+            <a:endParaRPr lang="en-US" sz="1200" dirty="0"/>
+          </a:p>
+          <a:p>
+            <a:pPr algn="l" marL="342900" indent="-342900">
+              <a:lnSpc>
+                <a:spcPts val="1620"/>
+              </a:lnSpc>
+              <a:spcAft>
+                <a:spcPts val="300"/>
+              </a:spcAft>
+              <a:buSzPct val="100000"/>
+              <a:buChar char="•"/>
+            </a:pPr>
+            <a:r>
+              <a:rPr lang="en-US" sz="1200" b="1" dirty="0">
+                <a:solidFill>
+                  <a:srgbClr val="1A1A1A"/>
+                </a:solidFill>
+                <a:latin typeface="Georgia" pitchFamily="34" charset="0"/>
+                <a:ea typeface="Georgia" pitchFamily="34" charset="-122"/>
+                <a:cs typeface="Georgia" pitchFamily="34" charset="-120"/>
+              </a:rPr>
+              <a:t>Fifth element identity</a:t>
+            </a:r>
+            <a:pPr algn="l" indent="0" marL="0">
+              <a:lnSpc>
+                <a:spcPts val="1620"/>
+              </a:lnSpc>
+              <a:spcAft>
+                <a:spcPts val="300"/>
+              </a:spcAft>
+              <a:buNone/>
+            </a:pPr>
+            <a:r>
+              <a:rPr lang="en-US" sz="1200" dirty="0">
+                <a:solidFill>
+                  <a:srgbClr val="1A1A1A"/>
+                </a:solidFill>
+                <a:latin typeface="Georgia" pitchFamily="34" charset="0"/>
+                <a:ea typeface="Georgia" pitchFamily="34" charset="-122"/>
+                <a:cs typeface="Georgia" pitchFamily="34" charset="-120"/>
+              </a:rPr>
+              <a:t> — </a:t>
+            </a:r>
+            <a:pPr algn="l" indent="0" marL="0">
+              <a:lnSpc>
+                <a:spcPts val="1620"/>
+              </a:lnSpc>
+              <a:spcAft>
+                <a:spcPts val="300"/>
+              </a:spcAft>
+              <a:buNone/>
+            </a:pPr>
+            <a:r>
+              <a:rPr lang="en-US" sz="1200" i="1" dirty="0">
+                <a:solidFill>
+                  <a:srgbClr val="1A1A1A"/>
+                </a:solidFill>
+                <a:latin typeface="Georgia" pitchFamily="34" charset="0"/>
+                <a:ea typeface="Georgia" pitchFamily="34" charset="-122"/>
+                <a:cs typeface="Georgia" pitchFamily="34" charset="-120"/>
+              </a:rPr>
+              <a:t>Ākāśa</a:t>
+            </a:r>
+            <a:pPr algn="l" indent="0" marL="0">
+              <a:lnSpc>
+                <a:spcPts val="1620"/>
+              </a:lnSpc>
+              <a:spcAft>
+                <a:spcPts val="300"/>
+              </a:spcAft>
+              <a:buNone/>
+            </a:pPr>
+            <a:r>
+              <a:rPr lang="en-US" sz="1200" dirty="0">
+                <a:solidFill>
+                  <a:srgbClr val="1A1A1A"/>
+                </a:solidFill>
+                <a:latin typeface="Georgia" pitchFamily="34" charset="0"/>
+                <a:ea typeface="Georgia" pitchFamily="34" charset="-122"/>
+                <a:cs typeface="Georgia" pitchFamily="34" charset="-120"/>
+              </a:rPr>
+              <a:t> — universal medium of space, present everywhere · </a:t>
+            </a:r>
+            <a:pPr algn="l" indent="0" marL="0">
+              <a:lnSpc>
+                <a:spcPts val="1620"/>
+              </a:lnSpc>
+              <a:spcAft>
+                <a:spcPts val="300"/>
+              </a:spcAft>
+              <a:buNone/>
+            </a:pPr>
+            <a:r>
+              <a:rPr lang="en-US" sz="1200" i="1" dirty="0">
+                <a:solidFill>
+                  <a:srgbClr val="1A1A1A"/>
+                </a:solidFill>
+                <a:latin typeface="Georgia" pitchFamily="34" charset="0"/>
+                <a:ea typeface="Georgia" pitchFamily="34" charset="-122"/>
+                <a:cs typeface="Georgia" pitchFamily="34" charset="-120"/>
+              </a:rPr>
+              <a:t>Aither</a:t>
+            </a:r>
+            <a:pPr algn="l" indent="0" marL="0">
+              <a:lnSpc>
+                <a:spcPts val="1620"/>
+              </a:lnSpc>
+              <a:spcAft>
+                <a:spcPts val="300"/>
+              </a:spcAft>
+              <a:buNone/>
+            </a:pPr>
+            <a:r>
+              <a:rPr lang="en-US" sz="1200" dirty="0">
+                <a:solidFill>
+                  <a:srgbClr val="1A1A1A"/>
+                </a:solidFill>
+                <a:latin typeface="Georgia" pitchFamily="34" charset="0"/>
+                <a:ea typeface="Georgia" pitchFamily="34" charset="-122"/>
+                <a:cs typeface="Georgia" pitchFamily="34" charset="-120"/>
+              </a:rPr>
+              <a:t> — celestial substance, only in the heavens</a:t>
+            </a:r>
+            <a:endParaRPr lang="en-US" sz="1200" dirty="0"/>
+          </a:p>
+          <a:p>
+            <a:pPr algn="l" marL="342900" indent="-342900">
+              <a:lnSpc>
+                <a:spcPts val="1620"/>
+              </a:lnSpc>
+              <a:spcAft>
+                <a:spcPts val="300"/>
+              </a:spcAft>
+              <a:buSzPct val="100000"/>
+              <a:buChar char="•"/>
+            </a:pPr>
+            <a:r>
+              <a:rPr lang="en-US" sz="1200" b="1" dirty="0">
+                <a:solidFill>
+                  <a:srgbClr val="1A1A1A"/>
+                </a:solidFill>
+                <a:latin typeface="Georgia" pitchFamily="34" charset="0"/>
+                <a:ea typeface="Georgia" pitchFamily="34" charset="-122"/>
+                <a:cs typeface="Georgia" pitchFamily="34" charset="-120"/>
+              </a:rPr>
+              <a:t>Quality-count rule</a:t>
+            </a:r>
+            <a:pPr algn="l" indent="0" marL="0">
+              <a:lnSpc>
+                <a:spcPts val="1620"/>
+              </a:lnSpc>
+              <a:spcAft>
+                <a:spcPts val="300"/>
+              </a:spcAft>
+              <a:buNone/>
+            </a:pPr>
+            <a:r>
+              <a:rPr lang="en-US" sz="1200" dirty="0">
+                <a:solidFill>
+                  <a:srgbClr val="1A1A1A"/>
+                </a:solidFill>
+                <a:latin typeface="Georgia" pitchFamily="34" charset="0"/>
+                <a:ea typeface="Georgia" pitchFamily="34" charset="-122"/>
+                <a:cs typeface="Georgia" pitchFamily="34" charset="-120"/>
+              </a:rPr>
+              <a:t> — 1, 2, 3, 4, 5 (predicted from emergence order) · No equivalent — each element gets a pair of qualities (hot/cold + wet/dry)</a:t>
+            </a:r>
+            <a:endParaRPr lang="en-US" sz="1200" dirty="0"/>
+          </a:p>
+          <a:p>
+            <a:pPr algn="l" marL="342900" indent="-342900">
+              <a:lnSpc>
+                <a:spcPts val="1620"/>
+              </a:lnSpc>
+              <a:spcAft>
+                <a:spcPts val="300"/>
+              </a:spcAft>
+              <a:buSzPct val="100000"/>
+              <a:buChar char="•"/>
+            </a:pPr>
+            <a:r>
+              <a:rPr lang="en-US" sz="1200" b="1" dirty="0">
+                <a:solidFill>
+                  <a:srgbClr val="1A1A1A"/>
+                </a:solidFill>
+                <a:latin typeface="Georgia" pitchFamily="34" charset="0"/>
+                <a:ea typeface="Georgia" pitchFamily="34" charset="-122"/>
+                <a:cs typeface="Georgia" pitchFamily="34" charset="-120"/>
+              </a:rPr>
+              <a:t>Perceptual mapping (tanmātra–indriya)</a:t>
+            </a:r>
+            <a:pPr algn="l" indent="0" marL="0">
+              <a:lnSpc>
+                <a:spcPts val="1620"/>
+              </a:lnSpc>
+              <a:spcAft>
+                <a:spcPts val="300"/>
+              </a:spcAft>
+              <a:buNone/>
+            </a:pPr>
+            <a:r>
+              <a:rPr lang="en-US" sz="1200" dirty="0">
+                <a:solidFill>
+                  <a:srgbClr val="1A1A1A"/>
+                </a:solidFill>
+                <a:latin typeface="Georgia" pitchFamily="34" charset="0"/>
+                <a:ea typeface="Georgia" pitchFamily="34" charset="-122"/>
+                <a:cs typeface="Georgia" pitchFamily="34" charset="-120"/>
+              </a:rPr>
+              <a:t> — Yes — explicit, symmetric, one-to-one · No equivalent</a:t>
+            </a:r>
+            <a:endParaRPr lang="en-US" sz="1200" dirty="0"/>
+          </a:p>
+        </p:txBody>
+      </p:sp>
+      <p:sp>
+        <p:nvSpPr>
+          <p:cNvPr id="5" name="Text 3"/>
+          <p:cNvSpPr/>
+          <p:nvPr/>
+        </p:nvSpPr>
+        <p:spPr>
+          <a:xfrm>
+            <a:off x="406301" y="4434929"/>
+            <a:ext cx="8498026" cy="213271"/>
+          </a:xfrm>
+          <a:prstGeom prst="rect">
+            <a:avLst/>
+          </a:prstGeom>
+          <a:noFill/>
+          <a:ln/>
+        </p:spPr>
+        <p:txBody>
+          <a:bodyPr wrap="square" lIns="0" tIns="0" rIns="0" bIns="0" rtlCol="0" anchor="t"/>
+          <a:lstStyle/>
+          <a:p>
             <a:pPr algn="l" indent="0" marL="0">
               <a:lnSpc>
                 <a:spcPts val="1680"/>
@@ -2164,8 +3048,295 @@
                 <a:ea typeface="Georgia" pitchFamily="34" charset="-122"/>
                 <a:cs typeface="Georgia" pitchFamily="34" charset="-120"/>
               </a:rPr>
-              <a:t>– Kirk, G. S., Raven, J. E., &amp; Schofield, M. (1983). </a:t>
-            </a:r>
+              <a:t>Senior ·  · IKS Curriculum</a:t>
+            </a:r>
+            <a:endParaRPr lang="en-US" sz="1200" dirty="0"/>
+          </a:p>
+        </p:txBody>
+      </p:sp>
+    </p:spTree>
+  </p:cSld>
+  <p:clrMapOvr>
+    <a:masterClrMapping/>
+  </p:clrMapOvr>
+</p:sld>
+</file>
+
+<file path=ppt/slides/slide11.xml><?xml version="1.0" encoding="utf-8"?>
+<p:sld xmlns:a="http://schemas.openxmlformats.org/drawingml/2006/main" xmlns:r="http://schemas.openxmlformats.org/officeDocument/2006/relationships" xmlns:p="http://schemas.openxmlformats.org/presentationml/2006/main">
+  <p:cSld name="Slide 11">
+    <p:bg>
+      <p:bgPr>
+        <a:solidFill>
+          <a:srgbClr val="FAF7F2"/>
+        </a:solidFill>
+      </p:bgPr>
+    </p:bg>
+    <p:spTree>
+      <p:nvGrpSpPr>
+        <p:cNvPr id="1" name=""/>
+        <p:cNvGrpSpPr/>
+        <p:nvPr/>
+      </p:nvGrpSpPr>
+      <p:grpSpPr>
+        <a:xfrm>
+          <a:off x="0" y="0"/>
+          <a:ext cx="0" cy="0"/>
+          <a:chOff x="0" y="0"/>
+          <a:chExt cx="0" cy="0"/>
+        </a:xfrm>
+      </p:grpSpPr>
+      <p:sp>
+        <p:nvSpPr>
+          <p:cNvPr id="2" name="Text 0"/>
+          <p:cNvSpPr/>
+          <p:nvPr/>
+        </p:nvSpPr>
+        <p:spPr>
+          <a:xfrm>
+            <a:off x="0" y="0"/>
+            <a:ext cx="9144000" cy="101501"/>
+          </a:xfrm>
+          <a:prstGeom prst="rect">
+            <a:avLst/>
+          </a:prstGeom>
+          <a:solidFill>
+            <a:srgbClr val="5D1D2E"/>
+          </a:solidFill>
+          <a:ln/>
+        </p:spPr>
+        <p:txBody>
+          <a:bodyPr wrap="square" rtlCol="0" anchor="ctr"/>
+          <a:lstStyle/>
+          <a:p>
+            <a:pPr indent="0" marL="0">
+              <a:buNone/>
+            </a:pPr>
+            <a:endParaRPr lang="en-US" dirty="0"/>
+          </a:p>
+        </p:txBody>
+      </p:sp>
+      <p:sp>
+        <p:nvSpPr>
+          <p:cNvPr id="3" name="Text 1"/>
+          <p:cNvSpPr/>
+          <p:nvPr/>
+        </p:nvSpPr>
+        <p:spPr>
+          <a:xfrm>
+            <a:off x="406301" y="457051"/>
+            <a:ext cx="8498026" cy="274290"/>
+          </a:xfrm>
+          <a:prstGeom prst="rect">
+            <a:avLst/>
+          </a:prstGeom>
+          <a:noFill/>
+          <a:ln/>
+        </p:spPr>
+        <p:txBody>
+          <a:bodyPr wrap="square" lIns="0" tIns="0" rIns="0" bIns="0" rtlCol="0" anchor="t"/>
+          <a:lstStyle/>
+          <a:p>
+            <a:pPr algn="l" indent="0" marL="0">
+              <a:lnSpc>
+                <a:spcPts val="2160"/>
+              </a:lnSpc>
+              <a:spcBef>
+                <a:spcPts val="600"/>
+              </a:spcBef>
+              <a:spcAft>
+                <a:spcPts val="800"/>
+              </a:spcAft>
+              <a:buNone/>
+            </a:pPr>
+            <a:r>
+              <a:rPr lang="en-US" sz="1800" b="1" dirty="0">
+                <a:solidFill>
+                  <a:srgbClr val="997929"/>
+                </a:solidFill>
+                <a:latin typeface="Times New Roman" pitchFamily="34" charset="0"/>
+                <a:ea typeface="Times New Roman" pitchFamily="34" charset="-122"/>
+                <a:cs typeface="Times New Roman" pitchFamily="34" charset="-120"/>
+              </a:rPr>
+              <a:t>Core (25 min) (cont.)</a:t>
+            </a:r>
+            <a:endParaRPr lang="en-US" sz="1800" dirty="0"/>
+          </a:p>
+        </p:txBody>
+      </p:sp>
+      <p:sp>
+        <p:nvSpPr>
+          <p:cNvPr id="4" name="Text 2"/>
+          <p:cNvSpPr/>
+          <p:nvPr/>
+        </p:nvSpPr>
+        <p:spPr>
+          <a:xfrm>
+            <a:off x="634901" y="883593"/>
+            <a:ext cx="8102798" cy="281880"/>
+          </a:xfrm>
+          <a:prstGeom prst="rect">
+            <a:avLst/>
+          </a:prstGeom>
+          <a:noFill/>
+          <a:ln/>
+        </p:spPr>
+        <p:txBody>
+          <a:bodyPr wrap="square" lIns="0" tIns="0" rIns="0" bIns="0" rtlCol="0" anchor="t"/>
+          <a:lstStyle/>
+          <a:p>
+            <a:pPr algn="l" marL="342900" indent="-342900">
+              <a:lnSpc>
+                <a:spcPts val="1620"/>
+              </a:lnSpc>
+              <a:spcAft>
+                <a:spcPts val="300"/>
+              </a:spcAft>
+              <a:buSzPct val="100000"/>
+              <a:buChar char="•"/>
+            </a:pPr>
+            <a:r>
+              <a:rPr lang="en-US" sz="1200" b="1" dirty="0">
+                <a:solidFill>
+                  <a:srgbClr val="1A1A1A"/>
+                </a:solidFill>
+                <a:latin typeface="Georgia" pitchFamily="34" charset="0"/>
+                <a:ea typeface="Georgia" pitchFamily="34" charset="-122"/>
+                <a:cs typeface="Georgia" pitchFamily="34" charset="-120"/>
+              </a:rPr>
+              <a:t>Includes consciousness in scheme</a:t>
+            </a:r>
+            <a:pPr algn="l" indent="0" marL="0">
+              <a:lnSpc>
+                <a:spcPts val="1620"/>
+              </a:lnSpc>
+              <a:spcAft>
+                <a:spcPts val="300"/>
+              </a:spcAft>
+              <a:buNone/>
+            </a:pPr>
+            <a:r>
+              <a:rPr lang="en-US" sz="1200" dirty="0">
+                <a:solidFill>
+                  <a:srgbClr val="1A1A1A"/>
+                </a:solidFill>
+                <a:latin typeface="Georgia" pitchFamily="34" charset="0"/>
+                <a:ea typeface="Georgia" pitchFamily="34" charset="-122"/>
+                <a:cs typeface="Georgia" pitchFamily="34" charset="-120"/>
+              </a:rPr>
+              <a:t> — Yes (puruṣa, 25th tattva) · No</a:t>
+            </a:r>
+            <a:endParaRPr lang="en-US" sz="1200" dirty="0"/>
+          </a:p>
+        </p:txBody>
+      </p:sp>
+      <p:sp>
+        <p:nvSpPr>
+          <p:cNvPr id="5" name="Text 3"/>
+          <p:cNvSpPr/>
+          <p:nvPr/>
+        </p:nvSpPr>
+        <p:spPr>
+          <a:xfrm>
+            <a:off x="634901" y="1266974"/>
+            <a:ext cx="8102798" cy="487561"/>
+          </a:xfrm>
+          <a:prstGeom prst="rect">
+            <a:avLst/>
+          </a:prstGeom>
+          <a:noFill/>
+          <a:ln/>
+        </p:spPr>
+        <p:txBody>
+          <a:bodyPr wrap="square" lIns="0" tIns="0" rIns="0" bIns="0" rtlCol="0" anchor="t"/>
+          <a:lstStyle/>
+          <a:p>
+            <a:pPr algn="l" marL="342900" indent="-342900">
+              <a:lnSpc>
+                <a:spcPts val="1620"/>
+              </a:lnSpc>
+              <a:spcAft>
+                <a:spcPts val="300"/>
+              </a:spcAft>
+              <a:buSzPct val="100000"/>
+              <a:buChar char="•"/>
+            </a:pPr>
+            <a:r>
+              <a:rPr lang="en-US" sz="1200" b="1" dirty="0">
+                <a:solidFill>
+                  <a:srgbClr val="1A1A1A"/>
+                </a:solidFill>
+                <a:latin typeface="Georgia" pitchFamily="34" charset="0"/>
+                <a:ea typeface="Georgia" pitchFamily="34" charset="-122"/>
+                <a:cs typeface="Georgia" pitchFamily="34" charset="-120"/>
+              </a:rPr>
+              <a:t>Discuss the most interesting difference.</a:t>
+            </a:r>
+            <a:pPr algn="l" indent="0" marL="0">
+              <a:lnSpc>
+                <a:spcPts val="1620"/>
+              </a:lnSpc>
+              <a:spcAft>
+                <a:spcPts val="300"/>
+              </a:spcAft>
+              <a:buNone/>
+            </a:pPr>
+            <a:r>
+              <a:rPr lang="en-US" sz="1200" dirty="0">
+                <a:solidFill>
+                  <a:srgbClr val="1A1A1A"/>
+                </a:solidFill>
+                <a:latin typeface="Georgia" pitchFamily="34" charset="0"/>
+                <a:ea typeface="Georgia" pitchFamily="34" charset="-122"/>
+                <a:cs typeface="Georgia" pitchFamily="34" charset="-120"/>
+              </a:rPr>
+              <a:t> Open: </a:t>
+            </a:r>
+            <a:pPr algn="l" indent="0" marL="0">
+              <a:lnSpc>
+                <a:spcPts val="1620"/>
+              </a:lnSpc>
+              <a:spcAft>
+                <a:spcPts val="300"/>
+              </a:spcAft>
+              <a:buNone/>
+            </a:pPr>
+            <a:r>
+              <a:rPr lang="en-US" sz="1200" i="1" dirty="0">
+                <a:solidFill>
+                  <a:srgbClr val="1A1A1A"/>
+                </a:solidFill>
+                <a:latin typeface="Georgia" pitchFamily="34" charset="0"/>
+                <a:ea typeface="Georgia" pitchFamily="34" charset="-122"/>
+                <a:cs typeface="Georgia" pitchFamily="34" charset="-120"/>
+              </a:rPr>
+              <a:t>"Which of these structural differences feels most significant to you? Why?"</a:t>
+            </a:r>
+            <a:endParaRPr lang="en-US" sz="1200" dirty="0"/>
+          </a:p>
+        </p:txBody>
+      </p:sp>
+      <p:sp>
+        <p:nvSpPr>
+          <p:cNvPr id="6" name="Text 4"/>
+          <p:cNvSpPr/>
+          <p:nvPr/>
+        </p:nvSpPr>
+        <p:spPr>
+          <a:xfrm>
+            <a:off x="406301" y="4434929"/>
+            <a:ext cx="8498026" cy="213271"/>
+          </a:xfrm>
+          <a:prstGeom prst="rect">
+            <a:avLst/>
+          </a:prstGeom>
+          <a:noFill/>
+          <a:ln/>
+        </p:spPr>
+        <p:txBody>
+          <a:bodyPr wrap="square" lIns="0" tIns="0" rIns="0" bIns="0" rtlCol="0" anchor="t"/>
+          <a:lstStyle/>
+          <a:p>
             <a:pPr algn="l" indent="0" marL="0">
               <a:lnSpc>
                 <a:spcPts val="1680"/>
@@ -2179,6 +3350,482 @@
               <a:buNone/>
             </a:pPr>
             <a:r>
+              <a:rPr lang="en-US" sz="1200" dirty="0">
+                <a:solidFill>
+                  <a:srgbClr val="1A1A1A"/>
+                </a:solidFill>
+                <a:latin typeface="Georgia" pitchFamily="34" charset="0"/>
+                <a:ea typeface="Georgia" pitchFamily="34" charset="-122"/>
+                <a:cs typeface="Georgia" pitchFamily="34" charset="-120"/>
+              </a:rPr>
+              <a:t>Senior ·  · IKS Curriculum</a:t>
+            </a:r>
+            <a:endParaRPr lang="en-US" sz="1200" dirty="0"/>
+          </a:p>
+        </p:txBody>
+      </p:sp>
+    </p:spTree>
+  </p:cSld>
+  <p:clrMapOvr>
+    <a:masterClrMapping/>
+  </p:clrMapOvr>
+</p:sld>
+</file>
+
+<file path=ppt/slides/slide12.xml><?xml version="1.0" encoding="utf-8"?>
+<p:sld xmlns:a="http://schemas.openxmlformats.org/drawingml/2006/main" xmlns:r="http://schemas.openxmlformats.org/officeDocument/2006/relationships" xmlns:p="http://schemas.openxmlformats.org/presentationml/2006/main">
+  <p:cSld name="Slide 12">
+    <p:bg>
+      <p:bgPr>
+        <a:solidFill>
+          <a:srgbClr val="FAF7F2"/>
+        </a:solidFill>
+      </p:bgPr>
+    </p:bg>
+    <p:spTree>
+      <p:nvGrpSpPr>
+        <p:cNvPr id="1" name=""/>
+        <p:cNvGrpSpPr/>
+        <p:nvPr/>
+      </p:nvGrpSpPr>
+      <p:grpSpPr>
+        <a:xfrm>
+          <a:off x="0" y="0"/>
+          <a:ext cx="0" cy="0"/>
+          <a:chOff x="0" y="0"/>
+          <a:chExt cx="0" cy="0"/>
+        </a:xfrm>
+      </p:grpSpPr>
+      <p:sp>
+        <p:nvSpPr>
+          <p:cNvPr id="2" name="Text 0"/>
+          <p:cNvSpPr/>
+          <p:nvPr/>
+        </p:nvSpPr>
+        <p:spPr>
+          <a:xfrm>
+            <a:off x="0" y="0"/>
+            <a:ext cx="9144000" cy="101501"/>
+          </a:xfrm>
+          <a:prstGeom prst="rect">
+            <a:avLst/>
+          </a:prstGeom>
+          <a:solidFill>
+            <a:srgbClr val="5D1D2E"/>
+          </a:solidFill>
+          <a:ln/>
+        </p:spPr>
+        <p:txBody>
+          <a:bodyPr wrap="square" rtlCol="0" anchor="ctr"/>
+          <a:lstStyle/>
+          <a:p>
+            <a:pPr indent="0" marL="0">
+              <a:buNone/>
+            </a:pPr>
+            <a:endParaRPr lang="en-US" dirty="0"/>
+          </a:p>
+        </p:txBody>
+      </p:sp>
+      <p:sp>
+        <p:nvSpPr>
+          <p:cNvPr id="3" name="Text 1"/>
+          <p:cNvSpPr/>
+          <p:nvPr/>
+        </p:nvSpPr>
+        <p:spPr>
+          <a:xfrm>
+            <a:off x="406301" y="457051"/>
+            <a:ext cx="8498026" cy="274290"/>
+          </a:xfrm>
+          <a:prstGeom prst="rect">
+            <a:avLst/>
+          </a:prstGeom>
+          <a:noFill/>
+          <a:ln/>
+        </p:spPr>
+        <p:txBody>
+          <a:bodyPr wrap="square" lIns="0" tIns="0" rIns="0" bIns="0" rtlCol="0" anchor="t"/>
+          <a:lstStyle/>
+          <a:p>
+            <a:pPr algn="l" indent="0" marL="0">
+              <a:lnSpc>
+                <a:spcPts val="2160"/>
+              </a:lnSpc>
+              <a:spcBef>
+                <a:spcPts val="600"/>
+              </a:spcBef>
+              <a:spcAft>
+                <a:spcPts val="800"/>
+              </a:spcAft>
+              <a:buNone/>
+            </a:pPr>
+            <a:r>
+              <a:rPr lang="en-US" sz="1800" b="1" dirty="0">
+                <a:solidFill>
+                  <a:srgbClr val="997929"/>
+                </a:solidFill>
+                <a:latin typeface="Times New Roman" pitchFamily="34" charset="0"/>
+                <a:ea typeface="Times New Roman" pitchFamily="34" charset="-122"/>
+                <a:cs typeface="Times New Roman" pitchFamily="34" charset="-120"/>
+              </a:rPr>
+              <a:t>Activity (10 min)</a:t>
+            </a:r>
+            <a:endParaRPr lang="en-US" sz="1800" dirty="0"/>
+          </a:p>
+        </p:txBody>
+      </p:sp>
+      <p:sp>
+        <p:nvSpPr>
+          <p:cNvPr id="4" name="Text 2"/>
+          <p:cNvSpPr/>
+          <p:nvPr/>
+        </p:nvSpPr>
+        <p:spPr>
+          <a:xfrm>
+            <a:off x="406301" y="870942"/>
+            <a:ext cx="8498026" cy="213271"/>
+          </a:xfrm>
+          <a:prstGeom prst="rect">
+            <a:avLst/>
+          </a:prstGeom>
+          <a:noFill/>
+          <a:ln/>
+        </p:spPr>
+        <p:txBody>
+          <a:bodyPr wrap="square" lIns="0" tIns="0" rIns="0" bIns="0" rtlCol="0" anchor="t"/>
+          <a:lstStyle/>
+          <a:p>
+            <a:pPr algn="l" indent="0" marL="0">
+              <a:lnSpc>
+                <a:spcPts val="1680"/>
+              </a:lnSpc>
+              <a:spcBef>
+                <a:spcPts val="300"/>
+              </a:spcBef>
+              <a:spcAft>
+                <a:spcPts val="300"/>
+              </a:spcAft>
+              <a:buNone/>
+            </a:pPr>
+            <a:r>
+              <a:rPr lang="en-US" sz="1200" dirty="0">
+                <a:solidFill>
+                  <a:srgbClr val="1A1A1A"/>
+                </a:solidFill>
+                <a:latin typeface="Georgia" pitchFamily="34" charset="0"/>
+                <a:ea typeface="Georgia" pitchFamily="34" charset="-122"/>
+                <a:cs typeface="Georgia" pitchFamily="34" charset="-120"/>
+              </a:rPr>
+              <a:t>Begin in-class comparison essay draft:</a:t>
+            </a:r>
+            <a:endParaRPr lang="en-US" sz="1200" dirty="0"/>
+          </a:p>
+        </p:txBody>
+      </p:sp>
+      <p:sp>
+        <p:nvSpPr>
+          <p:cNvPr id="5" name="Text 3"/>
+          <p:cNvSpPr/>
+          <p:nvPr/>
+        </p:nvSpPr>
+        <p:spPr>
+          <a:xfrm>
+            <a:off x="634901" y="1173063"/>
+            <a:ext cx="8102798" cy="769441"/>
+          </a:xfrm>
+          <a:prstGeom prst="rect">
+            <a:avLst/>
+          </a:prstGeom>
+          <a:noFill/>
+          <a:ln/>
+        </p:spPr>
+        <p:txBody>
+          <a:bodyPr wrap="square" lIns="0" tIns="0" rIns="0" bIns="0" rtlCol="0" anchor="t"/>
+          <a:lstStyle/>
+          <a:p>
+            <a:pPr algn="l" marL="342900" indent="-342900">
+              <a:lnSpc>
+                <a:spcPts val="1620"/>
+              </a:lnSpc>
+              <a:spcAft>
+                <a:spcPts val="300"/>
+              </a:spcAft>
+              <a:buSzPct val="100000"/>
+              <a:buChar char="•"/>
+            </a:pPr>
+            <a:r>
+              <a:rPr lang="en-US" sz="1200" dirty="0">
+                <a:solidFill>
+                  <a:srgbClr val="1A1A1A"/>
+                </a:solidFill>
+                <a:latin typeface="Georgia" pitchFamily="34" charset="0"/>
+                <a:ea typeface="Georgia" pitchFamily="34" charset="-122"/>
+                <a:cs typeface="Georgia" pitchFamily="34" charset="-120"/>
+              </a:rPr>
+              <a:t>Pick ONE structural difference from the table.</a:t>
+            </a:r>
+            <a:endParaRPr lang="en-US" sz="1200" dirty="0"/>
+          </a:p>
+          <a:p>
+            <a:pPr algn="l" marL="342900" indent="-342900">
+              <a:lnSpc>
+                <a:spcPts val="1620"/>
+              </a:lnSpc>
+              <a:spcAft>
+                <a:spcPts val="300"/>
+              </a:spcAft>
+              <a:buSzPct val="100000"/>
+              <a:buChar char="•"/>
+            </a:pPr>
+            <a:r>
+              <a:rPr lang="en-US" sz="1200" dirty="0">
+                <a:solidFill>
+                  <a:srgbClr val="1A1A1A"/>
+                </a:solidFill>
+                <a:latin typeface="Georgia" pitchFamily="34" charset="0"/>
+                <a:ea typeface="Georgia" pitchFamily="34" charset="-122"/>
+                <a:cs typeface="Georgia" pitchFamily="34" charset="-120"/>
+              </a:rPr>
+              <a:t>Write a 1-paragraph (5–7 sentence) analysis of why it matters.</a:t>
+            </a:r>
+            <a:endParaRPr lang="en-US" sz="1200" dirty="0"/>
+          </a:p>
+          <a:p>
+            <a:pPr algn="l" marL="342900" indent="-342900">
+              <a:lnSpc>
+                <a:spcPts val="1620"/>
+              </a:lnSpc>
+              <a:spcAft>
+                <a:spcPts val="300"/>
+              </a:spcAft>
+              <a:buSzPct val="100000"/>
+              <a:buChar char="•"/>
+            </a:pPr>
+            <a:r>
+              <a:rPr lang="en-US" sz="1200" dirty="0">
+                <a:solidFill>
+                  <a:srgbClr val="1A1A1A"/>
+                </a:solidFill>
+                <a:latin typeface="Georgia" pitchFamily="34" charset="0"/>
+                <a:ea typeface="Georgia" pitchFamily="34" charset="-122"/>
+                <a:cs typeface="Georgia" pitchFamily="34" charset="-120"/>
+              </a:rPr>
+              <a:t>This is a draft for the longer Day 8–10 paper.</a:t>
+            </a:r>
+            <a:endParaRPr lang="en-US" sz="1200" dirty="0"/>
+          </a:p>
+        </p:txBody>
+      </p:sp>
+      <p:sp>
+        <p:nvSpPr>
+          <p:cNvPr id="6" name="Text 4"/>
+          <p:cNvSpPr/>
+          <p:nvPr/>
+        </p:nvSpPr>
+        <p:spPr>
+          <a:xfrm>
+            <a:off x="406301" y="4434929"/>
+            <a:ext cx="8498026" cy="213271"/>
+          </a:xfrm>
+          <a:prstGeom prst="rect">
+            <a:avLst/>
+          </a:prstGeom>
+          <a:noFill/>
+          <a:ln/>
+        </p:spPr>
+        <p:txBody>
+          <a:bodyPr wrap="square" lIns="0" tIns="0" rIns="0" bIns="0" rtlCol="0" anchor="t"/>
+          <a:lstStyle/>
+          <a:p>
+            <a:pPr algn="l" indent="0" marL="0">
+              <a:lnSpc>
+                <a:spcPts val="1680"/>
+              </a:lnSpc>
+              <a:spcBef>
+                <a:spcPts val="300"/>
+              </a:spcBef>
+              <a:spcAft>
+                <a:spcPts val="300"/>
+              </a:spcAft>
+              <a:buNone/>
+            </a:pPr>
+            <a:r>
+              <a:rPr lang="en-US" sz="1200" dirty="0">
+                <a:solidFill>
+                  <a:srgbClr val="1A1A1A"/>
+                </a:solidFill>
+                <a:latin typeface="Georgia" pitchFamily="34" charset="0"/>
+                <a:ea typeface="Georgia" pitchFamily="34" charset="-122"/>
+                <a:cs typeface="Georgia" pitchFamily="34" charset="-120"/>
+              </a:rPr>
+              <a:t>Senior ·  · IKS Curriculum</a:t>
+            </a:r>
+            <a:endParaRPr lang="en-US" sz="1200" dirty="0"/>
+          </a:p>
+        </p:txBody>
+      </p:sp>
+    </p:spTree>
+  </p:cSld>
+  <p:clrMapOvr>
+    <a:masterClrMapping/>
+  </p:clrMapOvr>
+</p:sld>
+</file>
+
+<file path=ppt/slides/slide13.xml><?xml version="1.0" encoding="utf-8"?>
+<p:sld xmlns:a="http://schemas.openxmlformats.org/drawingml/2006/main" xmlns:r="http://schemas.openxmlformats.org/officeDocument/2006/relationships" xmlns:p="http://schemas.openxmlformats.org/presentationml/2006/main">
+  <p:cSld name="Slide 13">
+    <p:bg>
+      <p:bgPr>
+        <a:solidFill>
+          <a:srgbClr val="FAF7F2"/>
+        </a:solidFill>
+      </p:bgPr>
+    </p:bg>
+    <p:spTree>
+      <p:nvGrpSpPr>
+        <p:cNvPr id="1" name=""/>
+        <p:cNvGrpSpPr/>
+        <p:nvPr/>
+      </p:nvGrpSpPr>
+      <p:grpSpPr>
+        <a:xfrm>
+          <a:off x="0" y="0"/>
+          <a:ext cx="0" cy="0"/>
+          <a:chOff x="0" y="0"/>
+          <a:chExt cx="0" cy="0"/>
+        </a:xfrm>
+      </p:grpSpPr>
+      <p:sp>
+        <p:nvSpPr>
+          <p:cNvPr id="2" name="Text 0"/>
+          <p:cNvSpPr/>
+          <p:nvPr/>
+        </p:nvSpPr>
+        <p:spPr>
+          <a:xfrm>
+            <a:off x="0" y="0"/>
+            <a:ext cx="9144000" cy="101501"/>
+          </a:xfrm>
+          <a:prstGeom prst="rect">
+            <a:avLst/>
+          </a:prstGeom>
+          <a:solidFill>
+            <a:srgbClr val="5D1D2E"/>
+          </a:solidFill>
+          <a:ln/>
+        </p:spPr>
+        <p:txBody>
+          <a:bodyPr wrap="square" rtlCol="0" anchor="ctr"/>
+          <a:lstStyle/>
+          <a:p>
+            <a:pPr indent="0" marL="0">
+              <a:buNone/>
+            </a:pPr>
+            <a:endParaRPr lang="en-US" dirty="0"/>
+          </a:p>
+        </p:txBody>
+      </p:sp>
+      <p:sp>
+        <p:nvSpPr>
+          <p:cNvPr id="3" name="Text 1"/>
+          <p:cNvSpPr/>
+          <p:nvPr/>
+        </p:nvSpPr>
+        <p:spPr>
+          <a:xfrm>
+            <a:off x="406301" y="457051"/>
+            <a:ext cx="8498026" cy="274290"/>
+          </a:xfrm>
+          <a:prstGeom prst="rect">
+            <a:avLst/>
+          </a:prstGeom>
+          <a:noFill/>
+          <a:ln/>
+        </p:spPr>
+        <p:txBody>
+          <a:bodyPr wrap="square" lIns="0" tIns="0" rIns="0" bIns="0" rtlCol="0" anchor="t"/>
+          <a:lstStyle/>
+          <a:p>
+            <a:pPr algn="l" indent="0" marL="0">
+              <a:lnSpc>
+                <a:spcPts val="2160"/>
+              </a:lnSpc>
+              <a:spcBef>
+                <a:spcPts val="600"/>
+              </a:spcBef>
+              <a:spcAft>
+                <a:spcPts val="800"/>
+              </a:spcAft>
+              <a:buNone/>
+            </a:pPr>
+            <a:r>
+              <a:rPr lang="en-US" sz="1800" b="1" dirty="0">
+                <a:solidFill>
+                  <a:srgbClr val="997929"/>
+                </a:solidFill>
+                <a:latin typeface="Times New Roman" pitchFamily="34" charset="0"/>
+                <a:ea typeface="Times New Roman" pitchFamily="34" charset="-122"/>
+                <a:cs typeface="Times New Roman" pitchFamily="34" charset="-120"/>
+              </a:rPr>
+              <a:t>Wrap-up (5 min)</a:t>
+            </a:r>
+            <a:endParaRPr lang="en-US" sz="1800" dirty="0"/>
+          </a:p>
+        </p:txBody>
+      </p:sp>
+      <p:sp>
+        <p:nvSpPr>
+          <p:cNvPr id="4" name="Text 2"/>
+          <p:cNvSpPr/>
+          <p:nvPr/>
+        </p:nvSpPr>
+        <p:spPr>
+          <a:xfrm>
+            <a:off x="634901" y="883593"/>
+            <a:ext cx="8102798" cy="281880"/>
+          </a:xfrm>
+          <a:prstGeom prst="rect">
+            <a:avLst/>
+          </a:prstGeom>
+          <a:noFill/>
+          <a:ln/>
+        </p:spPr>
+        <p:txBody>
+          <a:bodyPr wrap="square" lIns="0" tIns="0" rIns="0" bIns="0" rtlCol="0" anchor="t"/>
+          <a:lstStyle/>
+          <a:p>
+            <a:pPr algn="l" marL="342900" indent="-342900">
+              <a:lnSpc>
+                <a:spcPts val="1620"/>
+              </a:lnSpc>
+              <a:spcAft>
+                <a:spcPts val="300"/>
+              </a:spcAft>
+              <a:buSzPct val="100000"/>
+              <a:buChar char="•"/>
+            </a:pPr>
+            <a:r>
+              <a:rPr lang="en-US" sz="1200" dirty="0">
+                <a:solidFill>
+                  <a:srgbClr val="1A1A1A"/>
+                </a:solidFill>
+                <a:latin typeface="Georgia" pitchFamily="34" charset="0"/>
+                <a:ea typeface="Georgia" pitchFamily="34" charset="-122"/>
+                <a:cs typeface="Georgia" pitchFamily="34" charset="-120"/>
+              </a:rPr>
+              <a:t>Preview Day 5: </a:t>
+            </a:r>
+            <a:pPr algn="l" indent="0" marL="0">
+              <a:lnSpc>
+                <a:spcPts val="1620"/>
+              </a:lnSpc>
+              <a:spcAft>
+                <a:spcPts val="300"/>
+              </a:spcAft>
+              <a:buNone/>
+            </a:pPr>
+            <a:r>
               <a:rPr lang="en-US" sz="1200" i="1" dirty="0">
                 <a:solidFill>
                   <a:srgbClr val="1A1A1A"/>
@@ -2187,15 +3834,812 @@
                 <a:ea typeface="Georgia" pitchFamily="34" charset="-122"/>
                 <a:cs typeface="Georgia" pitchFamily="34" charset="-120"/>
               </a:rPr>
+              <a:t>"Tomorrow — we read SB 3.26.36 closely in IAST, word by word."</a:t>
+            </a:r>
+            <a:endParaRPr lang="en-US" sz="1200" dirty="0"/>
+          </a:p>
+        </p:txBody>
+      </p:sp>
+      <p:sp>
+        <p:nvSpPr>
+          <p:cNvPr id="5" name="Text 3"/>
+          <p:cNvSpPr/>
+          <p:nvPr/>
+        </p:nvSpPr>
+        <p:spPr>
+          <a:xfrm>
+            <a:off x="406301" y="4434929"/>
+            <a:ext cx="8498026" cy="213271"/>
+          </a:xfrm>
+          <a:prstGeom prst="rect">
+            <a:avLst/>
+          </a:prstGeom>
+          <a:noFill/>
+          <a:ln/>
+        </p:spPr>
+        <p:txBody>
+          <a:bodyPr wrap="square" lIns="0" tIns="0" rIns="0" bIns="0" rtlCol="0" anchor="t"/>
+          <a:lstStyle/>
+          <a:p>
+            <a:pPr algn="l" indent="0" marL="0">
+              <a:lnSpc>
+                <a:spcPts val="1680"/>
+              </a:lnSpc>
+              <a:spcBef>
+                <a:spcPts val="300"/>
+              </a:spcBef>
+              <a:spcAft>
+                <a:spcPts val="300"/>
+              </a:spcAft>
+              <a:buNone/>
+            </a:pPr>
+            <a:r>
+              <a:rPr lang="en-US" sz="1200" dirty="0">
+                <a:solidFill>
+                  <a:srgbClr val="1A1A1A"/>
+                </a:solidFill>
+                <a:latin typeface="Georgia" pitchFamily="34" charset="0"/>
+                <a:ea typeface="Georgia" pitchFamily="34" charset="-122"/>
+                <a:cs typeface="Georgia" pitchFamily="34" charset="-120"/>
+              </a:rPr>
+              <a:t>Senior ·  · IKS Curriculum</a:t>
+            </a:r>
+            <a:endParaRPr lang="en-US" sz="1200" dirty="0"/>
+          </a:p>
+        </p:txBody>
+      </p:sp>
+    </p:spTree>
+  </p:cSld>
+  <p:clrMapOvr>
+    <a:masterClrMapping/>
+  </p:clrMapOvr>
+</p:sld>
+</file>
+
+<file path=ppt/slides/slide14.xml><?xml version="1.0" encoding="utf-8"?>
+<p:sld xmlns:a="http://schemas.openxmlformats.org/drawingml/2006/main" xmlns:r="http://schemas.openxmlformats.org/officeDocument/2006/relationships" xmlns:p="http://schemas.openxmlformats.org/presentationml/2006/main">
+  <p:cSld name="Slide 14">
+    <p:bg>
+      <p:bgPr>
+        <a:solidFill>
+          <a:srgbClr val="FAF7F2"/>
+        </a:solidFill>
+      </p:bgPr>
+    </p:bg>
+    <p:spTree>
+      <p:nvGrpSpPr>
+        <p:cNvPr id="1" name=""/>
+        <p:cNvGrpSpPr/>
+        <p:nvPr/>
+      </p:nvGrpSpPr>
+      <p:grpSpPr>
+        <a:xfrm>
+          <a:off x="0" y="0"/>
+          <a:ext cx="0" cy="0"/>
+          <a:chOff x="0" y="0"/>
+          <a:chExt cx="0" cy="0"/>
+        </a:xfrm>
+      </p:grpSpPr>
+      <p:sp>
+        <p:nvSpPr>
+          <p:cNvPr id="2" name="Text 0"/>
+          <p:cNvSpPr/>
+          <p:nvPr/>
+        </p:nvSpPr>
+        <p:spPr>
+          <a:xfrm>
+            <a:off x="0" y="0"/>
+            <a:ext cx="9144000" cy="101501"/>
+          </a:xfrm>
+          <a:prstGeom prst="rect">
+            <a:avLst/>
+          </a:prstGeom>
+          <a:solidFill>
+            <a:srgbClr val="5D1D2E"/>
+          </a:solidFill>
+          <a:ln/>
+        </p:spPr>
+        <p:txBody>
+          <a:bodyPr wrap="square" rtlCol="0" anchor="ctr"/>
+          <a:lstStyle/>
+          <a:p>
+            <a:pPr indent="0" marL="0">
+              <a:buNone/>
+            </a:pPr>
+            <a:endParaRPr lang="en-US" dirty="0"/>
+          </a:p>
+        </p:txBody>
+      </p:sp>
+      <p:sp>
+        <p:nvSpPr>
+          <p:cNvPr id="3" name="Text 1"/>
+          <p:cNvSpPr/>
+          <p:nvPr/>
+        </p:nvSpPr>
+        <p:spPr>
+          <a:xfrm>
+            <a:off x="406301" y="457051"/>
+            <a:ext cx="8498026" cy="274290"/>
+          </a:xfrm>
+          <a:prstGeom prst="rect">
+            <a:avLst/>
+          </a:prstGeom>
+          <a:noFill/>
+          <a:ln/>
+        </p:spPr>
+        <p:txBody>
+          <a:bodyPr wrap="square" lIns="0" tIns="0" rIns="0" bIns="0" rtlCol="0" anchor="t"/>
+          <a:lstStyle/>
+          <a:p>
+            <a:pPr algn="l" indent="0" marL="0">
+              <a:lnSpc>
+                <a:spcPts val="2160"/>
+              </a:lnSpc>
+              <a:spcBef>
+                <a:spcPts val="600"/>
+              </a:spcBef>
+              <a:spcAft>
+                <a:spcPts val="800"/>
+              </a:spcAft>
+              <a:buNone/>
+            </a:pPr>
+            <a:r>
+              <a:rPr lang="en-US" sz="1800" b="1" dirty="0">
+                <a:solidFill>
+                  <a:srgbClr val="997929"/>
+                </a:solidFill>
+                <a:latin typeface="Times New Roman" pitchFamily="34" charset="0"/>
+                <a:ea typeface="Times New Roman" pitchFamily="34" charset="-122"/>
+                <a:cs typeface="Times New Roman" pitchFamily="34" charset="-120"/>
+              </a:rPr>
+              <a:t>Differentiation</a:t>
+            </a:r>
+            <a:endParaRPr lang="en-US" sz="1800" dirty="0"/>
+          </a:p>
+        </p:txBody>
+      </p:sp>
+      <p:sp>
+        <p:nvSpPr>
+          <p:cNvPr id="4" name="Text 2"/>
+          <p:cNvSpPr/>
+          <p:nvPr/>
+        </p:nvSpPr>
+        <p:spPr>
+          <a:xfrm>
+            <a:off x="634901" y="883593"/>
+            <a:ext cx="8102798" cy="731341"/>
+          </a:xfrm>
+          <a:prstGeom prst="rect">
+            <a:avLst/>
+          </a:prstGeom>
+          <a:noFill/>
+          <a:ln/>
+        </p:spPr>
+        <p:txBody>
+          <a:bodyPr wrap="square" lIns="0" tIns="0" rIns="0" bIns="0" rtlCol="0" anchor="t"/>
+          <a:lstStyle/>
+          <a:p>
+            <a:pPr algn="l" marL="342900" indent="-342900">
+              <a:lnSpc>
+                <a:spcPts val="1620"/>
+              </a:lnSpc>
+              <a:spcAft>
+                <a:spcPts val="300"/>
+              </a:spcAft>
+              <a:buSzPct val="100000"/>
+              <a:buChar char="•"/>
+            </a:pPr>
+            <a:r>
+              <a:rPr lang="en-US" sz="1200" b="1" dirty="0">
+                <a:solidFill>
+                  <a:srgbClr val="1A1A1A"/>
+                </a:solidFill>
+                <a:latin typeface="Georgia" pitchFamily="34" charset="0"/>
+                <a:ea typeface="Georgia" pitchFamily="34" charset="-122"/>
+                <a:cs typeface="Georgia" pitchFamily="34" charset="-120"/>
+              </a:rPr>
+              <a:t>Tier up:</a:t>
+            </a:r>
+            <a:pPr algn="l" indent="0" marL="0">
+              <a:lnSpc>
+                <a:spcPts val="1620"/>
+              </a:lnSpc>
+              <a:spcAft>
+                <a:spcPts val="300"/>
+              </a:spcAft>
+              <a:buNone/>
+            </a:pPr>
+            <a:r>
+              <a:rPr lang="en-US" sz="1200" dirty="0">
+                <a:solidFill>
+                  <a:srgbClr val="1A1A1A"/>
+                </a:solidFill>
+                <a:latin typeface="Georgia" pitchFamily="34" charset="0"/>
+                <a:ea typeface="Georgia" pitchFamily="34" charset="-122"/>
+                <a:cs typeface="Georgia" pitchFamily="34" charset="-120"/>
+              </a:rPr>
+              <a:t> Read Empedocles fragment B17 (on Love and Strife) in translation; write 1 paragraph on whether the </a:t>
+            </a:r>
+            <a:pPr algn="l" indent="0" marL="0">
+              <a:lnSpc>
+                <a:spcPts val="1620"/>
+              </a:lnSpc>
+              <a:spcAft>
+                <a:spcPts val="300"/>
+              </a:spcAft>
+              <a:buNone/>
+            </a:pPr>
+            <a:r>
+              <a:rPr lang="en-US" sz="1200" i="1" dirty="0">
+                <a:solidFill>
+                  <a:srgbClr val="1A1A1A"/>
+                </a:solidFill>
+                <a:latin typeface="Georgia" pitchFamily="34" charset="0"/>
+                <a:ea typeface="Georgia" pitchFamily="34" charset="-122"/>
+                <a:cs typeface="Georgia" pitchFamily="34" charset="-120"/>
+              </a:rPr>
+              <a:t>guṇa</a:t>
+            </a:r>
+            <a:pPr algn="l" indent="0" marL="0">
+              <a:lnSpc>
+                <a:spcPts val="1620"/>
+              </a:lnSpc>
+              <a:spcAft>
+                <a:spcPts val="300"/>
+              </a:spcAft>
+              <a:buNone/>
+            </a:pPr>
+            <a:r>
+              <a:rPr lang="en-US" sz="1200" dirty="0">
+                <a:solidFill>
+                  <a:srgbClr val="1A1A1A"/>
+                </a:solidFill>
+                <a:latin typeface="Georgia" pitchFamily="34" charset="0"/>
+                <a:ea typeface="Georgia" pitchFamily="34" charset="-122"/>
+                <a:cs typeface="Georgia" pitchFamily="34" charset="-120"/>
+              </a:rPr>
+              <a:t> doctrine in Sāṅkhya is structurally parallel.</a:t>
+            </a:r>
+            <a:endParaRPr lang="en-US" sz="1200" dirty="0"/>
+          </a:p>
+          <a:p>
+            <a:pPr algn="l" marL="342900" indent="-342900">
+              <a:lnSpc>
+                <a:spcPts val="1620"/>
+              </a:lnSpc>
+              <a:spcAft>
+                <a:spcPts val="300"/>
+              </a:spcAft>
+              <a:buSzPct val="100000"/>
+              <a:buChar char="•"/>
+            </a:pPr>
+            <a:r>
+              <a:rPr lang="en-US" sz="1200" b="1" dirty="0">
+                <a:solidFill>
+                  <a:srgbClr val="1A1A1A"/>
+                </a:solidFill>
+                <a:latin typeface="Georgia" pitchFamily="34" charset="0"/>
+                <a:ea typeface="Georgia" pitchFamily="34" charset="-122"/>
+                <a:cs typeface="Georgia" pitchFamily="34" charset="-120"/>
+              </a:rPr>
+              <a:t>Tier down:</a:t>
+            </a:r>
+            <a:pPr algn="l" indent="0" marL="0">
+              <a:lnSpc>
+                <a:spcPts val="1620"/>
+              </a:lnSpc>
+              <a:spcAft>
+                <a:spcPts val="300"/>
+              </a:spcAft>
+              <a:buNone/>
+            </a:pPr>
+            <a:r>
+              <a:rPr lang="en-US" sz="1200" dirty="0">
+                <a:solidFill>
+                  <a:srgbClr val="1A1A1A"/>
+                </a:solidFill>
+                <a:latin typeface="Georgia" pitchFamily="34" charset="0"/>
+                <a:ea typeface="Georgia" pitchFamily="34" charset="-122"/>
+                <a:cs typeface="Georgia" pitchFamily="34" charset="-120"/>
+              </a:rPr>
+              <a:t> Focus on Aristotle alone; skip Empedocles for now.</a:t>
+            </a:r>
+            <a:endParaRPr lang="en-US" sz="1200" dirty="0"/>
+          </a:p>
+        </p:txBody>
+      </p:sp>
+      <p:sp>
+        <p:nvSpPr>
+          <p:cNvPr id="5" name="Text 3"/>
+          <p:cNvSpPr/>
+          <p:nvPr/>
+        </p:nvSpPr>
+        <p:spPr>
+          <a:xfrm>
+            <a:off x="406301" y="4434929"/>
+            <a:ext cx="8498026" cy="213271"/>
+          </a:xfrm>
+          <a:prstGeom prst="rect">
+            <a:avLst/>
+          </a:prstGeom>
+          <a:noFill/>
+          <a:ln/>
+        </p:spPr>
+        <p:txBody>
+          <a:bodyPr wrap="square" lIns="0" tIns="0" rIns="0" bIns="0" rtlCol="0" anchor="t"/>
+          <a:lstStyle/>
+          <a:p>
+            <a:pPr algn="l" indent="0" marL="0">
+              <a:lnSpc>
+                <a:spcPts val="1680"/>
+              </a:lnSpc>
+              <a:spcBef>
+                <a:spcPts val="300"/>
+              </a:spcBef>
+              <a:spcAft>
+                <a:spcPts val="300"/>
+              </a:spcAft>
+              <a:buNone/>
+            </a:pPr>
+            <a:r>
+              <a:rPr lang="en-US" sz="1200" dirty="0">
+                <a:solidFill>
+                  <a:srgbClr val="1A1A1A"/>
+                </a:solidFill>
+                <a:latin typeface="Georgia" pitchFamily="34" charset="0"/>
+                <a:ea typeface="Georgia" pitchFamily="34" charset="-122"/>
+                <a:cs typeface="Georgia" pitchFamily="34" charset="-120"/>
+              </a:rPr>
+              <a:t>Senior ·  · IKS Curriculum</a:t>
+            </a:r>
+            <a:endParaRPr lang="en-US" sz="1200" dirty="0"/>
+          </a:p>
+        </p:txBody>
+      </p:sp>
+    </p:spTree>
+  </p:cSld>
+  <p:clrMapOvr>
+    <a:masterClrMapping/>
+  </p:clrMapOvr>
+</p:sld>
+</file>
+
+<file path=ppt/slides/slide15.xml><?xml version="1.0" encoding="utf-8"?>
+<p:sld xmlns:a="http://schemas.openxmlformats.org/drawingml/2006/main" xmlns:r="http://schemas.openxmlformats.org/officeDocument/2006/relationships" xmlns:p="http://schemas.openxmlformats.org/presentationml/2006/main">
+  <p:cSld name="Slide 15">
+    <p:bg>
+      <p:bgPr>
+        <a:solidFill>
+          <a:srgbClr val="FAF7F2"/>
+        </a:solidFill>
+      </p:bgPr>
+    </p:bg>
+    <p:spTree>
+      <p:nvGrpSpPr>
+        <p:cNvPr id="1" name=""/>
+        <p:cNvGrpSpPr/>
+        <p:nvPr/>
+      </p:nvGrpSpPr>
+      <p:grpSpPr>
+        <a:xfrm>
+          <a:off x="0" y="0"/>
+          <a:ext cx="0" cy="0"/>
+          <a:chOff x="0" y="0"/>
+          <a:chExt cx="0" cy="0"/>
+        </a:xfrm>
+      </p:grpSpPr>
+      <p:sp>
+        <p:nvSpPr>
+          <p:cNvPr id="2" name="Text 0"/>
+          <p:cNvSpPr/>
+          <p:nvPr/>
+        </p:nvSpPr>
+        <p:spPr>
+          <a:xfrm>
+            <a:off x="0" y="0"/>
+            <a:ext cx="9144000" cy="101501"/>
+          </a:xfrm>
+          <a:prstGeom prst="rect">
+            <a:avLst/>
+          </a:prstGeom>
+          <a:solidFill>
+            <a:srgbClr val="5D1D2E"/>
+          </a:solidFill>
+          <a:ln/>
+        </p:spPr>
+        <p:txBody>
+          <a:bodyPr wrap="square" rtlCol="0" anchor="ctr"/>
+          <a:lstStyle/>
+          <a:p>
+            <a:pPr indent="0" marL="0">
+              <a:buNone/>
+            </a:pPr>
+            <a:endParaRPr lang="en-US" dirty="0"/>
+          </a:p>
+        </p:txBody>
+      </p:sp>
+      <p:sp>
+        <p:nvSpPr>
+          <p:cNvPr id="3" name="Text 1"/>
+          <p:cNvSpPr/>
+          <p:nvPr/>
+        </p:nvSpPr>
+        <p:spPr>
+          <a:xfrm>
+            <a:off x="406301" y="457051"/>
+            <a:ext cx="8498026" cy="274290"/>
+          </a:xfrm>
+          <a:prstGeom prst="rect">
+            <a:avLst/>
+          </a:prstGeom>
+          <a:noFill/>
+          <a:ln/>
+        </p:spPr>
+        <p:txBody>
+          <a:bodyPr wrap="square" lIns="0" tIns="0" rIns="0" bIns="0" rtlCol="0" anchor="t"/>
+          <a:lstStyle/>
+          <a:p>
+            <a:pPr algn="l" indent="0" marL="0">
+              <a:lnSpc>
+                <a:spcPts val="2160"/>
+              </a:lnSpc>
+              <a:spcBef>
+                <a:spcPts val="600"/>
+              </a:spcBef>
+              <a:spcAft>
+                <a:spcPts val="800"/>
+              </a:spcAft>
+              <a:buNone/>
+            </a:pPr>
+            <a:r>
+              <a:rPr lang="en-US" sz="1800" b="1" dirty="0">
+                <a:solidFill>
+                  <a:srgbClr val="997929"/>
+                </a:solidFill>
+                <a:latin typeface="Times New Roman" pitchFamily="34" charset="0"/>
+                <a:ea typeface="Times New Roman" pitchFamily="34" charset="-122"/>
+                <a:cs typeface="Times New Roman" pitchFamily="34" charset="-120"/>
+              </a:rPr>
+              <a:t>Teacher notes</a:t>
+            </a:r>
+            <a:endParaRPr lang="en-US" sz="1800" dirty="0"/>
+          </a:p>
+        </p:txBody>
+      </p:sp>
+      <p:sp>
+        <p:nvSpPr>
+          <p:cNvPr id="4" name="Text 2"/>
+          <p:cNvSpPr/>
+          <p:nvPr/>
+        </p:nvSpPr>
+        <p:spPr>
+          <a:xfrm>
+            <a:off x="634901" y="883593"/>
+            <a:ext cx="8102798" cy="937022"/>
+          </a:xfrm>
+          <a:prstGeom prst="rect">
+            <a:avLst/>
+          </a:prstGeom>
+          <a:noFill/>
+          <a:ln/>
+        </p:spPr>
+        <p:txBody>
+          <a:bodyPr wrap="square" lIns="0" tIns="0" rIns="0" bIns="0" rtlCol="0" anchor="t"/>
+          <a:lstStyle/>
+          <a:p>
+            <a:pPr algn="l" marL="342900" indent="-342900">
+              <a:lnSpc>
+                <a:spcPts val="1620"/>
+              </a:lnSpc>
+              <a:spcAft>
+                <a:spcPts val="300"/>
+              </a:spcAft>
+              <a:buSzPct val="100000"/>
+              <a:buChar char="•"/>
+            </a:pPr>
+            <a:r>
+              <a:rPr lang="en-US" sz="1200" dirty="0">
+                <a:solidFill>
+                  <a:srgbClr val="1A1A1A"/>
+                </a:solidFill>
+                <a:latin typeface="Georgia" pitchFamily="34" charset="0"/>
+                <a:ea typeface="Georgia" pitchFamily="34" charset="-122"/>
+                <a:cs typeface="Georgia" pitchFamily="34" charset="-120"/>
+              </a:rPr>
+              <a:t>The asymmetry on perceptual mapping (Sāṅkhya YES, Greek NO) is the most distinctive cross-cultural point. Push students to notice it.</a:t>
+            </a:r>
+            <a:endParaRPr lang="en-US" sz="1200" dirty="0"/>
+          </a:p>
+          <a:p>
+            <a:pPr algn="l" marL="342900" indent="-342900">
+              <a:lnSpc>
+                <a:spcPts val="1620"/>
+              </a:lnSpc>
+              <a:spcAft>
+                <a:spcPts val="300"/>
+              </a:spcAft>
+              <a:buSzPct val="100000"/>
+              <a:buChar char="•"/>
+            </a:pPr>
+            <a:r>
+              <a:rPr lang="en-US" sz="1200" dirty="0">
+                <a:solidFill>
+                  <a:srgbClr val="1A1A1A"/>
+                </a:solidFill>
+                <a:latin typeface="Georgia" pitchFamily="34" charset="0"/>
+                <a:ea typeface="Georgia" pitchFamily="34" charset="-122"/>
+                <a:cs typeface="Georgia" pitchFamily="34" charset="-120"/>
+              </a:rPr>
+              <a:t>Some students will be tempted to conclude "Sāṅkhya is more sophisticated." Push back: </a:t>
+            </a:r>
+            <a:pPr algn="l" indent="0" marL="0">
+              <a:lnSpc>
+                <a:spcPts val="1620"/>
+              </a:lnSpc>
+              <a:spcAft>
+                <a:spcPts val="300"/>
+              </a:spcAft>
+              <a:buNone/>
+            </a:pPr>
+            <a:r>
+              <a:rPr lang="en-US" sz="1200" i="1" dirty="0">
+                <a:solidFill>
+                  <a:srgbClr val="1A1A1A"/>
+                </a:solidFill>
+                <a:latin typeface="Georgia" pitchFamily="34" charset="0"/>
+                <a:ea typeface="Georgia" pitchFamily="34" charset="-122"/>
+                <a:cs typeface="Georgia" pitchFamily="34" charset="-120"/>
+              </a:rPr>
+              <a:t>more sophisticated in what way?</a:t>
+            </a:r>
+            <a:pPr algn="l" indent="0" marL="0">
+              <a:lnSpc>
+                <a:spcPts val="1620"/>
+              </a:lnSpc>
+              <a:spcAft>
+                <a:spcPts val="300"/>
+              </a:spcAft>
+              <a:buNone/>
+            </a:pPr>
+            <a:r>
+              <a:rPr lang="en-US" sz="1200" dirty="0">
+                <a:solidFill>
+                  <a:srgbClr val="1A1A1A"/>
+                </a:solidFill>
+                <a:latin typeface="Georgia" pitchFamily="34" charset="0"/>
+                <a:ea typeface="Georgia" pitchFamily="34" charset="-122"/>
+                <a:cs typeface="Georgia" pitchFamily="34" charset="-120"/>
+              </a:rPr>
+              <a:t> (More internal symmetry, yes. More predictive of chemical behaviour, no.)</a:t>
+            </a:r>
+            <a:endParaRPr lang="en-US" sz="1200" dirty="0"/>
+          </a:p>
+        </p:txBody>
+      </p:sp>
+      <p:sp>
+        <p:nvSpPr>
+          <p:cNvPr id="5" name="Text 3"/>
+          <p:cNvSpPr/>
+          <p:nvPr/>
+        </p:nvSpPr>
+        <p:spPr>
+          <a:xfrm>
+            <a:off x="406301" y="4434929"/>
+            <a:ext cx="8498026" cy="213271"/>
+          </a:xfrm>
+          <a:prstGeom prst="rect">
+            <a:avLst/>
+          </a:prstGeom>
+          <a:noFill/>
+          <a:ln/>
+        </p:spPr>
+        <p:txBody>
+          <a:bodyPr wrap="square" lIns="0" tIns="0" rIns="0" bIns="0" rtlCol="0" anchor="t"/>
+          <a:lstStyle/>
+          <a:p>
+            <a:pPr algn="l" indent="0" marL="0">
+              <a:lnSpc>
+                <a:spcPts val="1680"/>
+              </a:lnSpc>
+              <a:spcBef>
+                <a:spcPts val="300"/>
+              </a:spcBef>
+              <a:spcAft>
+                <a:spcPts val="300"/>
+              </a:spcAft>
+              <a:buNone/>
+            </a:pPr>
+            <a:r>
+              <a:rPr lang="en-US" sz="1200" dirty="0">
+                <a:solidFill>
+                  <a:srgbClr val="1A1A1A"/>
+                </a:solidFill>
+                <a:latin typeface="Georgia" pitchFamily="34" charset="0"/>
+                <a:ea typeface="Georgia" pitchFamily="34" charset="-122"/>
+                <a:cs typeface="Georgia" pitchFamily="34" charset="-120"/>
+              </a:rPr>
+              <a:t>Senior ·  · IKS Curriculum</a:t>
+            </a:r>
+            <a:endParaRPr lang="en-US" sz="1200" dirty="0"/>
+          </a:p>
+        </p:txBody>
+      </p:sp>
+    </p:spTree>
+  </p:cSld>
+  <p:clrMapOvr>
+    <a:masterClrMapping/>
+  </p:clrMapOvr>
+</p:sld>
+</file>
+
+<file path=ppt/slides/slide16.xml><?xml version="1.0" encoding="utf-8"?>
+<p:sld xmlns:a="http://schemas.openxmlformats.org/drawingml/2006/main" xmlns:r="http://schemas.openxmlformats.org/officeDocument/2006/relationships" xmlns:p="http://schemas.openxmlformats.org/presentationml/2006/main">
+  <p:cSld name="Slide 16">
+    <p:bg>
+      <p:bgPr>
+        <a:solidFill>
+          <a:srgbClr val="FAF7F2"/>
+        </a:solidFill>
+      </p:bgPr>
+    </p:bg>
+    <p:spTree>
+      <p:nvGrpSpPr>
+        <p:cNvPr id="1" name=""/>
+        <p:cNvGrpSpPr/>
+        <p:nvPr/>
+      </p:nvGrpSpPr>
+      <p:grpSpPr>
+        <a:xfrm>
+          <a:off x="0" y="0"/>
+          <a:ext cx="0" cy="0"/>
+          <a:chOff x="0" y="0"/>
+          <a:chExt cx="0" cy="0"/>
+        </a:xfrm>
+      </p:grpSpPr>
+      <p:sp>
+        <p:nvSpPr>
+          <p:cNvPr id="2" name="Text 0"/>
+          <p:cNvSpPr/>
+          <p:nvPr/>
+        </p:nvSpPr>
+        <p:spPr>
+          <a:xfrm>
+            <a:off x="0" y="0"/>
+            <a:ext cx="9144000" cy="101501"/>
+          </a:xfrm>
+          <a:prstGeom prst="rect">
+            <a:avLst/>
+          </a:prstGeom>
+          <a:solidFill>
+            <a:srgbClr val="5D1D2E"/>
+          </a:solidFill>
+          <a:ln/>
+        </p:spPr>
+        <p:txBody>
+          <a:bodyPr wrap="square" rtlCol="0" anchor="ctr"/>
+          <a:lstStyle/>
+          <a:p>
+            <a:pPr indent="0" marL="0">
+              <a:buNone/>
+            </a:pPr>
+            <a:endParaRPr lang="en-US" dirty="0"/>
+          </a:p>
+        </p:txBody>
+      </p:sp>
+      <p:sp>
+        <p:nvSpPr>
+          <p:cNvPr id="3" name="Text 1"/>
+          <p:cNvSpPr/>
+          <p:nvPr/>
+        </p:nvSpPr>
+        <p:spPr>
+          <a:xfrm>
+            <a:off x="406301" y="457051"/>
+            <a:ext cx="8498026" cy="274290"/>
+          </a:xfrm>
+          <a:prstGeom prst="rect">
+            <a:avLst/>
+          </a:prstGeom>
+          <a:noFill/>
+          <a:ln/>
+        </p:spPr>
+        <p:txBody>
+          <a:bodyPr wrap="square" lIns="0" tIns="0" rIns="0" bIns="0" rtlCol="0" anchor="t"/>
+          <a:lstStyle/>
+          <a:p>
+            <a:pPr algn="l" indent="0" marL="0">
+              <a:lnSpc>
+                <a:spcPts val="2160"/>
+              </a:lnSpc>
+              <a:spcBef>
+                <a:spcPts val="600"/>
+              </a:spcBef>
+              <a:spcAft>
+                <a:spcPts val="800"/>
+              </a:spcAft>
+              <a:buNone/>
+            </a:pPr>
+            <a:r>
+              <a:rPr lang="en-US" sz="1800" b="1" dirty="0">
+                <a:solidFill>
+                  <a:srgbClr val="997929"/>
+                </a:solidFill>
+                <a:latin typeface="Times New Roman" pitchFamily="34" charset="0"/>
+                <a:ea typeface="Times New Roman" pitchFamily="34" charset="-122"/>
+                <a:cs typeface="Times New Roman" pitchFamily="34" charset="-120"/>
+              </a:rPr>
+              <a:t>Citation(s) used</a:t>
+            </a:r>
+            <a:endParaRPr lang="en-US" sz="1800" dirty="0"/>
+          </a:p>
+        </p:txBody>
+      </p:sp>
+      <p:sp>
+        <p:nvSpPr>
+          <p:cNvPr id="4" name="Text 2"/>
+          <p:cNvSpPr/>
+          <p:nvPr/>
+        </p:nvSpPr>
+        <p:spPr>
+          <a:xfrm>
+            <a:off x="634901" y="883593"/>
+            <a:ext cx="8102798" cy="731341"/>
+          </a:xfrm>
+          <a:prstGeom prst="rect">
+            <a:avLst/>
+          </a:prstGeom>
+          <a:noFill/>
+          <a:ln/>
+        </p:spPr>
+        <p:txBody>
+          <a:bodyPr wrap="square" lIns="0" tIns="0" rIns="0" bIns="0" rtlCol="0" anchor="t"/>
+          <a:lstStyle/>
+          <a:p>
+            <a:pPr algn="l" marL="342900" indent="-342900">
+              <a:lnSpc>
+                <a:spcPts val="1620"/>
+              </a:lnSpc>
+              <a:spcAft>
+                <a:spcPts val="300"/>
+              </a:spcAft>
+              <a:buSzPct val="100000"/>
+              <a:buChar char="•"/>
+            </a:pPr>
+            <a:r>
+              <a:rPr lang="en-US" sz="1200" dirty="0">
+                <a:solidFill>
+                  <a:srgbClr val="1A1A1A"/>
+                </a:solidFill>
+                <a:latin typeface="Georgia" pitchFamily="34" charset="0"/>
+                <a:ea typeface="Georgia" pitchFamily="34" charset="-122"/>
+                <a:cs typeface="Georgia" pitchFamily="34" charset="-120"/>
+              </a:rPr>
+              <a:t>Kirk, G. S., Raven, J. E., &amp; Schofield, M. (1983). </a:t>
+            </a:r>
+            <a:pPr algn="l" indent="0" marL="0">
+              <a:lnSpc>
+                <a:spcPts val="1620"/>
+              </a:lnSpc>
+              <a:spcAft>
+                <a:spcPts val="300"/>
+              </a:spcAft>
+              <a:buNone/>
+            </a:pPr>
+            <a:r>
+              <a:rPr lang="en-US" sz="1200" i="1" dirty="0">
+                <a:solidFill>
+                  <a:srgbClr val="1A1A1A"/>
+                </a:solidFill>
+                <a:latin typeface="Georgia" pitchFamily="34" charset="0"/>
+                <a:ea typeface="Georgia" pitchFamily="34" charset="-122"/>
+                <a:cs typeface="Georgia" pitchFamily="34" charset="-120"/>
+              </a:rPr>
               <a:t>The Presocratic Philosophers</a:t>
             </a:r>
             <a:pPr algn="l" indent="0" marL="0">
               <a:lnSpc>
-                <a:spcPts val="1680"/>
-              </a:lnSpc>
-              <a:spcBef>
-                <a:spcPts val="300"/>
-              </a:spcBef>
+                <a:spcPts val="1620"/>
+              </a:lnSpc>
               <a:spcAft>
                 <a:spcPts val="300"/>
               </a:spcAft>
@@ -2210,15 +4654,36 @@
                 <a:ea typeface="Georgia" pitchFamily="34" charset="-122"/>
                 <a:cs typeface="Georgia" pitchFamily="34" charset="-120"/>
               </a:rPr>
-              <a:t> (2nd ed.). Cambridge University Press. — Empedocles fragments. – Aristotle, </a:t>
-            </a:r>
-            <a:pPr algn="l" indent="0" marL="0">
-              <a:lnSpc>
-                <a:spcPts val="1680"/>
-              </a:lnSpc>
-              <a:spcBef>
-                <a:spcPts val="300"/>
-              </a:spcBef>
+              <a:t> (2nd ed.). Cambridge University Press. — Empedocles fragments.</a:t>
+            </a:r>
+            <a:endParaRPr lang="en-US" sz="1200" dirty="0"/>
+          </a:p>
+          <a:p>
+            <a:pPr algn="l" marL="342900" indent="-342900">
+              <a:lnSpc>
+                <a:spcPts val="1620"/>
+              </a:lnSpc>
+              <a:spcAft>
+                <a:spcPts val="300"/>
+              </a:spcAft>
+              <a:buSzPct val="100000"/>
+              <a:buChar char="•"/>
+            </a:pPr>
+            <a:r>
+              <a:rPr lang="en-US" sz="1200" dirty="0">
+                <a:solidFill>
+                  <a:srgbClr val="1A1A1A"/>
+                </a:solidFill>
+                <a:latin typeface="Georgia" pitchFamily="34" charset="0"/>
+                <a:ea typeface="Georgia" pitchFamily="34" charset="-122"/>
+                <a:cs typeface="Georgia" pitchFamily="34" charset="-120"/>
+              </a:rPr>
+              <a:t>Aristotle, </a:t>
+            </a:r>
+            <a:pPr algn="l" indent="0" marL="0">
+              <a:lnSpc>
+                <a:spcPts val="1620"/>
+              </a:lnSpc>
               <a:spcAft>
                 <a:spcPts val="300"/>
               </a:spcAft>
@@ -2237,11 +4702,8 @@
             </a:r>
             <a:pPr algn="l" indent="0" marL="0">
               <a:lnSpc>
-                <a:spcPts val="1680"/>
-              </a:lnSpc>
-              <a:spcBef>
-                <a:spcPts val="300"/>
-              </a:spcBef>
+                <a:spcPts val="1620"/>
+              </a:lnSpc>
               <a:spcAft>
                 <a:spcPts val="300"/>
               </a:spcAft>
@@ -2414,7 +4876,7 @@
                 <a:ea typeface="Times New Roman" pitchFamily="34" charset="-122"/>
                 <a:cs typeface="Times New Roman" pitchFamily="34" charset="-120"/>
               </a:rPr>
-              <a:t>Materials</a:t>
+              <a:t>Learning objective</a:t>
             </a:r>
             <a:endParaRPr lang="en-US" sz="1800" dirty="0"/>
           </a:p>
@@ -2429,7 +4891,7 @@
         <p:spPr>
           <a:xfrm>
             <a:off x="406301" y="870942"/>
-            <a:ext cx="8498026" cy="639812"/>
+            <a:ext cx="8498026" cy="426541"/>
           </a:xfrm>
           <a:prstGeom prst="rect">
             <a:avLst/>
@@ -2462,53 +4924,7 @@
                 <a:ea typeface="Georgia" pitchFamily="34" charset="-122"/>
                 <a:cs typeface="Georgia" pitchFamily="34" charset="-120"/>
               </a:rPr>
-              <a:t>– Printed extracts: – Empedocles fragments on the four roots (Kirk, Raven &amp; Schofield translation) – Aristotle, </a:t>
-            </a:r>
-            <a:pPr algn="l" indent="0" marL="0">
-              <a:lnSpc>
-                <a:spcPts val="1680"/>
-              </a:lnSpc>
-              <a:spcBef>
-                <a:spcPts val="300"/>
-              </a:spcBef>
-              <a:spcAft>
-                <a:spcPts val="300"/>
-              </a:spcAft>
-              <a:buNone/>
-            </a:pPr>
-            <a:r>
-              <a:rPr lang="en-US" sz="1200" i="1" dirty="0">
-                <a:solidFill>
-                  <a:srgbClr val="1A1A1A"/>
-                </a:solidFill>
-                <a:latin typeface="Georgia" pitchFamily="34" charset="0"/>
-                <a:ea typeface="Georgia" pitchFamily="34" charset="-122"/>
-                <a:cs typeface="Georgia" pitchFamily="34" charset="-120"/>
-              </a:rPr>
-              <a:t>On Generation and Corruption</a:t>
-            </a:r>
-            <a:pPr algn="l" indent="0" marL="0">
-              <a:lnSpc>
-                <a:spcPts val="1680"/>
-              </a:lnSpc>
-              <a:spcBef>
-                <a:spcPts val="300"/>
-              </a:spcBef>
-              <a:spcAft>
-                <a:spcPts val="300"/>
-              </a:spcAft>
-              <a:buNone/>
-            </a:pPr>
-            <a:r>
-              <a:rPr lang="en-US" sz="1200" dirty="0">
-                <a:solidFill>
-                  <a:srgbClr val="1A1A1A"/>
-                </a:solidFill>
-                <a:latin typeface="Georgia" pitchFamily="34" charset="0"/>
-                <a:ea typeface="Georgia" pitchFamily="34" charset="-122"/>
-                <a:cs typeface="Georgia" pitchFamily="34" charset="-120"/>
-              </a:rPr>
-              <a:t>, II.3 (on the four elements + aither) – Whiteboard – Side-by-side comparison worksheet (blank)</a:t>
+              <a:t>Students compare the Greek (Empedocles + Aristotle) four/five element scheme with Sāṅkhya, identifying at least three structural differences and one structural similarity.</a:t>
             </a:r>
             <a:endParaRPr lang="en-US" sz="1200" dirty="0"/>
           </a:p>
@@ -2666,7 +5082,7 @@
                 <a:ea typeface="Times New Roman" pitchFamily="34" charset="-122"/>
                 <a:cs typeface="Times New Roman" pitchFamily="34" charset="-120"/>
               </a:rPr>
-              <a:t>Flow</a:t>
+              <a:t>Materials</a:t>
             </a:r>
             <a:endParaRPr lang="en-US" sz="1800" dirty="0"/>
           </a:p>
@@ -2675,6 +5091,188 @@
       <p:sp>
         <p:nvSpPr>
           <p:cNvPr id="4" name="Text 2"/>
+          <p:cNvSpPr/>
+          <p:nvPr/>
+        </p:nvSpPr>
+        <p:spPr>
+          <a:xfrm>
+            <a:off x="634901" y="883593"/>
+            <a:ext cx="8102798" cy="1257002"/>
+          </a:xfrm>
+          <a:prstGeom prst="rect">
+            <a:avLst/>
+          </a:prstGeom>
+          <a:noFill/>
+          <a:ln/>
+        </p:spPr>
+        <p:txBody>
+          <a:bodyPr wrap="square" lIns="0" tIns="0" rIns="0" bIns="0" rtlCol="0" anchor="t"/>
+          <a:lstStyle/>
+          <a:p>
+            <a:pPr algn="l" marL="342900" indent="-342900">
+              <a:lnSpc>
+                <a:spcPts val="1620"/>
+              </a:lnSpc>
+              <a:spcAft>
+                <a:spcPts val="300"/>
+              </a:spcAft>
+              <a:buSzPct val="100000"/>
+              <a:buChar char="•"/>
+            </a:pPr>
+            <a:r>
+              <a:rPr lang="en-US" sz="1200" dirty="0">
+                <a:solidFill>
+                  <a:srgbClr val="1A1A1A"/>
+                </a:solidFill>
+                <a:latin typeface="Georgia" pitchFamily="34" charset="0"/>
+                <a:ea typeface="Georgia" pitchFamily="34" charset="-122"/>
+                <a:cs typeface="Georgia" pitchFamily="34" charset="-120"/>
+              </a:rPr>
+              <a:t>Printed extracts:</a:t>
+            </a:r>
+            <a:endParaRPr lang="en-US" sz="1200" dirty="0"/>
+          </a:p>
+          <a:p>
+            <a:pPr algn="l" marL="342900" indent="-342900">
+              <a:lnSpc>
+                <a:spcPts val="1620"/>
+              </a:lnSpc>
+              <a:spcAft>
+                <a:spcPts val="300"/>
+              </a:spcAft>
+              <a:buSzPct val="100000"/>
+              <a:buChar char="•"/>
+            </a:pPr>
+            <a:r>
+              <a:rPr lang="en-US" sz="1200" dirty="0">
+                <a:solidFill>
+                  <a:srgbClr val="1A1A1A"/>
+                </a:solidFill>
+                <a:latin typeface="Georgia" pitchFamily="34" charset="0"/>
+                <a:ea typeface="Georgia" pitchFamily="34" charset="-122"/>
+                <a:cs typeface="Georgia" pitchFamily="34" charset="-120"/>
+              </a:rPr>
+              <a:t>Empedocles fragments on the four roots (Kirk, Raven &amp; Schofield translation)</a:t>
+            </a:r>
+            <a:endParaRPr lang="en-US" sz="1200" dirty="0"/>
+          </a:p>
+          <a:p>
+            <a:pPr algn="l" marL="342900" indent="-342900">
+              <a:lnSpc>
+                <a:spcPts val="1620"/>
+              </a:lnSpc>
+              <a:spcAft>
+                <a:spcPts val="300"/>
+              </a:spcAft>
+              <a:buSzPct val="100000"/>
+              <a:buChar char="•"/>
+            </a:pPr>
+            <a:r>
+              <a:rPr lang="en-US" sz="1200" dirty="0">
+                <a:solidFill>
+                  <a:srgbClr val="1A1A1A"/>
+                </a:solidFill>
+                <a:latin typeface="Georgia" pitchFamily="34" charset="0"/>
+                <a:ea typeface="Georgia" pitchFamily="34" charset="-122"/>
+                <a:cs typeface="Georgia" pitchFamily="34" charset="-120"/>
+              </a:rPr>
+              <a:t>Aristotle, </a:t>
+            </a:r>
+            <a:pPr algn="l" indent="0" marL="0">
+              <a:lnSpc>
+                <a:spcPts val="1620"/>
+              </a:lnSpc>
+              <a:spcAft>
+                <a:spcPts val="300"/>
+              </a:spcAft>
+              <a:buNone/>
+            </a:pPr>
+            <a:r>
+              <a:rPr lang="en-US" sz="1200" i="1" dirty="0">
+                <a:solidFill>
+                  <a:srgbClr val="1A1A1A"/>
+                </a:solidFill>
+                <a:latin typeface="Georgia" pitchFamily="34" charset="0"/>
+                <a:ea typeface="Georgia" pitchFamily="34" charset="-122"/>
+                <a:cs typeface="Georgia" pitchFamily="34" charset="-120"/>
+              </a:rPr>
+              <a:t>On Generation and Corruption</a:t>
+            </a:r>
+            <a:pPr algn="l" indent="0" marL="0">
+              <a:lnSpc>
+                <a:spcPts val="1620"/>
+              </a:lnSpc>
+              <a:spcAft>
+                <a:spcPts val="300"/>
+              </a:spcAft>
+              <a:buNone/>
+            </a:pPr>
+            <a:r>
+              <a:rPr lang="en-US" sz="1200" dirty="0">
+                <a:solidFill>
+                  <a:srgbClr val="1A1A1A"/>
+                </a:solidFill>
+                <a:latin typeface="Georgia" pitchFamily="34" charset="0"/>
+                <a:ea typeface="Georgia" pitchFamily="34" charset="-122"/>
+                <a:cs typeface="Georgia" pitchFamily="34" charset="-120"/>
+              </a:rPr>
+              <a:t>, II.3 (on the four elements + aither)</a:t>
+            </a:r>
+            <a:endParaRPr lang="en-US" sz="1200" dirty="0"/>
+          </a:p>
+          <a:p>
+            <a:pPr algn="l" marL="342900" indent="-342900">
+              <a:lnSpc>
+                <a:spcPts val="1620"/>
+              </a:lnSpc>
+              <a:spcAft>
+                <a:spcPts val="300"/>
+              </a:spcAft>
+              <a:buSzPct val="100000"/>
+              <a:buChar char="•"/>
+            </a:pPr>
+            <a:r>
+              <a:rPr lang="en-US" sz="1200" dirty="0">
+                <a:solidFill>
+                  <a:srgbClr val="1A1A1A"/>
+                </a:solidFill>
+                <a:latin typeface="Georgia" pitchFamily="34" charset="0"/>
+                <a:ea typeface="Georgia" pitchFamily="34" charset="-122"/>
+                <a:cs typeface="Georgia" pitchFamily="34" charset="-120"/>
+              </a:rPr>
+              <a:t>Whiteboard</a:t>
+            </a:r>
+            <a:endParaRPr lang="en-US" sz="1200" dirty="0"/>
+          </a:p>
+          <a:p>
+            <a:pPr algn="l" marL="342900" indent="-342900">
+              <a:lnSpc>
+                <a:spcPts val="1620"/>
+              </a:lnSpc>
+              <a:spcAft>
+                <a:spcPts val="300"/>
+              </a:spcAft>
+              <a:buSzPct val="100000"/>
+              <a:buChar char="•"/>
+            </a:pPr>
+            <a:r>
+              <a:rPr lang="en-US" sz="1200" dirty="0">
+                <a:solidFill>
+                  <a:srgbClr val="1A1A1A"/>
+                </a:solidFill>
+                <a:latin typeface="Georgia" pitchFamily="34" charset="0"/>
+                <a:ea typeface="Georgia" pitchFamily="34" charset="-122"/>
+                <a:cs typeface="Georgia" pitchFamily="34" charset="-120"/>
+              </a:rPr>
+              <a:t>Side-by-side comparison worksheet (blank)</a:t>
+            </a:r>
+            <a:endParaRPr lang="en-US" sz="1200" dirty="0"/>
+          </a:p>
+        </p:txBody>
+      </p:sp>
+      <p:sp>
+        <p:nvSpPr>
+          <p:cNvPr id="5" name="Text 3"/>
           <p:cNvSpPr/>
           <p:nvPr/>
         </p:nvSpPr>
@@ -2824,7 +5422,7 @@
                 <a:ea typeface="Times New Roman" pitchFamily="34" charset="-122"/>
                 <a:cs typeface="Times New Roman" pitchFamily="34" charset="-120"/>
               </a:rPr>
-              <a:t>Warm-up (5 min)</a:t>
+              <a:t>Flow</a:t>
             </a:r>
             <a:endParaRPr lang="en-US" sz="1800" dirty="0"/>
           </a:p>
@@ -2833,54 +5431,6 @@
       <p:sp>
         <p:nvSpPr>
           <p:cNvPr id="4" name="Text 2"/>
-          <p:cNvSpPr/>
-          <p:nvPr/>
-        </p:nvSpPr>
-        <p:spPr>
-          <a:xfrm>
-            <a:off x="406301" y="870942"/>
-            <a:ext cx="8498026" cy="213271"/>
-          </a:xfrm>
-          <a:prstGeom prst="rect">
-            <a:avLst/>
-          </a:prstGeom>
-          <a:noFill/>
-          <a:ln/>
-        </p:spPr>
-        <p:txBody>
-          <a:bodyPr wrap="square" lIns="0" tIns="0" rIns="0" bIns="0" rtlCol="0" anchor="t"/>
-          <a:lstStyle/>
-          <a:p>
-            <a:pPr algn="l" indent="0" marL="0">
-              <a:lnSpc>
-                <a:spcPts val="1680"/>
-              </a:lnSpc>
-              <a:spcBef>
-                <a:spcPts val="300"/>
-              </a:spcBef>
-              <a:spcAft>
-                <a:spcPts val="300"/>
-              </a:spcAft>
-              <a:buNone/>
-            </a:pPr>
-            <a:r>
-              <a:rPr lang="en-US" sz="1200" dirty="0">
-                <a:solidFill>
-                  <a:srgbClr val="1A1A1A"/>
-                </a:solidFill>
-                <a:latin typeface="Georgia" pitchFamily="34" charset="0"/>
-                <a:ea typeface="Georgia" pitchFamily="34" charset="-122"/>
-                <a:cs typeface="Georgia" pitchFamily="34" charset="-120"/>
-              </a:rPr>
-              <a:t>– Recall: the 5-bhūta + 5-tanmātra + 5-indriya structure of Sāṅkhya.</a:t>
-            </a:r>
-            <a:endParaRPr lang="en-US" sz="1200" dirty="0"/>
-          </a:p>
-        </p:txBody>
-      </p:sp>
-      <p:sp>
-        <p:nvSpPr>
-          <p:cNvPr id="5" name="Text 3"/>
           <p:cNvSpPr/>
           <p:nvPr/>
         </p:nvSpPr>
@@ -3030,7 +5580,7 @@
                 <a:ea typeface="Times New Roman" pitchFamily="34" charset="-122"/>
                 <a:cs typeface="Times New Roman" pitchFamily="34" charset="-120"/>
               </a:rPr>
-              <a:t>Core (25 min)</a:t>
+              <a:t>Warm-up (5 min)</a:t>
             </a:r>
             <a:endParaRPr lang="en-US" sz="1800" dirty="0"/>
           </a:p>
@@ -3068,26 +5618,6 @@
               <a:buChar char="•"/>
             </a:pPr>
             <a:r>
-              <a:rPr lang="en-US" sz="1200" b="1" dirty="0">
-                <a:solidFill>
-                  <a:srgbClr val="1A1A1A"/>
-                </a:solidFill>
-                <a:latin typeface="Georgia" pitchFamily="34" charset="0"/>
-                <a:ea typeface="Georgia" pitchFamily="34" charset="-122"/>
-                <a:cs typeface="Georgia" pitchFamily="34" charset="-120"/>
-              </a:rPr>
-              <a:t>Empedocles in brief.</a:t>
-            </a:r>
-            <a:pPr algn="l" indent="0" marL="0">
-              <a:lnSpc>
-                <a:spcPts val="1620"/>
-              </a:lnSpc>
-              <a:spcAft>
-                <a:spcPts val="300"/>
-              </a:spcAft>
-              <a:buNone/>
-            </a:pPr>
-            <a:r>
               <a:rPr lang="en-US" sz="1200" dirty="0">
                 <a:solidFill>
                   <a:srgbClr val="1A1A1A"/>
@@ -3096,7 +5626,7 @@
                 <a:ea typeface="Georgia" pitchFamily="34" charset="-122"/>
                 <a:cs typeface="Georgia" pitchFamily="34" charset="-120"/>
               </a:rPr>
-              <a:t> Read 1-paragraph paraphrase aloud:</a:t>
+              <a:t>Recall: the 5-bhūta + 5-tanmātra + 5-indriya structure of Sāṅkhya.</a:t>
             </a:r>
             <a:endParaRPr lang="en-US" sz="1200" dirty="0"/>
           </a:p>
@@ -3110,1359 +5640,7 @@
         </p:nvSpPr>
         <p:spPr>
           <a:xfrm>
-            <a:off x="406301" y="1254323"/>
-            <a:ext cx="8498026" cy="639812"/>
-          </a:xfrm>
-          <a:prstGeom prst="rect">
-            <a:avLst/>
-          </a:prstGeom>
-          <a:noFill/>
-          <a:ln/>
-        </p:spPr>
-        <p:txBody>
-          <a:bodyPr wrap="square" lIns="0" tIns="0" rIns="0" bIns="0" rtlCol="0" anchor="t"/>
-          <a:lstStyle/>
-          <a:p>
-            <a:pPr algn="l" indent="0" marL="0">
-              <a:lnSpc>
-                <a:spcPts val="1680"/>
-              </a:lnSpc>
-              <a:spcBef>
-                <a:spcPts val="300"/>
-              </a:spcBef>
-              <a:spcAft>
-                <a:spcPts val="300"/>
-              </a:spcAft>
-              <a:buNone/>
-            </a:pPr>
-            <a:r>
-              <a:rPr lang="en-US" sz="1200" dirty="0">
-                <a:solidFill>
-                  <a:srgbClr val="1A1A1A"/>
-                </a:solidFill>
-                <a:latin typeface="Georgia" pitchFamily="34" charset="0"/>
-                <a:ea typeface="Georgia" pitchFamily="34" charset="-122"/>
-                <a:cs typeface="Georgia" pitchFamily="34" charset="-120"/>
-              </a:rPr>
-              <a:t>&gt; Empedocles (c. 490–430 BCE) proposed four "roots" (</a:t>
-            </a:r>
-            <a:pPr algn="l" indent="0" marL="0">
-              <a:lnSpc>
-                <a:spcPts val="1680"/>
-              </a:lnSpc>
-              <a:spcBef>
-                <a:spcPts val="300"/>
-              </a:spcBef>
-              <a:spcAft>
-                <a:spcPts val="300"/>
-              </a:spcAft>
-              <a:buNone/>
-            </a:pPr>
-            <a:r>
-              <a:rPr lang="en-US" sz="1200" i="1" dirty="0">
-                <a:solidFill>
-                  <a:srgbClr val="1A1A1A"/>
-                </a:solidFill>
-                <a:latin typeface="Georgia" pitchFamily="34" charset="0"/>
-                <a:ea typeface="Georgia" pitchFamily="34" charset="-122"/>
-                <a:cs typeface="Georgia" pitchFamily="34" charset="-120"/>
-              </a:rPr>
-              <a:t>rhizomata</a:t>
-            </a:r>
-            <a:pPr algn="l" indent="0" marL="0">
-              <a:lnSpc>
-                <a:spcPts val="1680"/>
-              </a:lnSpc>
-              <a:spcBef>
-                <a:spcPts val="300"/>
-              </a:spcBef>
-              <a:spcAft>
-                <a:spcPts val="300"/>
-              </a:spcAft>
-              <a:buNone/>
-            </a:pPr>
-            <a:r>
-              <a:rPr lang="en-US" sz="1200" dirty="0">
-                <a:solidFill>
-                  <a:srgbClr val="1A1A1A"/>
-                </a:solidFill>
-                <a:latin typeface="Georgia" pitchFamily="34" charset="0"/>
-                <a:ea typeface="Georgia" pitchFamily="34" charset="-122"/>
-                <a:cs typeface="Georgia" pitchFamily="34" charset="-120"/>
-              </a:rPr>
-              <a:t>) — earth, water, air, fire. He added two forces — Love (</a:t>
-            </a:r>
-            <a:pPr algn="l" indent="0" marL="0">
-              <a:lnSpc>
-                <a:spcPts val="1680"/>
-              </a:lnSpc>
-              <a:spcBef>
-                <a:spcPts val="300"/>
-              </a:spcBef>
-              <a:spcAft>
-                <a:spcPts val="300"/>
-              </a:spcAft>
-              <a:buNone/>
-            </a:pPr>
-            <a:r>
-              <a:rPr lang="en-US" sz="1200" i="1" dirty="0">
-                <a:solidFill>
-                  <a:srgbClr val="1A1A1A"/>
-                </a:solidFill>
-                <a:latin typeface="Georgia" pitchFamily="34" charset="0"/>
-                <a:ea typeface="Georgia" pitchFamily="34" charset="-122"/>
-                <a:cs typeface="Georgia" pitchFamily="34" charset="-120"/>
-              </a:rPr>
-              <a:t>philia</a:t>
-            </a:r>
-            <a:pPr algn="l" indent="0" marL="0">
-              <a:lnSpc>
-                <a:spcPts val="1680"/>
-              </a:lnSpc>
-              <a:spcBef>
-                <a:spcPts val="300"/>
-              </a:spcBef>
-              <a:spcAft>
-                <a:spcPts val="300"/>
-              </a:spcAft>
-              <a:buNone/>
-            </a:pPr>
-            <a:r>
-              <a:rPr lang="en-US" sz="1200" dirty="0">
-                <a:solidFill>
-                  <a:srgbClr val="1A1A1A"/>
-                </a:solidFill>
-                <a:latin typeface="Georgia" pitchFamily="34" charset="0"/>
-                <a:ea typeface="Georgia" pitchFamily="34" charset="-122"/>
-                <a:cs typeface="Georgia" pitchFamily="34" charset="-120"/>
-              </a:rPr>
-              <a:t>) that brings them together and Strife (</a:t>
-            </a:r>
-            <a:pPr algn="l" indent="0" marL="0">
-              <a:lnSpc>
-                <a:spcPts val="1680"/>
-              </a:lnSpc>
-              <a:spcBef>
-                <a:spcPts val="300"/>
-              </a:spcBef>
-              <a:spcAft>
-                <a:spcPts val="300"/>
-              </a:spcAft>
-              <a:buNone/>
-            </a:pPr>
-            <a:r>
-              <a:rPr lang="en-US" sz="1200" i="1" dirty="0">
-                <a:solidFill>
-                  <a:srgbClr val="1A1A1A"/>
-                </a:solidFill>
-                <a:latin typeface="Georgia" pitchFamily="34" charset="0"/>
-                <a:ea typeface="Georgia" pitchFamily="34" charset="-122"/>
-                <a:cs typeface="Georgia" pitchFamily="34" charset="-120"/>
-              </a:rPr>
-              <a:t>neikos</a:t>
-            </a:r>
-            <a:pPr algn="l" indent="0" marL="0">
-              <a:lnSpc>
-                <a:spcPts val="1680"/>
-              </a:lnSpc>
-              <a:spcBef>
-                <a:spcPts val="300"/>
-              </a:spcBef>
-              <a:spcAft>
-                <a:spcPts val="300"/>
-              </a:spcAft>
-              <a:buNone/>
-            </a:pPr>
-            <a:r>
-              <a:rPr lang="en-US" sz="1200" dirty="0">
-                <a:solidFill>
-                  <a:srgbClr val="1A1A1A"/>
-                </a:solidFill>
-                <a:latin typeface="Georgia" pitchFamily="34" charset="0"/>
-                <a:ea typeface="Georgia" pitchFamily="34" charset="-122"/>
-                <a:cs typeface="Georgia" pitchFamily="34" charset="-120"/>
-              </a:rPr>
-              <a:t>) that separates them. The world is the cyclic combination/separation of the four under these forces.</a:t>
-            </a:r>
-            <a:endParaRPr lang="en-US" sz="1200" dirty="0"/>
-          </a:p>
-        </p:txBody>
-      </p:sp>
-      <p:sp>
-        <p:nvSpPr>
-          <p:cNvPr id="6" name="Text 4"/>
-          <p:cNvSpPr/>
-          <p:nvPr/>
-        </p:nvSpPr>
-        <p:spPr>
-          <a:xfrm>
-            <a:off x="634901" y="1982986"/>
-            <a:ext cx="8102798" cy="281880"/>
-          </a:xfrm>
-          <a:prstGeom prst="rect">
-            <a:avLst/>
-          </a:prstGeom>
-          <a:noFill/>
-          <a:ln/>
-        </p:spPr>
-        <p:txBody>
-          <a:bodyPr wrap="square" lIns="0" tIns="0" rIns="0" bIns="0" rtlCol="0" anchor="t"/>
-          <a:lstStyle/>
-          <a:p>
-            <a:pPr algn="l" marL="342900" indent="-342900">
-              <a:lnSpc>
-                <a:spcPts val="1620"/>
-              </a:lnSpc>
-              <a:spcAft>
-                <a:spcPts val="300"/>
-              </a:spcAft>
-              <a:buSzPct val="100000"/>
-              <a:buChar char="•"/>
-            </a:pPr>
-            <a:r>
-              <a:rPr lang="en-US" sz="1200" b="1" dirty="0">
-                <a:solidFill>
-                  <a:srgbClr val="1A1A1A"/>
-                </a:solidFill>
-                <a:latin typeface="Georgia" pitchFamily="34" charset="0"/>
-                <a:ea typeface="Georgia" pitchFamily="34" charset="-122"/>
-                <a:cs typeface="Georgia" pitchFamily="34" charset="-120"/>
-              </a:rPr>
-              <a:t>Aristotle in brief:</a:t>
-            </a:r>
-            <a:endParaRPr lang="en-US" sz="1200" dirty="0"/>
-          </a:p>
-        </p:txBody>
-      </p:sp>
-      <p:sp>
-        <p:nvSpPr>
-          <p:cNvPr id="7" name="Text 5"/>
-          <p:cNvSpPr/>
-          <p:nvPr/>
-        </p:nvSpPr>
-        <p:spPr>
-          <a:xfrm>
-            <a:off x="406301" y="2353717"/>
-            <a:ext cx="8498026" cy="639812"/>
-          </a:xfrm>
-          <a:prstGeom prst="rect">
-            <a:avLst/>
-          </a:prstGeom>
-          <a:noFill/>
-          <a:ln/>
-        </p:spPr>
-        <p:txBody>
-          <a:bodyPr wrap="square" lIns="0" tIns="0" rIns="0" bIns="0" rtlCol="0" anchor="t"/>
-          <a:lstStyle/>
-          <a:p>
-            <a:pPr algn="l" indent="0" marL="0">
-              <a:lnSpc>
-                <a:spcPts val="1680"/>
-              </a:lnSpc>
-              <a:spcBef>
-                <a:spcPts val="300"/>
-              </a:spcBef>
-              <a:spcAft>
-                <a:spcPts val="300"/>
-              </a:spcAft>
-              <a:buNone/>
-            </a:pPr>
-            <a:r>
-              <a:rPr lang="en-US" sz="1200" dirty="0">
-                <a:solidFill>
-                  <a:srgbClr val="1A1A1A"/>
-                </a:solidFill>
-                <a:latin typeface="Georgia" pitchFamily="34" charset="0"/>
-                <a:ea typeface="Georgia" pitchFamily="34" charset="-122"/>
-                <a:cs typeface="Georgia" pitchFamily="34" charset="-120"/>
-              </a:rPr>
-              <a:t>&gt; Aristotle (4th c. BCE) inherited the four sublunary elements (earth, water, air, fire) but added a </a:t>
-            </a:r>
-            <a:pPr algn="l" indent="0" marL="0">
-              <a:lnSpc>
-                <a:spcPts val="1680"/>
-              </a:lnSpc>
-              <a:spcBef>
-                <a:spcPts val="300"/>
-              </a:spcBef>
-              <a:spcAft>
-                <a:spcPts val="300"/>
-              </a:spcAft>
-              <a:buNone/>
-            </a:pPr>
-            <a:r>
-              <a:rPr lang="en-US" sz="1200" i="1" dirty="0">
-                <a:solidFill>
-                  <a:srgbClr val="1A1A1A"/>
-                </a:solidFill>
-                <a:latin typeface="Georgia" pitchFamily="34" charset="0"/>
-                <a:ea typeface="Georgia" pitchFamily="34" charset="-122"/>
-                <a:cs typeface="Georgia" pitchFamily="34" charset="-120"/>
-              </a:rPr>
-              <a:t>fifth element</a:t>
-            </a:r>
-            <a:pPr algn="l" indent="0" marL="0">
-              <a:lnSpc>
-                <a:spcPts val="1680"/>
-              </a:lnSpc>
-              <a:spcBef>
-                <a:spcPts val="300"/>
-              </a:spcBef>
-              <a:spcAft>
-                <a:spcPts val="300"/>
-              </a:spcAft>
-              <a:buNone/>
-            </a:pPr>
-            <a:r>
-              <a:rPr lang="en-US" sz="1200" dirty="0">
-                <a:solidFill>
-                  <a:srgbClr val="1A1A1A"/>
-                </a:solidFill>
-                <a:latin typeface="Georgia" pitchFamily="34" charset="0"/>
-                <a:ea typeface="Georgia" pitchFamily="34" charset="-122"/>
-                <a:cs typeface="Georgia" pitchFamily="34" charset="-120"/>
-              </a:rPr>
-              <a:t> — </a:t>
-            </a:r>
-            <a:pPr algn="l" indent="0" marL="0">
-              <a:lnSpc>
-                <a:spcPts val="1680"/>
-              </a:lnSpc>
-              <a:spcBef>
-                <a:spcPts val="300"/>
-              </a:spcBef>
-              <a:spcAft>
-                <a:spcPts val="300"/>
-              </a:spcAft>
-              <a:buNone/>
-            </a:pPr>
-            <a:r>
-              <a:rPr lang="en-US" sz="1200" i="1" dirty="0">
-                <a:solidFill>
-                  <a:srgbClr val="1A1A1A"/>
-                </a:solidFill>
-                <a:latin typeface="Georgia" pitchFamily="34" charset="0"/>
-                <a:ea typeface="Georgia" pitchFamily="34" charset="-122"/>
-                <a:cs typeface="Georgia" pitchFamily="34" charset="-120"/>
-              </a:rPr>
-              <a:t>aither</a:t>
-            </a:r>
-            <a:pPr algn="l" indent="0" marL="0">
-              <a:lnSpc>
-                <a:spcPts val="1680"/>
-              </a:lnSpc>
-              <a:spcBef>
-                <a:spcPts val="300"/>
-              </a:spcBef>
-              <a:spcAft>
-                <a:spcPts val="300"/>
-              </a:spcAft>
-              <a:buNone/>
-            </a:pPr>
-            <a:r>
-              <a:rPr lang="en-US" sz="1200" dirty="0">
-                <a:solidFill>
-                  <a:srgbClr val="1A1A1A"/>
-                </a:solidFill>
-                <a:latin typeface="Georgia" pitchFamily="34" charset="0"/>
-                <a:ea typeface="Georgia" pitchFamily="34" charset="-122"/>
-                <a:cs typeface="Georgia" pitchFamily="34" charset="-120"/>
-              </a:rPr>
-              <a:t> (the "quintessence") — which is the substance of the heavenly spheres. The four are characterised by pairs of qualities: hot/cold and wet/dry.</a:t>
-            </a:r>
-            <a:endParaRPr lang="en-US" sz="1200" dirty="0"/>
-          </a:p>
-        </p:txBody>
-      </p:sp>
-      <p:sp>
-        <p:nvSpPr>
-          <p:cNvPr id="8" name="Text 6"/>
-          <p:cNvSpPr/>
-          <p:nvPr/>
-        </p:nvSpPr>
-        <p:spPr>
-          <a:xfrm>
-            <a:off x="406301" y="3069729"/>
-            <a:ext cx="8498026" cy="213271"/>
-          </a:xfrm>
-          <a:prstGeom prst="rect">
-            <a:avLst/>
-          </a:prstGeom>
-          <a:noFill/>
-          <a:ln/>
-        </p:spPr>
-        <p:txBody>
-          <a:bodyPr wrap="square" lIns="0" tIns="0" rIns="0" bIns="0" rtlCol="0" anchor="t"/>
-          <a:lstStyle/>
-          <a:p>
-            <a:pPr algn="l" indent="0" marL="0">
-              <a:lnSpc>
-                <a:spcPts val="1680"/>
-              </a:lnSpc>
-              <a:spcBef>
-                <a:spcPts val="300"/>
-              </a:spcBef>
-              <a:spcAft>
-                <a:spcPts val="300"/>
-              </a:spcAft>
-              <a:buNone/>
-            </a:pPr>
-            <a:r>
-              <a:rPr lang="en-US" sz="1200" i="1" dirty="0">
-                <a:solidFill>
-                  <a:srgbClr val="1A1A1A"/>
-                </a:solidFill>
-                <a:latin typeface="Georgia" pitchFamily="34" charset="0"/>
-                <a:ea typeface="Georgia" pitchFamily="34" charset="-122"/>
-                <a:cs typeface="Georgia" pitchFamily="34" charset="-120"/>
-              </a:rPr>
-              <a:t>Each row: Element · Aristotle's qualities.</a:t>
-            </a:r>
-            <a:endParaRPr lang="en-US" sz="1200" dirty="0"/>
-          </a:p>
-        </p:txBody>
-      </p:sp>
-      <p:sp>
-        <p:nvSpPr>
-          <p:cNvPr id="9" name="Text 7"/>
-          <p:cNvSpPr/>
-          <p:nvPr/>
-        </p:nvSpPr>
-        <p:spPr>
-          <a:xfrm>
-            <a:off x="634901" y="3371850"/>
-            <a:ext cx="8102798" cy="1257002"/>
-          </a:xfrm>
-          <a:prstGeom prst="rect">
-            <a:avLst/>
-          </a:prstGeom>
-          <a:noFill/>
-          <a:ln/>
-        </p:spPr>
-        <p:txBody>
-          <a:bodyPr wrap="square" lIns="0" tIns="0" rIns="0" bIns="0" rtlCol="0" anchor="t"/>
-          <a:lstStyle/>
-          <a:p>
-            <a:pPr algn="l" marL="342900" indent="-342900">
-              <a:lnSpc>
-                <a:spcPts val="1620"/>
-              </a:lnSpc>
-              <a:spcAft>
-                <a:spcPts val="300"/>
-              </a:spcAft>
-              <a:buSzPct val="100000"/>
-              <a:buChar char="•"/>
-            </a:pPr>
-            <a:r>
-              <a:rPr lang="en-US" sz="1200" b="1" dirty="0">
-                <a:solidFill>
-                  <a:srgbClr val="1A1A1A"/>
-                </a:solidFill>
-                <a:latin typeface="Georgia" pitchFamily="34" charset="0"/>
-                <a:ea typeface="Georgia" pitchFamily="34" charset="-122"/>
-                <a:cs typeface="Georgia" pitchFamily="34" charset="-120"/>
-              </a:rPr>
-              <a:t>Fire</a:t>
-            </a:r>
-            <a:pPr algn="l" indent="0" marL="0">
-              <a:lnSpc>
-                <a:spcPts val="1620"/>
-              </a:lnSpc>
-              <a:spcAft>
-                <a:spcPts val="300"/>
-              </a:spcAft>
-              <a:buNone/>
-            </a:pPr>
-            <a:r>
-              <a:rPr lang="en-US" sz="1200" dirty="0">
-                <a:solidFill>
-                  <a:srgbClr val="1A1A1A"/>
-                </a:solidFill>
-                <a:latin typeface="Georgia" pitchFamily="34" charset="0"/>
-                <a:ea typeface="Georgia" pitchFamily="34" charset="-122"/>
-                <a:cs typeface="Georgia" pitchFamily="34" charset="-120"/>
-              </a:rPr>
-              <a:t> — hot + dry</a:t>
-            </a:r>
-            <a:endParaRPr lang="en-US" sz="1200" dirty="0"/>
-          </a:p>
-          <a:p>
-            <a:pPr algn="l" marL="342900" indent="-342900">
-              <a:lnSpc>
-                <a:spcPts val="1620"/>
-              </a:lnSpc>
-              <a:spcAft>
-                <a:spcPts val="300"/>
-              </a:spcAft>
-              <a:buSzPct val="100000"/>
-              <a:buChar char="•"/>
-            </a:pPr>
-            <a:r>
-              <a:rPr lang="en-US" sz="1200" b="1" dirty="0">
-                <a:solidFill>
-                  <a:srgbClr val="1A1A1A"/>
-                </a:solidFill>
-                <a:latin typeface="Georgia" pitchFamily="34" charset="0"/>
-                <a:ea typeface="Georgia" pitchFamily="34" charset="-122"/>
-                <a:cs typeface="Georgia" pitchFamily="34" charset="-120"/>
-              </a:rPr>
-              <a:t>Air</a:t>
-            </a:r>
-            <a:pPr algn="l" indent="0" marL="0">
-              <a:lnSpc>
-                <a:spcPts val="1620"/>
-              </a:lnSpc>
-              <a:spcAft>
-                <a:spcPts val="300"/>
-              </a:spcAft>
-              <a:buNone/>
-            </a:pPr>
-            <a:r>
-              <a:rPr lang="en-US" sz="1200" dirty="0">
-                <a:solidFill>
-                  <a:srgbClr val="1A1A1A"/>
-                </a:solidFill>
-                <a:latin typeface="Georgia" pitchFamily="34" charset="0"/>
-                <a:ea typeface="Georgia" pitchFamily="34" charset="-122"/>
-                <a:cs typeface="Georgia" pitchFamily="34" charset="-120"/>
-              </a:rPr>
-              <a:t> — hot + wet</a:t>
-            </a:r>
-            <a:endParaRPr lang="en-US" sz="1200" dirty="0"/>
-          </a:p>
-          <a:p>
-            <a:pPr algn="l" marL="342900" indent="-342900">
-              <a:lnSpc>
-                <a:spcPts val="1620"/>
-              </a:lnSpc>
-              <a:spcAft>
-                <a:spcPts val="300"/>
-              </a:spcAft>
-              <a:buSzPct val="100000"/>
-              <a:buChar char="•"/>
-            </a:pPr>
-            <a:r>
-              <a:rPr lang="en-US" sz="1200" b="1" dirty="0">
-                <a:solidFill>
-                  <a:srgbClr val="1A1A1A"/>
-                </a:solidFill>
-                <a:latin typeface="Georgia" pitchFamily="34" charset="0"/>
-                <a:ea typeface="Georgia" pitchFamily="34" charset="-122"/>
-                <a:cs typeface="Georgia" pitchFamily="34" charset="-120"/>
-              </a:rPr>
-              <a:t>Water</a:t>
-            </a:r>
-            <a:pPr algn="l" indent="0" marL="0">
-              <a:lnSpc>
-                <a:spcPts val="1620"/>
-              </a:lnSpc>
-              <a:spcAft>
-                <a:spcPts val="300"/>
-              </a:spcAft>
-              <a:buNone/>
-            </a:pPr>
-            <a:r>
-              <a:rPr lang="en-US" sz="1200" dirty="0">
-                <a:solidFill>
-                  <a:srgbClr val="1A1A1A"/>
-                </a:solidFill>
-                <a:latin typeface="Georgia" pitchFamily="34" charset="0"/>
-                <a:ea typeface="Georgia" pitchFamily="34" charset="-122"/>
-                <a:cs typeface="Georgia" pitchFamily="34" charset="-120"/>
-              </a:rPr>
-              <a:t> — cold + wet</a:t>
-            </a:r>
-            <a:endParaRPr lang="en-US" sz="1200" dirty="0"/>
-          </a:p>
-          <a:p>
-            <a:pPr algn="l" marL="342900" indent="-342900">
-              <a:lnSpc>
-                <a:spcPts val="1620"/>
-              </a:lnSpc>
-              <a:spcAft>
-                <a:spcPts val="300"/>
-              </a:spcAft>
-              <a:buSzPct val="100000"/>
-              <a:buChar char="•"/>
-            </a:pPr>
-            <a:r>
-              <a:rPr lang="en-US" sz="1200" b="1" dirty="0">
-                <a:solidFill>
-                  <a:srgbClr val="1A1A1A"/>
-                </a:solidFill>
-                <a:latin typeface="Georgia" pitchFamily="34" charset="0"/>
-                <a:ea typeface="Georgia" pitchFamily="34" charset="-122"/>
-                <a:cs typeface="Georgia" pitchFamily="34" charset="-120"/>
-              </a:rPr>
-              <a:t>Earth</a:t>
-            </a:r>
-            <a:pPr algn="l" indent="0" marL="0">
-              <a:lnSpc>
-                <a:spcPts val="1620"/>
-              </a:lnSpc>
-              <a:spcAft>
-                <a:spcPts val="300"/>
-              </a:spcAft>
-              <a:buNone/>
-            </a:pPr>
-            <a:r>
-              <a:rPr lang="en-US" sz="1200" dirty="0">
-                <a:solidFill>
-                  <a:srgbClr val="1A1A1A"/>
-                </a:solidFill>
-                <a:latin typeface="Georgia" pitchFamily="34" charset="0"/>
-                <a:ea typeface="Georgia" pitchFamily="34" charset="-122"/>
-                <a:cs typeface="Georgia" pitchFamily="34" charset="-120"/>
-              </a:rPr>
-              <a:t> — cold + dry</a:t>
-            </a:r>
-            <a:endParaRPr lang="en-US" sz="1200" dirty="0"/>
-          </a:p>
-          <a:p>
-            <a:pPr algn="l" marL="342900" indent="-342900">
-              <a:lnSpc>
-                <a:spcPts val="1620"/>
-              </a:lnSpc>
-              <a:spcAft>
-                <a:spcPts val="300"/>
-              </a:spcAft>
-              <a:buSzPct val="100000"/>
-              <a:buChar char="•"/>
-            </a:pPr>
-            <a:r>
-              <a:rPr lang="en-US" sz="1200" b="1" dirty="0">
-                <a:solidFill>
-                  <a:srgbClr val="1A1A1A"/>
-                </a:solidFill>
-                <a:latin typeface="Georgia" pitchFamily="34" charset="0"/>
-                <a:ea typeface="Georgia" pitchFamily="34" charset="-122"/>
-                <a:cs typeface="Georgia" pitchFamily="34" charset="-120"/>
-              </a:rPr>
-              <a:t>Aither</a:t>
-            </a:r>
-            <a:pPr algn="l" indent="0" marL="0">
-              <a:lnSpc>
-                <a:spcPts val="1620"/>
-              </a:lnSpc>
-              <a:spcAft>
-                <a:spcPts val="300"/>
-              </a:spcAft>
-              <a:buNone/>
-            </a:pPr>
-            <a:r>
-              <a:rPr lang="en-US" sz="1200" dirty="0">
-                <a:solidFill>
-                  <a:srgbClr val="1A1A1A"/>
-                </a:solidFill>
-                <a:latin typeface="Georgia" pitchFamily="34" charset="0"/>
-                <a:ea typeface="Georgia" pitchFamily="34" charset="-122"/>
-                <a:cs typeface="Georgia" pitchFamily="34" charset="-120"/>
-              </a:rPr>
-              <a:t> — none (incorruptible)</a:t>
-            </a:r>
-            <a:endParaRPr lang="en-US" sz="1200" dirty="0"/>
-          </a:p>
-        </p:txBody>
-      </p:sp>
-      <p:sp>
-        <p:nvSpPr>
-          <p:cNvPr id="10" name="Text 8"/>
-          <p:cNvSpPr/>
-          <p:nvPr/>
-        </p:nvSpPr>
-        <p:spPr>
-          <a:xfrm>
-            <a:off x="634901" y="4730353"/>
-            <a:ext cx="8102798" cy="281880"/>
-          </a:xfrm>
-          <a:prstGeom prst="rect">
-            <a:avLst/>
-          </a:prstGeom>
-          <a:noFill/>
-          <a:ln/>
-        </p:spPr>
-        <p:txBody>
-          <a:bodyPr wrap="square" lIns="0" tIns="0" rIns="0" bIns="0" rtlCol="0" anchor="t"/>
-          <a:lstStyle/>
-          <a:p>
-            <a:pPr algn="l" marL="342900" indent="-342900">
-              <a:lnSpc>
-                <a:spcPts val="1620"/>
-              </a:lnSpc>
-              <a:spcAft>
-                <a:spcPts val="300"/>
-              </a:spcAft>
-              <a:buSzPct val="100000"/>
-              <a:buChar char="•"/>
-            </a:pPr>
-            <a:r>
-              <a:rPr lang="en-US" sz="1200" b="1" dirty="0">
-                <a:solidFill>
-                  <a:srgbClr val="1A1A1A"/>
-                </a:solidFill>
-                <a:latin typeface="Georgia" pitchFamily="34" charset="0"/>
-                <a:ea typeface="Georgia" pitchFamily="34" charset="-122"/>
-                <a:cs typeface="Georgia" pitchFamily="34" charset="-120"/>
-              </a:rPr>
-              <a:t>Side-by-side comparison.</a:t>
-            </a:r>
-            <a:pPr algn="l" indent="0" marL="0">
-              <a:lnSpc>
-                <a:spcPts val="1620"/>
-              </a:lnSpc>
-              <a:spcAft>
-                <a:spcPts val="300"/>
-              </a:spcAft>
-              <a:buNone/>
-            </a:pPr>
-            <a:r>
-              <a:rPr lang="en-US" sz="1200" dirty="0">
-                <a:solidFill>
-                  <a:srgbClr val="1A1A1A"/>
-                </a:solidFill>
-                <a:latin typeface="Georgia" pitchFamily="34" charset="0"/>
-                <a:ea typeface="Georgia" pitchFamily="34" charset="-122"/>
-                <a:cs typeface="Georgia" pitchFamily="34" charset="-120"/>
-              </a:rPr>
-              <a:t> Build with class on the board:</a:t>
-            </a:r>
-            <a:endParaRPr lang="en-US" sz="1200" dirty="0"/>
-          </a:p>
-        </p:txBody>
-      </p:sp>
-      <p:sp>
-        <p:nvSpPr>
-          <p:cNvPr id="11" name="Text 9"/>
-          <p:cNvSpPr/>
-          <p:nvPr/>
-        </p:nvSpPr>
-        <p:spPr>
-          <a:xfrm>
-            <a:off x="406301" y="5101084"/>
-            <a:ext cx="8498026" cy="213271"/>
-          </a:xfrm>
-          <a:prstGeom prst="rect">
-            <a:avLst/>
-          </a:prstGeom>
-          <a:noFill/>
-          <a:ln/>
-        </p:spPr>
-        <p:txBody>
-          <a:bodyPr wrap="square" lIns="0" tIns="0" rIns="0" bIns="0" rtlCol="0" anchor="t"/>
-          <a:lstStyle/>
-          <a:p>
-            <a:pPr algn="l" indent="0" marL="0">
-              <a:lnSpc>
-                <a:spcPts val="1680"/>
-              </a:lnSpc>
-              <a:spcBef>
-                <a:spcPts val="300"/>
-              </a:spcBef>
-              <a:spcAft>
-                <a:spcPts val="300"/>
-              </a:spcAft>
-              <a:buNone/>
-            </a:pPr>
-            <a:r>
-              <a:rPr lang="en-US" sz="1200" i="1" dirty="0">
-                <a:solidFill>
-                  <a:srgbClr val="1A1A1A"/>
-                </a:solidFill>
-                <a:latin typeface="Georgia" pitchFamily="34" charset="0"/>
-                <a:ea typeface="Georgia" pitchFamily="34" charset="-122"/>
-                <a:cs typeface="Georgia" pitchFamily="34" charset="-120"/>
-              </a:rPr>
-              <a:t>Each row: Sāṅkhya (India) · Empedocles + Aristotle (Greece).</a:t>
-            </a:r>
-            <a:endParaRPr lang="en-US" sz="1200" dirty="0"/>
-          </a:p>
-        </p:txBody>
-      </p:sp>
-      <p:sp>
-        <p:nvSpPr>
-          <p:cNvPr id="12" name="Text 10"/>
-          <p:cNvSpPr/>
-          <p:nvPr/>
-        </p:nvSpPr>
-        <p:spPr>
-          <a:xfrm>
-            <a:off x="634901" y="5403205"/>
-            <a:ext cx="8102798" cy="2361605"/>
-          </a:xfrm>
-          <a:prstGeom prst="rect">
-            <a:avLst/>
-          </a:prstGeom>
-          <a:noFill/>
-          <a:ln/>
-        </p:spPr>
-        <p:txBody>
-          <a:bodyPr wrap="square" lIns="0" tIns="0" rIns="0" bIns="0" rtlCol="0" anchor="t"/>
-          <a:lstStyle/>
-          <a:p>
-            <a:pPr algn="l" marL="342900" indent="-342900">
-              <a:lnSpc>
-                <a:spcPts val="1620"/>
-              </a:lnSpc>
-              <a:spcAft>
-                <a:spcPts val="300"/>
-              </a:spcAft>
-              <a:buSzPct val="100000"/>
-              <a:buChar char="•"/>
-            </a:pPr>
-            <a:r>
-              <a:rPr lang="en-US" sz="1200" b="1" dirty="0">
-                <a:solidFill>
-                  <a:srgbClr val="1A1A1A"/>
-                </a:solidFill>
-                <a:latin typeface="Georgia" pitchFamily="34" charset="0"/>
-                <a:ea typeface="Georgia" pitchFamily="34" charset="-122"/>
-                <a:cs typeface="Georgia" pitchFamily="34" charset="-120"/>
-              </a:rPr>
-              <a:t>Number of elements</a:t>
-            </a:r>
-            <a:pPr algn="l" indent="0" marL="0">
-              <a:lnSpc>
-                <a:spcPts val="1620"/>
-              </a:lnSpc>
-              <a:spcAft>
-                <a:spcPts val="300"/>
-              </a:spcAft>
-              <a:buNone/>
-            </a:pPr>
-            <a:r>
-              <a:rPr lang="en-US" sz="1200" dirty="0">
-                <a:solidFill>
-                  <a:srgbClr val="1A1A1A"/>
-                </a:solidFill>
-                <a:latin typeface="Georgia" pitchFamily="34" charset="0"/>
-                <a:ea typeface="Georgia" pitchFamily="34" charset="-122"/>
-                <a:cs typeface="Georgia" pitchFamily="34" charset="-120"/>
-              </a:rPr>
-              <a:t> — 5 · 4 + 1 (quintessence)</a:t>
-            </a:r>
-            <a:endParaRPr lang="en-US" sz="1200" dirty="0"/>
-          </a:p>
-          <a:p>
-            <a:pPr algn="l" marL="342900" indent="-342900">
-              <a:lnSpc>
-                <a:spcPts val="1620"/>
-              </a:lnSpc>
-              <a:spcAft>
-                <a:spcPts val="300"/>
-              </a:spcAft>
-              <a:buSzPct val="100000"/>
-              <a:buChar char="•"/>
-            </a:pPr>
-            <a:r>
-              <a:rPr lang="en-US" sz="1200" b="1" dirty="0">
-                <a:solidFill>
-                  <a:srgbClr val="1A1A1A"/>
-                </a:solidFill>
-                <a:latin typeface="Georgia" pitchFamily="34" charset="0"/>
-                <a:ea typeface="Georgia" pitchFamily="34" charset="-122"/>
-                <a:cs typeface="Georgia" pitchFamily="34" charset="-120"/>
-              </a:rPr>
-              <a:t>Origin</a:t>
-            </a:r>
-            <a:pPr algn="l" indent="0" marL="0">
-              <a:lnSpc>
-                <a:spcPts val="1620"/>
-              </a:lnSpc>
-              <a:spcAft>
-                <a:spcPts val="300"/>
-              </a:spcAft>
-              <a:buNone/>
-            </a:pPr>
-            <a:r>
-              <a:rPr lang="en-US" sz="1200" dirty="0">
-                <a:solidFill>
-                  <a:srgbClr val="1A1A1A"/>
-                </a:solidFill>
-                <a:latin typeface="Georgia" pitchFamily="34" charset="0"/>
-                <a:ea typeface="Georgia" pitchFamily="34" charset="-122"/>
-                <a:cs typeface="Georgia" pitchFamily="34" charset="-120"/>
-              </a:rPr>
-              <a:t> — Emerge sequentially from </a:t>
-            </a:r>
-            <a:pPr algn="l" indent="0" marL="0">
-              <a:lnSpc>
-                <a:spcPts val="1620"/>
-              </a:lnSpc>
-              <a:spcAft>
-                <a:spcPts val="300"/>
-              </a:spcAft>
-              <a:buNone/>
-            </a:pPr>
-            <a:r>
-              <a:rPr lang="en-US" sz="1200" i="1" dirty="0">
-                <a:solidFill>
-                  <a:srgbClr val="1A1A1A"/>
-                </a:solidFill>
-                <a:latin typeface="Georgia" pitchFamily="34" charset="0"/>
-                <a:ea typeface="Georgia" pitchFamily="34" charset="-122"/>
-                <a:cs typeface="Georgia" pitchFamily="34" charset="-120"/>
-              </a:rPr>
-              <a:t>prakṛti</a:t>
-            </a:r>
-            <a:pPr algn="l" indent="0" marL="0">
-              <a:lnSpc>
-                <a:spcPts val="1620"/>
-              </a:lnSpc>
-              <a:spcAft>
-                <a:spcPts val="300"/>
-              </a:spcAft>
-              <a:buNone/>
-            </a:pPr>
-            <a:r>
-              <a:rPr lang="en-US" sz="1200" dirty="0">
-                <a:solidFill>
-                  <a:srgbClr val="1A1A1A"/>
-                </a:solidFill>
-                <a:latin typeface="Georgia" pitchFamily="34" charset="0"/>
-                <a:ea typeface="Georgia" pitchFamily="34" charset="-122"/>
-                <a:cs typeface="Georgia" pitchFamily="34" charset="-120"/>
-              </a:rPr>
-              <a:t> · Eternal "roots"</a:t>
-            </a:r>
-            <a:endParaRPr lang="en-US" sz="1200" dirty="0"/>
-          </a:p>
-          <a:p>
-            <a:pPr algn="l" marL="342900" indent="-342900">
-              <a:lnSpc>
-                <a:spcPts val="1620"/>
-              </a:lnSpc>
-              <a:spcAft>
-                <a:spcPts val="300"/>
-              </a:spcAft>
-              <a:buSzPct val="100000"/>
-              <a:buChar char="•"/>
-            </a:pPr>
-            <a:r>
-              <a:rPr lang="en-US" sz="1200" b="1" dirty="0">
-                <a:solidFill>
-                  <a:srgbClr val="1A1A1A"/>
-                </a:solidFill>
-                <a:latin typeface="Georgia" pitchFamily="34" charset="0"/>
-                <a:ea typeface="Georgia" pitchFamily="34" charset="-122"/>
-                <a:cs typeface="Georgia" pitchFamily="34" charset="-120"/>
-              </a:rPr>
-              <a:t>What drives combination</a:t>
-            </a:r>
-            <a:pPr algn="l" indent="0" marL="0">
-              <a:lnSpc>
-                <a:spcPts val="1620"/>
-              </a:lnSpc>
-              <a:spcAft>
-                <a:spcPts val="300"/>
-              </a:spcAft>
-              <a:buNone/>
-            </a:pPr>
-            <a:r>
-              <a:rPr lang="en-US" sz="1200" dirty="0">
-                <a:solidFill>
-                  <a:srgbClr val="1A1A1A"/>
-                </a:solidFill>
-                <a:latin typeface="Georgia" pitchFamily="34" charset="0"/>
-                <a:ea typeface="Georgia" pitchFamily="34" charset="-122"/>
-                <a:cs typeface="Georgia" pitchFamily="34" charset="-120"/>
-              </a:rPr>
-              <a:t> — Three </a:t>
-            </a:r>
-            <a:pPr algn="l" indent="0" marL="0">
-              <a:lnSpc>
-                <a:spcPts val="1620"/>
-              </a:lnSpc>
-              <a:spcAft>
-                <a:spcPts val="300"/>
-              </a:spcAft>
-              <a:buNone/>
-            </a:pPr>
-            <a:r>
-              <a:rPr lang="en-US" sz="1200" i="1" dirty="0">
-                <a:solidFill>
-                  <a:srgbClr val="1A1A1A"/>
-                </a:solidFill>
-                <a:latin typeface="Georgia" pitchFamily="34" charset="0"/>
-                <a:ea typeface="Georgia" pitchFamily="34" charset="-122"/>
-                <a:cs typeface="Georgia" pitchFamily="34" charset="-120"/>
-              </a:rPr>
-              <a:t>guṇas</a:t>
-            </a:r>
-            <a:pPr algn="l" indent="0" marL="0">
-              <a:lnSpc>
-                <a:spcPts val="1620"/>
-              </a:lnSpc>
-              <a:spcAft>
-                <a:spcPts val="300"/>
-              </a:spcAft>
-              <a:buNone/>
-            </a:pPr>
-            <a:r>
-              <a:rPr lang="en-US" sz="1200" dirty="0">
-                <a:solidFill>
-                  <a:srgbClr val="1A1A1A"/>
-                </a:solidFill>
-                <a:latin typeface="Georgia" pitchFamily="34" charset="0"/>
-                <a:ea typeface="Georgia" pitchFamily="34" charset="-122"/>
-                <a:cs typeface="Georgia" pitchFamily="34" charset="-120"/>
-              </a:rPr>
-              <a:t> (sattva, rajas, tamas) · Love and Strife (Empedocles); the natural motions toward "proper place" (Aristotle)</a:t>
-            </a:r>
-            <a:endParaRPr lang="en-US" sz="1200" dirty="0"/>
-          </a:p>
-          <a:p>
-            <a:pPr algn="l" marL="342900" indent="-342900">
-              <a:lnSpc>
-                <a:spcPts val="1620"/>
-              </a:lnSpc>
-              <a:spcAft>
-                <a:spcPts val="300"/>
-              </a:spcAft>
-              <a:buSzPct val="100000"/>
-              <a:buChar char="•"/>
-            </a:pPr>
-            <a:r>
-              <a:rPr lang="en-US" sz="1200" b="1" dirty="0">
-                <a:solidFill>
-                  <a:srgbClr val="1A1A1A"/>
-                </a:solidFill>
-                <a:latin typeface="Georgia" pitchFamily="34" charset="0"/>
-                <a:ea typeface="Georgia" pitchFamily="34" charset="-122"/>
-                <a:cs typeface="Georgia" pitchFamily="34" charset="-120"/>
-              </a:rPr>
-              <a:t>Fifth element identity</a:t>
-            </a:r>
-            <a:pPr algn="l" indent="0" marL="0">
-              <a:lnSpc>
-                <a:spcPts val="1620"/>
-              </a:lnSpc>
-              <a:spcAft>
-                <a:spcPts val="300"/>
-              </a:spcAft>
-              <a:buNone/>
-            </a:pPr>
-            <a:r>
-              <a:rPr lang="en-US" sz="1200" dirty="0">
-                <a:solidFill>
-                  <a:srgbClr val="1A1A1A"/>
-                </a:solidFill>
-                <a:latin typeface="Georgia" pitchFamily="34" charset="0"/>
-                <a:ea typeface="Georgia" pitchFamily="34" charset="-122"/>
-                <a:cs typeface="Georgia" pitchFamily="34" charset="-120"/>
-              </a:rPr>
-              <a:t> — </a:t>
-            </a:r>
-            <a:pPr algn="l" indent="0" marL="0">
-              <a:lnSpc>
-                <a:spcPts val="1620"/>
-              </a:lnSpc>
-              <a:spcAft>
-                <a:spcPts val="300"/>
-              </a:spcAft>
-              <a:buNone/>
-            </a:pPr>
-            <a:r>
-              <a:rPr lang="en-US" sz="1200" i="1" dirty="0">
-                <a:solidFill>
-                  <a:srgbClr val="1A1A1A"/>
-                </a:solidFill>
-                <a:latin typeface="Georgia" pitchFamily="34" charset="0"/>
-                <a:ea typeface="Georgia" pitchFamily="34" charset="-122"/>
-                <a:cs typeface="Georgia" pitchFamily="34" charset="-120"/>
-              </a:rPr>
-              <a:t>Ākāśa</a:t>
-            </a:r>
-            <a:pPr algn="l" indent="0" marL="0">
-              <a:lnSpc>
-                <a:spcPts val="1620"/>
-              </a:lnSpc>
-              <a:spcAft>
-                <a:spcPts val="300"/>
-              </a:spcAft>
-              <a:buNone/>
-            </a:pPr>
-            <a:r>
-              <a:rPr lang="en-US" sz="1200" dirty="0">
-                <a:solidFill>
-                  <a:srgbClr val="1A1A1A"/>
-                </a:solidFill>
-                <a:latin typeface="Georgia" pitchFamily="34" charset="0"/>
-                <a:ea typeface="Georgia" pitchFamily="34" charset="-122"/>
-                <a:cs typeface="Georgia" pitchFamily="34" charset="-120"/>
-              </a:rPr>
-              <a:t> — universal medium of space, present everywhere · </a:t>
-            </a:r>
-            <a:pPr algn="l" indent="0" marL="0">
-              <a:lnSpc>
-                <a:spcPts val="1620"/>
-              </a:lnSpc>
-              <a:spcAft>
-                <a:spcPts val="300"/>
-              </a:spcAft>
-              <a:buNone/>
-            </a:pPr>
-            <a:r>
-              <a:rPr lang="en-US" sz="1200" i="1" dirty="0">
-                <a:solidFill>
-                  <a:srgbClr val="1A1A1A"/>
-                </a:solidFill>
-                <a:latin typeface="Georgia" pitchFamily="34" charset="0"/>
-                <a:ea typeface="Georgia" pitchFamily="34" charset="-122"/>
-                <a:cs typeface="Georgia" pitchFamily="34" charset="-120"/>
-              </a:rPr>
-              <a:t>Aither</a:t>
-            </a:r>
-            <a:pPr algn="l" indent="0" marL="0">
-              <a:lnSpc>
-                <a:spcPts val="1620"/>
-              </a:lnSpc>
-              <a:spcAft>
-                <a:spcPts val="300"/>
-              </a:spcAft>
-              <a:buNone/>
-            </a:pPr>
-            <a:r>
-              <a:rPr lang="en-US" sz="1200" dirty="0">
-                <a:solidFill>
-                  <a:srgbClr val="1A1A1A"/>
-                </a:solidFill>
-                <a:latin typeface="Georgia" pitchFamily="34" charset="0"/>
-                <a:ea typeface="Georgia" pitchFamily="34" charset="-122"/>
-                <a:cs typeface="Georgia" pitchFamily="34" charset="-120"/>
-              </a:rPr>
-              <a:t> — celestial substance, only in the heavens</a:t>
-            </a:r>
-            <a:endParaRPr lang="en-US" sz="1200" dirty="0"/>
-          </a:p>
-          <a:p>
-            <a:pPr algn="l" marL="342900" indent="-342900">
-              <a:lnSpc>
-                <a:spcPts val="1620"/>
-              </a:lnSpc>
-              <a:spcAft>
-                <a:spcPts val="300"/>
-              </a:spcAft>
-              <a:buSzPct val="100000"/>
-              <a:buChar char="•"/>
-            </a:pPr>
-            <a:r>
-              <a:rPr lang="en-US" sz="1200" b="1" dirty="0">
-                <a:solidFill>
-                  <a:srgbClr val="1A1A1A"/>
-                </a:solidFill>
-                <a:latin typeface="Georgia" pitchFamily="34" charset="0"/>
-                <a:ea typeface="Georgia" pitchFamily="34" charset="-122"/>
-                <a:cs typeface="Georgia" pitchFamily="34" charset="-120"/>
-              </a:rPr>
-              <a:t>Quality-count rule</a:t>
-            </a:r>
-            <a:pPr algn="l" indent="0" marL="0">
-              <a:lnSpc>
-                <a:spcPts val="1620"/>
-              </a:lnSpc>
-              <a:spcAft>
-                <a:spcPts val="300"/>
-              </a:spcAft>
-              <a:buNone/>
-            </a:pPr>
-            <a:r>
-              <a:rPr lang="en-US" sz="1200" dirty="0">
-                <a:solidFill>
-                  <a:srgbClr val="1A1A1A"/>
-                </a:solidFill>
-                <a:latin typeface="Georgia" pitchFamily="34" charset="0"/>
-                <a:ea typeface="Georgia" pitchFamily="34" charset="-122"/>
-                <a:cs typeface="Georgia" pitchFamily="34" charset="-120"/>
-              </a:rPr>
-              <a:t> — 1, 2, 3, 4, 5 (predicted from emergence order) · No equivalent — each element gets a pair of qualities (hot/cold + wet/dry)</a:t>
-            </a:r>
-            <a:endParaRPr lang="en-US" sz="1200" dirty="0"/>
-          </a:p>
-          <a:p>
-            <a:pPr algn="l" marL="342900" indent="-342900">
-              <a:lnSpc>
-                <a:spcPts val="1620"/>
-              </a:lnSpc>
-              <a:spcAft>
-                <a:spcPts val="300"/>
-              </a:spcAft>
-              <a:buSzPct val="100000"/>
-              <a:buChar char="•"/>
-            </a:pPr>
-            <a:r>
-              <a:rPr lang="en-US" sz="1200" b="1" dirty="0">
-                <a:solidFill>
-                  <a:srgbClr val="1A1A1A"/>
-                </a:solidFill>
-                <a:latin typeface="Georgia" pitchFamily="34" charset="0"/>
-                <a:ea typeface="Georgia" pitchFamily="34" charset="-122"/>
-                <a:cs typeface="Georgia" pitchFamily="34" charset="-120"/>
-              </a:rPr>
-              <a:t>Perceptual mapping (tanmātra–indriya)</a:t>
-            </a:r>
-            <a:pPr algn="l" indent="0" marL="0">
-              <a:lnSpc>
-                <a:spcPts val="1620"/>
-              </a:lnSpc>
-              <a:spcAft>
-                <a:spcPts val="300"/>
-              </a:spcAft>
-              <a:buNone/>
-            </a:pPr>
-            <a:r>
-              <a:rPr lang="en-US" sz="1200" dirty="0">
-                <a:solidFill>
-                  <a:srgbClr val="1A1A1A"/>
-                </a:solidFill>
-                <a:latin typeface="Georgia" pitchFamily="34" charset="0"/>
-                <a:ea typeface="Georgia" pitchFamily="34" charset="-122"/>
-                <a:cs typeface="Georgia" pitchFamily="34" charset="-120"/>
-              </a:rPr>
-              <a:t> — Yes — explicit, symmetric, one-to-one · No equivalent</a:t>
-            </a:r>
-            <a:endParaRPr lang="en-US" sz="1200" dirty="0"/>
-          </a:p>
-          <a:p>
-            <a:pPr algn="l" marL="342900" indent="-342900">
-              <a:lnSpc>
-                <a:spcPts val="1620"/>
-              </a:lnSpc>
-              <a:spcAft>
-                <a:spcPts val="300"/>
-              </a:spcAft>
-              <a:buSzPct val="100000"/>
-              <a:buChar char="•"/>
-            </a:pPr>
-            <a:r>
-              <a:rPr lang="en-US" sz="1200" b="1" dirty="0">
-                <a:solidFill>
-                  <a:srgbClr val="1A1A1A"/>
-                </a:solidFill>
-                <a:latin typeface="Georgia" pitchFamily="34" charset="0"/>
-                <a:ea typeface="Georgia" pitchFamily="34" charset="-122"/>
-                <a:cs typeface="Georgia" pitchFamily="34" charset="-120"/>
-              </a:rPr>
-              <a:t>Includes consciousness in scheme</a:t>
-            </a:r>
-            <a:pPr algn="l" indent="0" marL="0">
-              <a:lnSpc>
-                <a:spcPts val="1620"/>
-              </a:lnSpc>
-              <a:spcAft>
-                <a:spcPts val="300"/>
-              </a:spcAft>
-              <a:buNone/>
-            </a:pPr>
-            <a:r>
-              <a:rPr lang="en-US" sz="1200" dirty="0">
-                <a:solidFill>
-                  <a:srgbClr val="1A1A1A"/>
-                </a:solidFill>
-                <a:latin typeface="Georgia" pitchFamily="34" charset="0"/>
-                <a:ea typeface="Georgia" pitchFamily="34" charset="-122"/>
-                <a:cs typeface="Georgia" pitchFamily="34" charset="-120"/>
-              </a:rPr>
-              <a:t> — Yes (puruṣa, 25th tattva) · No</a:t>
-            </a:r>
-            <a:endParaRPr lang="en-US" sz="1200" dirty="0"/>
-          </a:p>
-        </p:txBody>
-      </p:sp>
-      <p:sp>
-        <p:nvSpPr>
-          <p:cNvPr id="13" name="Text 11"/>
-          <p:cNvSpPr/>
-          <p:nvPr/>
-        </p:nvSpPr>
-        <p:spPr>
-          <a:xfrm>
-            <a:off x="634901" y="7866311"/>
-            <a:ext cx="8102798" cy="487561"/>
-          </a:xfrm>
-          <a:prstGeom prst="rect">
-            <a:avLst/>
-          </a:prstGeom>
-          <a:noFill/>
-          <a:ln/>
-        </p:spPr>
-        <p:txBody>
-          <a:bodyPr wrap="square" lIns="0" tIns="0" rIns="0" bIns="0" rtlCol="0" anchor="t"/>
-          <a:lstStyle/>
-          <a:p>
-            <a:pPr algn="l" marL="342900" indent="-342900">
-              <a:lnSpc>
-                <a:spcPts val="1620"/>
-              </a:lnSpc>
-              <a:spcAft>
-                <a:spcPts val="300"/>
-              </a:spcAft>
-              <a:buSzPct val="100000"/>
-              <a:buChar char="•"/>
-            </a:pPr>
-            <a:r>
-              <a:rPr lang="en-US" sz="1200" b="1" dirty="0">
-                <a:solidFill>
-                  <a:srgbClr val="1A1A1A"/>
-                </a:solidFill>
-                <a:latin typeface="Georgia" pitchFamily="34" charset="0"/>
-                <a:ea typeface="Georgia" pitchFamily="34" charset="-122"/>
-                <a:cs typeface="Georgia" pitchFamily="34" charset="-120"/>
-              </a:rPr>
-              <a:t>Discuss the most interesting difference.</a:t>
-            </a:r>
-            <a:pPr algn="l" indent="0" marL="0">
-              <a:lnSpc>
-                <a:spcPts val="1620"/>
-              </a:lnSpc>
-              <a:spcAft>
-                <a:spcPts val="300"/>
-              </a:spcAft>
-              <a:buNone/>
-            </a:pPr>
-            <a:r>
-              <a:rPr lang="en-US" sz="1200" dirty="0">
-                <a:solidFill>
-                  <a:srgbClr val="1A1A1A"/>
-                </a:solidFill>
-                <a:latin typeface="Georgia" pitchFamily="34" charset="0"/>
-                <a:ea typeface="Georgia" pitchFamily="34" charset="-122"/>
-                <a:cs typeface="Georgia" pitchFamily="34" charset="-120"/>
-              </a:rPr>
-              <a:t> Open: </a:t>
-            </a:r>
-            <a:pPr algn="l" indent="0" marL="0">
-              <a:lnSpc>
-                <a:spcPts val="1620"/>
-              </a:lnSpc>
-              <a:spcAft>
-                <a:spcPts val="300"/>
-              </a:spcAft>
-              <a:buNone/>
-            </a:pPr>
-            <a:r>
-              <a:rPr lang="en-US" sz="1200" i="1" dirty="0">
-                <a:solidFill>
-                  <a:srgbClr val="1A1A1A"/>
-                </a:solidFill>
-                <a:latin typeface="Georgia" pitchFamily="34" charset="0"/>
-                <a:ea typeface="Georgia" pitchFamily="34" charset="-122"/>
-                <a:cs typeface="Georgia" pitchFamily="34" charset="-120"/>
-              </a:rPr>
-              <a:t>"Which of these structural differences feels most significant to you? Why?"</a:t>
-            </a:r>
-            <a:endParaRPr lang="en-US" sz="1200" dirty="0"/>
-          </a:p>
-        </p:txBody>
-      </p:sp>
-      <p:sp>
-        <p:nvSpPr>
-          <p:cNvPr id="14" name="Text 12"/>
-          <p:cNvSpPr/>
-          <p:nvPr/>
-        </p:nvSpPr>
-        <p:spPr>
-          <a:xfrm>
-            <a:off x="406301" y="8518922"/>
+            <a:off x="406301" y="4434929"/>
             <a:ext cx="8498026" cy="213271"/>
           </a:xfrm>
           <a:prstGeom prst="rect">
@@ -4606,7 +5784,7 @@
                 <a:ea typeface="Times New Roman" pitchFamily="34" charset="-122"/>
                 <a:cs typeface="Times New Roman" pitchFamily="34" charset="-120"/>
               </a:rPr>
-              <a:t>Activity (10 min)</a:t>
+              <a:t>Core (25 min)</a:t>
             </a:r>
             <a:endParaRPr lang="en-US" sz="1800" dirty="0"/>
           </a:p>
@@ -4620,8 +5798,8 @@
         </p:nvSpPr>
         <p:spPr>
           <a:xfrm>
-            <a:off x="406301" y="870942"/>
-            <a:ext cx="8498026" cy="426541"/>
+            <a:off x="634901" y="883593"/>
+            <a:ext cx="8102798" cy="281880"/>
           </a:xfrm>
           <a:prstGeom prst="rect">
             <a:avLst/>
@@ -4633,9 +5811,128 @@
           <a:bodyPr wrap="square" lIns="0" tIns="0" rIns="0" bIns="0" rtlCol="0" anchor="t"/>
           <a:lstStyle/>
           <a:p>
-            <a:pPr algn="l" indent="0" marL="0">
-              <a:lnSpc>
-                <a:spcPts val="1680"/>
+            <a:pPr algn="l" marL="342900" indent="-342900">
+              <a:lnSpc>
+                <a:spcPts val="1620"/>
+              </a:lnSpc>
+              <a:spcAft>
+                <a:spcPts val="300"/>
+              </a:spcAft>
+              <a:buSzPct val="100000"/>
+              <a:buChar char="•"/>
+            </a:pPr>
+            <a:r>
+              <a:rPr lang="en-US" sz="1200" b="1" dirty="0">
+                <a:solidFill>
+                  <a:srgbClr val="1A1A1A"/>
+                </a:solidFill>
+                <a:latin typeface="Georgia" pitchFamily="34" charset="0"/>
+                <a:ea typeface="Georgia" pitchFamily="34" charset="-122"/>
+                <a:cs typeface="Georgia" pitchFamily="34" charset="-120"/>
+              </a:rPr>
+              <a:t>Empedocles in brief.</a:t>
+            </a:r>
+            <a:pPr algn="l" indent="0" marL="0">
+              <a:lnSpc>
+                <a:spcPts val="1620"/>
+              </a:lnSpc>
+              <a:spcAft>
+                <a:spcPts val="300"/>
+              </a:spcAft>
+              <a:buNone/>
+            </a:pPr>
+            <a:r>
+              <a:rPr lang="en-US" sz="1200" dirty="0">
+                <a:solidFill>
+                  <a:srgbClr val="1A1A1A"/>
+                </a:solidFill>
+                <a:latin typeface="Georgia" pitchFamily="34" charset="0"/>
+                <a:ea typeface="Georgia" pitchFamily="34" charset="-122"/>
+                <a:cs typeface="Georgia" pitchFamily="34" charset="-120"/>
+              </a:rPr>
+              <a:t> Read 1-paragraph paraphrase aloud:</a:t>
+            </a:r>
+            <a:endParaRPr lang="en-US" sz="1200" dirty="0"/>
+          </a:p>
+        </p:txBody>
+      </p:sp>
+      <p:sp>
+        <p:nvSpPr>
+          <p:cNvPr id="5" name="Text 3"/>
+          <p:cNvSpPr/>
+          <p:nvPr/>
+        </p:nvSpPr>
+        <p:spPr>
+          <a:xfrm>
+            <a:off x="406301" y="1266974"/>
+            <a:ext cx="8331398" cy="1073944"/>
+          </a:xfrm>
+          <a:prstGeom prst="rect">
+            <a:avLst/>
+          </a:prstGeom>
+          <a:solidFill>
+            <a:srgbClr val="FFFFFF"/>
+          </a:solidFill>
+          <a:ln/>
+        </p:spPr>
+        <p:txBody>
+          <a:bodyPr wrap="square" rtlCol="0" anchor="ctr"/>
+          <a:lstStyle/>
+          <a:p>
+            <a:pPr indent="0" marL="0">
+              <a:buNone/>
+            </a:pPr>
+            <a:endParaRPr lang="en-US" dirty="0"/>
+          </a:p>
+        </p:txBody>
+      </p:sp>
+      <p:sp>
+        <p:nvSpPr>
+          <p:cNvPr id="6" name="Shape 4"/>
+          <p:cNvSpPr/>
+          <p:nvPr/>
+        </p:nvSpPr>
+        <p:spPr>
+          <a:xfrm>
+            <a:off x="434876" y="1266974"/>
+            <a:ext cx="0" cy="1073944"/>
+          </a:xfrm>
+          <a:prstGeom prst="line">
+            <a:avLst/>
+          </a:prstGeom>
+          <a:noFill/>
+          <a:ln w="57150">
+            <a:solidFill>
+              <a:srgbClr val="997929"/>
+            </a:solidFill>
+            <a:prstDash val="solid"/>
+          </a:ln>
+        </p:spPr>
+      </p:sp>
+      <p:sp>
+        <p:nvSpPr>
+          <p:cNvPr id="7" name="Text 5"/>
+          <p:cNvSpPr/>
+          <p:nvPr/>
+        </p:nvSpPr>
+        <p:spPr>
+          <a:xfrm>
+            <a:off x="692051" y="1457474"/>
+            <a:ext cx="7973389" cy="692944"/>
+          </a:xfrm>
+          <a:prstGeom prst="rect">
+            <a:avLst/>
+          </a:prstGeom>
+          <a:noFill/>
+          <a:ln/>
+        </p:spPr>
+        <p:txBody>
+          <a:bodyPr wrap="square" lIns="0" tIns="0" rIns="0" bIns="0" rtlCol="0" anchor="t"/>
+          <a:lstStyle/>
+          <a:p>
+            <a:pPr algn="l" indent="0" marL="0">
+              <a:lnSpc>
+                <a:spcPts val="1820"/>
               </a:lnSpc>
               <a:spcBef>
                 <a:spcPts val="300"/>
@@ -4646,23 +5943,161 @@
               <a:buNone/>
             </a:pPr>
             <a:r>
-              <a:rPr lang="en-US" sz="1200" dirty="0">
-                <a:solidFill>
-                  <a:srgbClr val="1A1A1A"/>
-                </a:solidFill>
-                <a:latin typeface="Georgia" pitchFamily="34" charset="0"/>
-                <a:ea typeface="Georgia" pitchFamily="34" charset="-122"/>
-                <a:cs typeface="Georgia" pitchFamily="34" charset="-120"/>
-              </a:rPr>
-              <a:t>Begin in-class comparison essay draft: – Pick ONE structural difference from the table. – Write a 1-paragraph (5–7 sentence) analysis of why it matters. – This is a draft for the longer Day 8–10 paper.</a:t>
-            </a:r>
-            <a:endParaRPr lang="en-US" sz="1200" dirty="0"/>
-          </a:p>
-        </p:txBody>
-      </p:sp>
-      <p:sp>
-        <p:nvSpPr>
-          <p:cNvPr id="5" name="Text 3"/>
+              <a:rPr lang="en-US" sz="1300" dirty="0">
+                <a:solidFill>
+                  <a:srgbClr val="1A1A1A"/>
+                </a:solidFill>
+                <a:latin typeface="Times New Roman" pitchFamily="34" charset="0"/>
+                <a:ea typeface="Times New Roman" pitchFamily="34" charset="-122"/>
+                <a:cs typeface="Times New Roman" pitchFamily="34" charset="-120"/>
+              </a:rPr>
+              <a:t>Empedocles (c. 490–430 BCE) proposed four "roots" (</a:t>
+            </a:r>
+            <a:pPr algn="l" indent="0" marL="0">
+              <a:lnSpc>
+                <a:spcPts val="1820"/>
+              </a:lnSpc>
+              <a:spcBef>
+                <a:spcPts val="300"/>
+              </a:spcBef>
+              <a:spcAft>
+                <a:spcPts val="300"/>
+              </a:spcAft>
+              <a:buNone/>
+            </a:pPr>
+            <a:r>
+              <a:rPr lang="en-US" sz="1300" i="1" dirty="0">
+                <a:solidFill>
+                  <a:srgbClr val="1A1A1A"/>
+                </a:solidFill>
+                <a:latin typeface="Times New Roman" pitchFamily="34" charset="0"/>
+                <a:ea typeface="Times New Roman" pitchFamily="34" charset="-122"/>
+                <a:cs typeface="Times New Roman" pitchFamily="34" charset="-120"/>
+              </a:rPr>
+              <a:t>rhizomata</a:t>
+            </a:r>
+            <a:pPr algn="l" indent="0" marL="0">
+              <a:lnSpc>
+                <a:spcPts val="1820"/>
+              </a:lnSpc>
+              <a:spcBef>
+                <a:spcPts val="300"/>
+              </a:spcBef>
+              <a:spcAft>
+                <a:spcPts val="300"/>
+              </a:spcAft>
+              <a:buNone/>
+            </a:pPr>
+            <a:r>
+              <a:rPr lang="en-US" sz="1300" dirty="0">
+                <a:solidFill>
+                  <a:srgbClr val="1A1A1A"/>
+                </a:solidFill>
+                <a:latin typeface="Times New Roman" pitchFamily="34" charset="0"/>
+                <a:ea typeface="Times New Roman" pitchFamily="34" charset="-122"/>
+                <a:cs typeface="Times New Roman" pitchFamily="34" charset="-120"/>
+              </a:rPr>
+              <a:t>) — earth, water, air, fire. He added two forces — Love (</a:t>
+            </a:r>
+            <a:pPr algn="l" indent="0" marL="0">
+              <a:lnSpc>
+                <a:spcPts val="1820"/>
+              </a:lnSpc>
+              <a:spcBef>
+                <a:spcPts val="300"/>
+              </a:spcBef>
+              <a:spcAft>
+                <a:spcPts val="300"/>
+              </a:spcAft>
+              <a:buNone/>
+            </a:pPr>
+            <a:r>
+              <a:rPr lang="en-US" sz="1300" i="1" dirty="0">
+                <a:solidFill>
+                  <a:srgbClr val="1A1A1A"/>
+                </a:solidFill>
+                <a:latin typeface="Times New Roman" pitchFamily="34" charset="0"/>
+                <a:ea typeface="Times New Roman" pitchFamily="34" charset="-122"/>
+                <a:cs typeface="Times New Roman" pitchFamily="34" charset="-120"/>
+              </a:rPr>
+              <a:t>philia</a:t>
+            </a:r>
+            <a:pPr algn="l" indent="0" marL="0">
+              <a:lnSpc>
+                <a:spcPts val="1820"/>
+              </a:lnSpc>
+              <a:spcBef>
+                <a:spcPts val="300"/>
+              </a:spcBef>
+              <a:spcAft>
+                <a:spcPts val="300"/>
+              </a:spcAft>
+              <a:buNone/>
+            </a:pPr>
+            <a:r>
+              <a:rPr lang="en-US" sz="1300" dirty="0">
+                <a:solidFill>
+                  <a:srgbClr val="1A1A1A"/>
+                </a:solidFill>
+                <a:latin typeface="Times New Roman" pitchFamily="34" charset="0"/>
+                <a:ea typeface="Times New Roman" pitchFamily="34" charset="-122"/>
+                <a:cs typeface="Times New Roman" pitchFamily="34" charset="-120"/>
+              </a:rPr>
+              <a:t>) that brings them together and Strife (</a:t>
+            </a:r>
+            <a:pPr algn="l" indent="0" marL="0">
+              <a:lnSpc>
+                <a:spcPts val="1820"/>
+              </a:lnSpc>
+              <a:spcBef>
+                <a:spcPts val="300"/>
+              </a:spcBef>
+              <a:spcAft>
+                <a:spcPts val="300"/>
+              </a:spcAft>
+              <a:buNone/>
+            </a:pPr>
+            <a:r>
+              <a:rPr lang="en-US" sz="1300" i="1" dirty="0">
+                <a:solidFill>
+                  <a:srgbClr val="1A1A1A"/>
+                </a:solidFill>
+                <a:latin typeface="Times New Roman" pitchFamily="34" charset="0"/>
+                <a:ea typeface="Times New Roman" pitchFamily="34" charset="-122"/>
+                <a:cs typeface="Times New Roman" pitchFamily="34" charset="-120"/>
+              </a:rPr>
+              <a:t>neikos</a:t>
+            </a:r>
+            <a:pPr algn="l" indent="0" marL="0">
+              <a:lnSpc>
+                <a:spcPts val="1820"/>
+              </a:lnSpc>
+              <a:spcBef>
+                <a:spcPts val="300"/>
+              </a:spcBef>
+              <a:spcAft>
+                <a:spcPts val="300"/>
+              </a:spcAft>
+              <a:buNone/>
+            </a:pPr>
+            <a:r>
+              <a:rPr lang="en-US" sz="1300" dirty="0">
+                <a:solidFill>
+                  <a:srgbClr val="1A1A1A"/>
+                </a:solidFill>
+                <a:latin typeface="Times New Roman" pitchFamily="34" charset="0"/>
+                <a:ea typeface="Times New Roman" pitchFamily="34" charset="-122"/>
+                <a:cs typeface="Times New Roman" pitchFamily="34" charset="-120"/>
+              </a:rPr>
+              <a:t>) that separates them. The world is the cyclic combination/separation of the four under these forces.</a:t>
+            </a:r>
+            <a:endParaRPr lang="en-US" sz="1300" dirty="0"/>
+          </a:p>
+        </p:txBody>
+      </p:sp>
+      <p:sp>
+        <p:nvSpPr>
+          <p:cNvPr id="8" name="Text 6"/>
           <p:cNvSpPr/>
           <p:nvPr/>
         </p:nvSpPr>
@@ -4812,7 +6247,7 @@
                 <a:ea typeface="Times New Roman" pitchFamily="34" charset="-122"/>
                 <a:cs typeface="Times New Roman" pitchFamily="34" charset="-120"/>
               </a:rPr>
-              <a:t>Wrap-up (5 min)</a:t>
+              <a:t>Core (25 min) (cont.)</a:t>
             </a:r>
             <a:endParaRPr lang="en-US" sz="1800" dirty="0"/>
           </a:p>
@@ -4826,8 +6261,8 @@
         </p:nvSpPr>
         <p:spPr>
           <a:xfrm>
-            <a:off x="406301" y="870942"/>
-            <a:ext cx="8498026" cy="213271"/>
+            <a:off x="634901" y="883593"/>
+            <a:ext cx="8102798" cy="281880"/>
           </a:xfrm>
           <a:prstGeom prst="rect">
             <a:avLst/>
@@ -4839,6 +6274,245 @@
           <a:bodyPr wrap="square" lIns="0" tIns="0" rIns="0" bIns="0" rtlCol="0" anchor="t"/>
           <a:lstStyle/>
           <a:p>
+            <a:pPr algn="l" marL="342900" indent="-342900">
+              <a:lnSpc>
+                <a:spcPts val="1620"/>
+              </a:lnSpc>
+              <a:spcAft>
+                <a:spcPts val="300"/>
+              </a:spcAft>
+              <a:buSzPct val="100000"/>
+              <a:buChar char="•"/>
+            </a:pPr>
+            <a:r>
+              <a:rPr lang="en-US" sz="1200" b="1" dirty="0">
+                <a:solidFill>
+                  <a:srgbClr val="1A1A1A"/>
+                </a:solidFill>
+                <a:latin typeface="Georgia" pitchFamily="34" charset="0"/>
+                <a:ea typeface="Georgia" pitchFamily="34" charset="-122"/>
+                <a:cs typeface="Georgia" pitchFamily="34" charset="-120"/>
+              </a:rPr>
+              <a:t>Aristotle in brief:</a:t>
+            </a:r>
+            <a:endParaRPr lang="en-US" sz="1200" dirty="0"/>
+          </a:p>
+        </p:txBody>
+      </p:sp>
+      <p:sp>
+        <p:nvSpPr>
+          <p:cNvPr id="5" name="Text 3"/>
+          <p:cNvSpPr/>
+          <p:nvPr/>
+        </p:nvSpPr>
+        <p:spPr>
+          <a:xfrm>
+            <a:off x="406301" y="1266974"/>
+            <a:ext cx="8331398" cy="1073944"/>
+          </a:xfrm>
+          <a:prstGeom prst="rect">
+            <a:avLst/>
+          </a:prstGeom>
+          <a:solidFill>
+            <a:srgbClr val="FFFFFF"/>
+          </a:solidFill>
+          <a:ln/>
+        </p:spPr>
+        <p:txBody>
+          <a:bodyPr wrap="square" rtlCol="0" anchor="ctr"/>
+          <a:lstStyle/>
+          <a:p>
+            <a:pPr indent="0" marL="0">
+              <a:buNone/>
+            </a:pPr>
+            <a:endParaRPr lang="en-US" dirty="0"/>
+          </a:p>
+        </p:txBody>
+      </p:sp>
+      <p:sp>
+        <p:nvSpPr>
+          <p:cNvPr id="6" name="Shape 4"/>
+          <p:cNvSpPr/>
+          <p:nvPr/>
+        </p:nvSpPr>
+        <p:spPr>
+          <a:xfrm>
+            <a:off x="434876" y="1266974"/>
+            <a:ext cx="0" cy="1073944"/>
+          </a:xfrm>
+          <a:prstGeom prst="line">
+            <a:avLst/>
+          </a:prstGeom>
+          <a:noFill/>
+          <a:ln w="57150">
+            <a:solidFill>
+              <a:srgbClr val="997929"/>
+            </a:solidFill>
+            <a:prstDash val="solid"/>
+          </a:ln>
+        </p:spPr>
+      </p:sp>
+      <p:sp>
+        <p:nvSpPr>
+          <p:cNvPr id="7" name="Text 5"/>
+          <p:cNvSpPr/>
+          <p:nvPr/>
+        </p:nvSpPr>
+        <p:spPr>
+          <a:xfrm>
+            <a:off x="692051" y="1457474"/>
+            <a:ext cx="7973389" cy="692944"/>
+          </a:xfrm>
+          <a:prstGeom prst="rect">
+            <a:avLst/>
+          </a:prstGeom>
+          <a:noFill/>
+          <a:ln/>
+        </p:spPr>
+        <p:txBody>
+          <a:bodyPr wrap="square" lIns="0" tIns="0" rIns="0" bIns="0" rtlCol="0" anchor="t"/>
+          <a:lstStyle/>
+          <a:p>
+            <a:pPr algn="l" indent="0" marL="0">
+              <a:lnSpc>
+                <a:spcPts val="1820"/>
+              </a:lnSpc>
+              <a:spcBef>
+                <a:spcPts val="300"/>
+              </a:spcBef>
+              <a:spcAft>
+                <a:spcPts val="300"/>
+              </a:spcAft>
+              <a:buNone/>
+            </a:pPr>
+            <a:r>
+              <a:rPr lang="en-US" sz="1300" dirty="0">
+                <a:solidFill>
+                  <a:srgbClr val="1A1A1A"/>
+                </a:solidFill>
+                <a:latin typeface="Times New Roman" pitchFamily="34" charset="0"/>
+                <a:ea typeface="Times New Roman" pitchFamily="34" charset="-122"/>
+                <a:cs typeface="Times New Roman" pitchFamily="34" charset="-120"/>
+              </a:rPr>
+              <a:t>Aristotle (4th c. BCE) inherited the four sublunary elements (earth, water, air, fire) but added a </a:t>
+            </a:r>
+            <a:pPr algn="l" indent="0" marL="0">
+              <a:lnSpc>
+                <a:spcPts val="1820"/>
+              </a:lnSpc>
+              <a:spcBef>
+                <a:spcPts val="300"/>
+              </a:spcBef>
+              <a:spcAft>
+                <a:spcPts val="300"/>
+              </a:spcAft>
+              <a:buNone/>
+            </a:pPr>
+            <a:r>
+              <a:rPr lang="en-US" sz="1300" i="1" dirty="0">
+                <a:solidFill>
+                  <a:srgbClr val="1A1A1A"/>
+                </a:solidFill>
+                <a:latin typeface="Times New Roman" pitchFamily="34" charset="0"/>
+                <a:ea typeface="Times New Roman" pitchFamily="34" charset="-122"/>
+                <a:cs typeface="Times New Roman" pitchFamily="34" charset="-120"/>
+              </a:rPr>
+              <a:t>fifth element</a:t>
+            </a:r>
+            <a:pPr algn="l" indent="0" marL="0">
+              <a:lnSpc>
+                <a:spcPts val="1820"/>
+              </a:lnSpc>
+              <a:spcBef>
+                <a:spcPts val="300"/>
+              </a:spcBef>
+              <a:spcAft>
+                <a:spcPts val="300"/>
+              </a:spcAft>
+              <a:buNone/>
+            </a:pPr>
+            <a:r>
+              <a:rPr lang="en-US" sz="1300" dirty="0">
+                <a:solidFill>
+                  <a:srgbClr val="1A1A1A"/>
+                </a:solidFill>
+                <a:latin typeface="Times New Roman" pitchFamily="34" charset="0"/>
+                <a:ea typeface="Times New Roman" pitchFamily="34" charset="-122"/>
+                <a:cs typeface="Times New Roman" pitchFamily="34" charset="-120"/>
+              </a:rPr>
+              <a:t> — </a:t>
+            </a:r>
+            <a:pPr algn="l" indent="0" marL="0">
+              <a:lnSpc>
+                <a:spcPts val="1820"/>
+              </a:lnSpc>
+              <a:spcBef>
+                <a:spcPts val="300"/>
+              </a:spcBef>
+              <a:spcAft>
+                <a:spcPts val="300"/>
+              </a:spcAft>
+              <a:buNone/>
+            </a:pPr>
+            <a:r>
+              <a:rPr lang="en-US" sz="1300" i="1" dirty="0">
+                <a:solidFill>
+                  <a:srgbClr val="1A1A1A"/>
+                </a:solidFill>
+                <a:latin typeface="Times New Roman" pitchFamily="34" charset="0"/>
+                <a:ea typeface="Times New Roman" pitchFamily="34" charset="-122"/>
+                <a:cs typeface="Times New Roman" pitchFamily="34" charset="-120"/>
+              </a:rPr>
+              <a:t>aither</a:t>
+            </a:r>
+            <a:pPr algn="l" indent="0" marL="0">
+              <a:lnSpc>
+                <a:spcPts val="1820"/>
+              </a:lnSpc>
+              <a:spcBef>
+                <a:spcPts val="300"/>
+              </a:spcBef>
+              <a:spcAft>
+                <a:spcPts val="300"/>
+              </a:spcAft>
+              <a:buNone/>
+            </a:pPr>
+            <a:r>
+              <a:rPr lang="en-US" sz="1300" dirty="0">
+                <a:solidFill>
+                  <a:srgbClr val="1A1A1A"/>
+                </a:solidFill>
+                <a:latin typeface="Times New Roman" pitchFamily="34" charset="0"/>
+                <a:ea typeface="Times New Roman" pitchFamily="34" charset="-122"/>
+                <a:cs typeface="Times New Roman" pitchFamily="34" charset="-120"/>
+              </a:rPr>
+              <a:t> (the "quintessence") — which is the substance of the heavenly spheres. The four are characterised by pairs of qualities: hot/cold and wet/dry.</a:t>
+            </a:r>
+            <a:endParaRPr lang="en-US" sz="1300" dirty="0"/>
+          </a:p>
+        </p:txBody>
+      </p:sp>
+      <p:sp>
+        <p:nvSpPr>
+          <p:cNvPr id="8" name="Text 6"/>
+          <p:cNvSpPr/>
+          <p:nvPr/>
+        </p:nvSpPr>
+        <p:spPr>
+          <a:xfrm>
+            <a:off x="406301" y="2429768"/>
+            <a:ext cx="8498026" cy="213271"/>
+          </a:xfrm>
+          <a:prstGeom prst="rect">
+            <a:avLst/>
+          </a:prstGeom>
+          <a:noFill/>
+          <a:ln/>
+        </p:spPr>
+        <p:txBody>
+          <a:bodyPr wrap="square" lIns="0" tIns="0" rIns="0" bIns="0" rtlCol="0" anchor="t"/>
+          <a:lstStyle/>
+          <a:p>
             <a:pPr algn="l" indent="0" marL="0">
               <a:lnSpc>
                 <a:spcPts val="1680"/>
@@ -4852,29 +6526,6 @@
               <a:buNone/>
             </a:pPr>
             <a:r>
-              <a:rPr lang="en-US" sz="1200" dirty="0">
-                <a:solidFill>
-                  <a:srgbClr val="1A1A1A"/>
-                </a:solidFill>
-                <a:latin typeface="Georgia" pitchFamily="34" charset="0"/>
-                <a:ea typeface="Georgia" pitchFamily="34" charset="-122"/>
-                <a:cs typeface="Georgia" pitchFamily="34" charset="-120"/>
-              </a:rPr>
-              <a:t>– Preview Day 5: </a:t>
-            </a:r>
-            <a:pPr algn="l" indent="0" marL="0">
-              <a:lnSpc>
-                <a:spcPts val="1680"/>
-              </a:lnSpc>
-              <a:spcBef>
-                <a:spcPts val="300"/>
-              </a:spcBef>
-              <a:spcAft>
-                <a:spcPts val="300"/>
-              </a:spcAft>
-              <a:buNone/>
-            </a:pPr>
-            <a:r>
               <a:rPr lang="en-US" sz="1200" i="1" dirty="0">
                 <a:solidFill>
                   <a:srgbClr val="1A1A1A"/>
@@ -4883,7 +6534,7 @@
                 <a:ea typeface="Georgia" pitchFamily="34" charset="-122"/>
                 <a:cs typeface="Georgia" pitchFamily="34" charset="-120"/>
               </a:rPr>
-              <a:t>"Tomorrow — we read SB 3.26.36 closely in IAST, word by word."</a:t>
+              <a:t>Each row: Element · Aristotle's qualities.</a:t>
             </a:r>
             <a:endParaRPr lang="en-US" sz="1200" dirty="0"/>
           </a:p>
@@ -4891,7 +6542,7 @@
       </p:sp>
       <p:sp>
         <p:nvSpPr>
-          <p:cNvPr id="5" name="Text 3"/>
+          <p:cNvPr id="9" name="Text 7"/>
           <p:cNvSpPr/>
           <p:nvPr/>
         </p:nvSpPr>
@@ -5041,7 +6692,7 @@
                 <a:ea typeface="Times New Roman" pitchFamily="34" charset="-122"/>
                 <a:cs typeface="Times New Roman" pitchFamily="34" charset="-120"/>
               </a:rPr>
-              <a:t>Differentiation</a:t>
+              <a:t>Core (25 min) (cont.)</a:t>
             </a:r>
             <a:endParaRPr lang="en-US" sz="1800" dirty="0"/>
           </a:p>
@@ -5056,7 +6707,7 @@
         <p:spPr>
           <a:xfrm>
             <a:off x="634901" y="883593"/>
-            <a:ext cx="8102798" cy="731341"/>
+            <a:ext cx="8102798" cy="1257002"/>
           </a:xfrm>
           <a:prstGeom prst="rect">
             <a:avLst/>
@@ -5087,7 +6738,7 @@
                 <a:ea typeface="Georgia" pitchFamily="34" charset="-122"/>
                 <a:cs typeface="Georgia" pitchFamily="34" charset="-120"/>
               </a:rPr>
-              <a:t>Tier up:</a:t>
+              <a:t>Fire</a:t>
             </a:r>
             <a:pPr algn="l" indent="0" marL="0">
               <a:lnSpc>
@@ -5107,47 +6758,7 @@
                 <a:ea typeface="Georgia" pitchFamily="34" charset="-122"/>
                 <a:cs typeface="Georgia" pitchFamily="34" charset="-120"/>
               </a:rPr>
-              <a:t> Read Empedocles fragment B17 (on Love and Strife) in translation; write 1 paragraph on whether the </a:t>
-            </a:r>
-            <a:pPr algn="l" indent="0" marL="0">
-              <a:lnSpc>
-                <a:spcPts val="1620"/>
-              </a:lnSpc>
-              <a:spcAft>
-                <a:spcPts val="300"/>
-              </a:spcAft>
-              <a:buNone/>
-            </a:pPr>
-            <a:r>
-              <a:rPr lang="en-US" sz="1200" i="1" dirty="0">
-                <a:solidFill>
-                  <a:srgbClr val="1A1A1A"/>
-                </a:solidFill>
-                <a:latin typeface="Georgia" pitchFamily="34" charset="0"/>
-                <a:ea typeface="Georgia" pitchFamily="34" charset="-122"/>
-                <a:cs typeface="Georgia" pitchFamily="34" charset="-120"/>
-              </a:rPr>
-              <a:t>guṇa</a:t>
-            </a:r>
-            <a:pPr algn="l" indent="0" marL="0">
-              <a:lnSpc>
-                <a:spcPts val="1620"/>
-              </a:lnSpc>
-              <a:spcAft>
-                <a:spcPts val="300"/>
-              </a:spcAft>
-              <a:buNone/>
-            </a:pPr>
-            <a:r>
-              <a:rPr lang="en-US" sz="1200" dirty="0">
-                <a:solidFill>
-                  <a:srgbClr val="1A1A1A"/>
-                </a:solidFill>
-                <a:latin typeface="Georgia" pitchFamily="34" charset="0"/>
-                <a:ea typeface="Georgia" pitchFamily="34" charset="-122"/>
-                <a:cs typeface="Georgia" pitchFamily="34" charset="-120"/>
-              </a:rPr>
-              <a:t> doctrine in Sāṅkhya is structurally parallel.</a:t>
+              <a:t> — hot + dry</a:t>
             </a:r>
             <a:endParaRPr lang="en-US" sz="1200" dirty="0"/>
           </a:p>
@@ -5171,7 +6782,7 @@
                 <a:ea typeface="Georgia" pitchFamily="34" charset="-122"/>
                 <a:cs typeface="Georgia" pitchFamily="34" charset="-120"/>
               </a:rPr>
-              <a:t>Tier down:</a:t>
+              <a:t>Air</a:t>
             </a:r>
             <a:pPr algn="l" indent="0" marL="0">
               <a:lnSpc>
@@ -5191,15 +6802,213 @@
                 <a:ea typeface="Georgia" pitchFamily="34" charset="-122"/>
                 <a:cs typeface="Georgia" pitchFamily="34" charset="-120"/>
               </a:rPr>
-              <a:t> Focus on Aristotle alone; skip Empedocles for now.</a:t>
+              <a:t> — hot + wet</a:t>
             </a:r>
             <a:endParaRPr lang="en-US" sz="1200" dirty="0"/>
           </a:p>
+          <a:p>
+            <a:pPr algn="l" marL="342900" indent="-342900">
+              <a:lnSpc>
+                <a:spcPts val="1620"/>
+              </a:lnSpc>
+              <a:spcAft>
+                <a:spcPts val="300"/>
+              </a:spcAft>
+              <a:buSzPct val="100000"/>
+              <a:buChar char="•"/>
+            </a:pPr>
+            <a:r>
+              <a:rPr lang="en-US" sz="1200" b="1" dirty="0">
+                <a:solidFill>
+                  <a:srgbClr val="1A1A1A"/>
+                </a:solidFill>
+                <a:latin typeface="Georgia" pitchFamily="34" charset="0"/>
+                <a:ea typeface="Georgia" pitchFamily="34" charset="-122"/>
+                <a:cs typeface="Georgia" pitchFamily="34" charset="-120"/>
+              </a:rPr>
+              <a:t>Water</a:t>
+            </a:r>
+            <a:pPr algn="l" indent="0" marL="0">
+              <a:lnSpc>
+                <a:spcPts val="1620"/>
+              </a:lnSpc>
+              <a:spcAft>
+                <a:spcPts val="300"/>
+              </a:spcAft>
+              <a:buNone/>
+            </a:pPr>
+            <a:r>
+              <a:rPr lang="en-US" sz="1200" dirty="0">
+                <a:solidFill>
+                  <a:srgbClr val="1A1A1A"/>
+                </a:solidFill>
+                <a:latin typeface="Georgia" pitchFamily="34" charset="0"/>
+                <a:ea typeface="Georgia" pitchFamily="34" charset="-122"/>
+                <a:cs typeface="Georgia" pitchFamily="34" charset="-120"/>
+              </a:rPr>
+              <a:t> — cold + wet</a:t>
+            </a:r>
+            <a:endParaRPr lang="en-US" sz="1200" dirty="0"/>
+          </a:p>
+          <a:p>
+            <a:pPr algn="l" marL="342900" indent="-342900">
+              <a:lnSpc>
+                <a:spcPts val="1620"/>
+              </a:lnSpc>
+              <a:spcAft>
+                <a:spcPts val="300"/>
+              </a:spcAft>
+              <a:buSzPct val="100000"/>
+              <a:buChar char="•"/>
+            </a:pPr>
+            <a:r>
+              <a:rPr lang="en-US" sz="1200" b="1" dirty="0">
+                <a:solidFill>
+                  <a:srgbClr val="1A1A1A"/>
+                </a:solidFill>
+                <a:latin typeface="Georgia" pitchFamily="34" charset="0"/>
+                <a:ea typeface="Georgia" pitchFamily="34" charset="-122"/>
+                <a:cs typeface="Georgia" pitchFamily="34" charset="-120"/>
+              </a:rPr>
+              <a:t>Earth</a:t>
+            </a:r>
+            <a:pPr algn="l" indent="0" marL="0">
+              <a:lnSpc>
+                <a:spcPts val="1620"/>
+              </a:lnSpc>
+              <a:spcAft>
+                <a:spcPts val="300"/>
+              </a:spcAft>
+              <a:buNone/>
+            </a:pPr>
+            <a:r>
+              <a:rPr lang="en-US" sz="1200" dirty="0">
+                <a:solidFill>
+                  <a:srgbClr val="1A1A1A"/>
+                </a:solidFill>
+                <a:latin typeface="Georgia" pitchFamily="34" charset="0"/>
+                <a:ea typeface="Georgia" pitchFamily="34" charset="-122"/>
+                <a:cs typeface="Georgia" pitchFamily="34" charset="-120"/>
+              </a:rPr>
+              <a:t> — cold + dry</a:t>
+            </a:r>
+            <a:endParaRPr lang="en-US" sz="1200" dirty="0"/>
+          </a:p>
+          <a:p>
+            <a:pPr algn="l" marL="342900" indent="-342900">
+              <a:lnSpc>
+                <a:spcPts val="1620"/>
+              </a:lnSpc>
+              <a:spcAft>
+                <a:spcPts val="300"/>
+              </a:spcAft>
+              <a:buSzPct val="100000"/>
+              <a:buChar char="•"/>
+            </a:pPr>
+            <a:r>
+              <a:rPr lang="en-US" sz="1200" b="1" dirty="0">
+                <a:solidFill>
+                  <a:srgbClr val="1A1A1A"/>
+                </a:solidFill>
+                <a:latin typeface="Georgia" pitchFamily="34" charset="0"/>
+                <a:ea typeface="Georgia" pitchFamily="34" charset="-122"/>
+                <a:cs typeface="Georgia" pitchFamily="34" charset="-120"/>
+              </a:rPr>
+              <a:t>Aither</a:t>
+            </a:r>
+            <a:pPr algn="l" indent="0" marL="0">
+              <a:lnSpc>
+                <a:spcPts val="1620"/>
+              </a:lnSpc>
+              <a:spcAft>
+                <a:spcPts val="300"/>
+              </a:spcAft>
+              <a:buNone/>
+            </a:pPr>
+            <a:r>
+              <a:rPr lang="en-US" sz="1200" dirty="0">
+                <a:solidFill>
+                  <a:srgbClr val="1A1A1A"/>
+                </a:solidFill>
+                <a:latin typeface="Georgia" pitchFamily="34" charset="0"/>
+                <a:ea typeface="Georgia" pitchFamily="34" charset="-122"/>
+                <a:cs typeface="Georgia" pitchFamily="34" charset="-120"/>
+              </a:rPr>
+              <a:t> — none (incorruptible)</a:t>
+            </a:r>
+            <a:endParaRPr lang="en-US" sz="1200" dirty="0"/>
+          </a:p>
         </p:txBody>
       </p:sp>
       <p:sp>
         <p:nvSpPr>
           <p:cNvPr id="5" name="Text 3"/>
+          <p:cNvSpPr/>
+          <p:nvPr/>
+        </p:nvSpPr>
+        <p:spPr>
+          <a:xfrm>
+            <a:off x="634901" y="2242096"/>
+            <a:ext cx="8102798" cy="281880"/>
+          </a:xfrm>
+          <a:prstGeom prst="rect">
+            <a:avLst/>
+          </a:prstGeom>
+          <a:noFill/>
+          <a:ln/>
+        </p:spPr>
+        <p:txBody>
+          <a:bodyPr wrap="square" lIns="0" tIns="0" rIns="0" bIns="0" rtlCol="0" anchor="t"/>
+          <a:lstStyle/>
+          <a:p>
+            <a:pPr algn="l" marL="342900" indent="-342900">
+              <a:lnSpc>
+                <a:spcPts val="1620"/>
+              </a:lnSpc>
+              <a:spcAft>
+                <a:spcPts val="300"/>
+              </a:spcAft>
+              <a:buSzPct val="100000"/>
+              <a:buChar char="•"/>
+            </a:pPr>
+            <a:r>
+              <a:rPr lang="en-US" sz="1200" b="1" dirty="0">
+                <a:solidFill>
+                  <a:srgbClr val="1A1A1A"/>
+                </a:solidFill>
+                <a:latin typeface="Georgia" pitchFamily="34" charset="0"/>
+                <a:ea typeface="Georgia" pitchFamily="34" charset="-122"/>
+                <a:cs typeface="Georgia" pitchFamily="34" charset="-120"/>
+              </a:rPr>
+              <a:t>Side-by-side comparison.</a:t>
+            </a:r>
+            <a:pPr algn="l" indent="0" marL="0">
+              <a:lnSpc>
+                <a:spcPts val="1620"/>
+              </a:lnSpc>
+              <a:spcAft>
+                <a:spcPts val="300"/>
+              </a:spcAft>
+              <a:buNone/>
+            </a:pPr>
+            <a:r>
+              <a:rPr lang="en-US" sz="1200" dirty="0">
+                <a:solidFill>
+                  <a:srgbClr val="1A1A1A"/>
+                </a:solidFill>
+                <a:latin typeface="Georgia" pitchFamily="34" charset="0"/>
+                <a:ea typeface="Georgia" pitchFamily="34" charset="-122"/>
+                <a:cs typeface="Georgia" pitchFamily="34" charset="-120"/>
+              </a:rPr>
+              <a:t> Build with class on the board:</a:t>
+            </a:r>
+            <a:endParaRPr lang="en-US" sz="1200" dirty="0"/>
+          </a:p>
+        </p:txBody>
+      </p:sp>
+      <p:sp>
+        <p:nvSpPr>
+          <p:cNvPr id="6" name="Text 4"/>
           <p:cNvSpPr/>
           <p:nvPr/>
         </p:nvSpPr>
@@ -5349,7 +7158,7 @@
                 <a:ea typeface="Times New Roman" pitchFamily="34" charset="-122"/>
                 <a:cs typeface="Times New Roman" pitchFamily="34" charset="-120"/>
               </a:rPr>
-              <a:t>Teacher notes</a:t>
+              <a:t>Core (25 min) (cont.)</a:t>
             </a:r>
             <a:endParaRPr lang="en-US" sz="1800" dirty="0"/>
           </a:p>
@@ -5364,7 +7173,7 @@
         <p:spPr>
           <a:xfrm>
             <a:off x="406301" y="870942"/>
-            <a:ext cx="8498026" cy="639812"/>
+            <a:ext cx="8498026" cy="213271"/>
           </a:xfrm>
           <a:prstGeom prst="rect">
             <a:avLst/>
@@ -5389,29 +7198,6 @@
               <a:buNone/>
             </a:pPr>
             <a:r>
-              <a:rPr lang="en-US" sz="1200" dirty="0">
-                <a:solidFill>
-                  <a:srgbClr val="1A1A1A"/>
-                </a:solidFill>
-                <a:latin typeface="Georgia" pitchFamily="34" charset="0"/>
-                <a:ea typeface="Georgia" pitchFamily="34" charset="-122"/>
-                <a:cs typeface="Georgia" pitchFamily="34" charset="-120"/>
-              </a:rPr>
-              <a:t>– The asymmetry on perceptual mapping (Sāṅkhya YES, Greek NO) is the most distinctive cross-cultural point. Push students to notice it. – Some students will be tempted to conclude "Sāṅkhya is more sophisticated." Push back: </a:t>
-            </a:r>
-            <a:pPr algn="l" indent="0" marL="0">
-              <a:lnSpc>
-                <a:spcPts val="1680"/>
-              </a:lnSpc>
-              <a:spcBef>
-                <a:spcPts val="300"/>
-              </a:spcBef>
-              <a:spcAft>
-                <a:spcPts val="300"/>
-              </a:spcAft>
-              <a:buNone/>
-            </a:pPr>
-            <a:r>
               <a:rPr lang="en-US" sz="1200" i="1" dirty="0">
                 <a:solidFill>
                   <a:srgbClr val="1A1A1A"/>
@@ -5420,30 +7206,7 @@
                 <a:ea typeface="Georgia" pitchFamily="34" charset="-122"/>
                 <a:cs typeface="Georgia" pitchFamily="34" charset="-120"/>
               </a:rPr>
-              <a:t>more sophisticated in what way?</a:t>
-            </a:r>
-            <a:pPr algn="l" indent="0" marL="0">
-              <a:lnSpc>
-                <a:spcPts val="1680"/>
-              </a:lnSpc>
-              <a:spcBef>
-                <a:spcPts val="300"/>
-              </a:spcBef>
-              <a:spcAft>
-                <a:spcPts val="300"/>
-              </a:spcAft>
-              <a:buNone/>
-            </a:pPr>
-            <a:r>
-              <a:rPr lang="en-US" sz="1200" dirty="0">
-                <a:solidFill>
-                  <a:srgbClr val="1A1A1A"/>
-                </a:solidFill>
-                <a:latin typeface="Georgia" pitchFamily="34" charset="0"/>
-                <a:ea typeface="Georgia" pitchFamily="34" charset="-122"/>
-                <a:cs typeface="Georgia" pitchFamily="34" charset="-120"/>
-              </a:rPr>
-              <a:t> (More internal symmetry, yes. More predictive of chemical behaviour, no.)</a:t>
+              <a:t>Each row: Sāṅkhya (India) · Empedocles + Aristotle (Greece).</a:t>
             </a:r>
             <a:endParaRPr lang="en-US" sz="1200" dirty="0"/>
           </a:p>
